--- a/submission/Collab_AI_Builder_Cup_Submission.pptx
+++ b/submission/Collab_AI_Builder_Cup_Submission.pptx
@@ -16,6 +16,7 @@
     <p:sldId xmlns:r="http://schemas.openxmlformats.org/officeDocument/2006/relationships" id="261" r:id="Raabcb0ead37f4415"/>
     <p:sldId xmlns:r="http://schemas.openxmlformats.org/officeDocument/2006/relationships" id="262" r:id="R6401ff533cb3442a"/>
     <p:sldId xmlns:r="http://schemas.openxmlformats.org/officeDocument/2006/relationships" id="263" r:id="R1932408c88fd490f"/>
+    <p:sldId xmlns:ns0="http://schemas.openxmlformats.org/officeDocument/2006/relationships" id="270" ns0:id="rId27"/>
     <p:sldId xmlns:r="http://schemas.openxmlformats.org/officeDocument/2006/relationships" id="264" r:id="R48e5e01226ff41fb"/>
     <p:sldId xmlns:r="http://schemas.openxmlformats.org/officeDocument/2006/relationships" id="265" r:id="R5bc169fd78004ed4"/>
     <p:sldId xmlns:r="http://schemas.openxmlformats.org/officeDocument/2006/relationships" id="266" r:id="R0d803720f47c487f"/>
@@ -931,6 +932,76 @@
   </p:cSld>
   <p:clrMapOvr>
     <a:masterClrMapping xmlns:a="http://schemas.openxmlformats.org/drawingml/2006/main"/>
+  </p:clrMapOvr>
+</p:notes>
+</file>
+
+<file path=ppt/notesSlides/notesSlide15.xml><?xml version="1.0" encoding="utf-8"?>
+<p:notes xmlns:a="http://schemas.openxmlformats.org/drawingml/2006/main" xmlns:p="http://schemas.openxmlformats.org/presentationml/2006/main" xmlns:r="http://schemas.openxmlformats.org/officeDocument/2006/relationships">
+  <p:cSld>
+    <p:spTree>
+      <p:nvGrpSpPr>
+        <p:cNvPr id="1" name=""/>
+        <p:cNvGrpSpPr/>
+        <p:nvPr/>
+      </p:nvGrpSpPr>
+      <p:grpSpPr>
+        <a:xfrm>
+          <a:off x="0" y="0"/>
+          <a:ext cx="0" cy="0"/>
+          <a:chOff x="0" y="0"/>
+          <a:chExt cx="0" cy="0"/>
+        </a:xfrm>
+      </p:grpSpPr>
+      <p:sp>
+        <p:nvSpPr>
+          <p:cNvPr id="2" name="Slide Image Placeholder 1"/>
+          <p:cNvSpPr>
+            <a:spLocks noGrp="1"/>
+          </p:cNvSpPr>
+          <p:nvPr>
+            <p:ph type="sldImg" idx="2"/>
+          </p:nvPr>
+        </p:nvSpPr>
+        <p:spPr/>
+      </p:sp>
+      <p:sp>
+        <p:nvSpPr>
+          <p:cNvPr id="3" name="Notes Placeholder 2"/>
+          <p:cNvSpPr>
+            <a:spLocks noGrp="1"/>
+          </p:cNvSpPr>
+          <p:nvPr>
+            <p:ph type="body" idx="3" sz="quarter"/>
+          </p:nvPr>
+        </p:nvSpPr>
+        <p:spPr/>
+        <p:txBody>
+          <a:bodyPr/>
+          <a:lstStyle/>
+          <a:p>
+            <a:r>
+              <a:t>Implementation references: server/src/core (pickup pass, receipts, armor, deals) and web/verify.html. Payments are simulated test-mode objects; no real money moves.</a:t>
+            </a:r>
+          </a:p>
+        </p:txBody>
+      </p:sp>
+      <p:sp>
+        <p:nvSpPr>
+          <p:cNvPr id="4" name="Slide Number Placeholder 3"/>
+          <p:cNvSpPr>
+            <a:spLocks noGrp="1"/>
+          </p:cNvSpPr>
+          <p:nvPr>
+            <p:ph type="sldNum" idx="5" sz="quarter"/>
+          </p:nvPr>
+        </p:nvSpPr>
+        <p:spPr/>
+      </p:sp>
+    </p:spTree>
+  </p:cSld>
+  <p:clrMapOvr>
+    <a:masterClrMapping/>
   </p:clrMapOvr>
 </p:notes>
 </file>
@@ -9665,6 +9736,1179 @@
 </p:sld>
 </file>
 
+<file path=ppt/slides/slide15.xml><?xml version="1.0" encoding="utf-8"?>
+<p:sld xmlns:a="http://schemas.openxmlformats.org/drawingml/2006/main" xmlns:p="http://schemas.openxmlformats.org/presentationml/2006/main" xmlns:r="http://schemas.openxmlformats.org/officeDocument/2006/relationships">
+  <p:cSld>
+    <p:spTree>
+      <p:nvGrpSpPr>
+        <p:cNvPr id="1" name=""/>
+        <p:cNvGrpSpPr/>
+        <p:nvPr/>
+      </p:nvGrpSpPr>
+      <p:grpSpPr/>
+      <p:pic>
+        <p:nvPicPr>
+          <p:cNvPr id="139" name="Google Shape;116;p21"/>
+          <p:cNvPicPr>
+            <a:picLocks noChangeAspect="1"/>
+          </p:cNvPicPr>
+          <p:nvPr/>
+        </p:nvPicPr>
+        <p:blipFill rotWithShape="1">
+          <a:blip r:embed="rId2">
+            <a:alphaModFix/>
+          </a:blip>
+          <a:srcRect l="0" t="0" r="0" b="98001"/>
+          <a:stretch/>
+        </p:blipFill>
+        <p:spPr>
+          <a:xfrm>
+            <a:off x="0" y="5093562"/>
+            <a:ext cx="9144000" cy="54275"/>
+          </a:xfrm>
+          <a:prstGeom prst="rect">
+            <a:avLst/>
+          </a:prstGeom>
+          <a:ln>
+            <a:noFill/>
+          </a:ln>
+        </p:spPr>
+      </p:pic>
+      <p:pic>
+        <p:nvPicPr>
+          <p:cNvPr id="140" name="Google Shape;117;p21"/>
+          <p:cNvPicPr>
+            <a:picLocks noChangeAspect="1"/>
+          </p:cNvPicPr>
+          <p:nvPr/>
+        </p:nvPicPr>
+        <p:blipFill>
+          <a:blip r:embed="rId3">
+            <a:alphaModFix/>
+          </a:blip>
+          <a:stretch>
+            <a:fillRect l="0" t="0" r="0" b="0"/>
+          </a:stretch>
+        </p:blipFill>
+        <p:spPr>
+          <a:xfrm>
+            <a:off x="0" y="1"/>
+            <a:ext cx="9144000" cy="507359"/>
+          </a:xfrm>
+          <a:prstGeom prst="rect">
+            <a:avLst/>
+          </a:prstGeom>
+          <a:ln>
+            <a:noFill/>
+          </a:ln>
+        </p:spPr>
+      </p:pic>
+      <p:sp>
+        <p:nvSpPr>
+          <p:cNvPr id="118" name="Google Shape;118;p21">
+            <a:extLst>
+              <a:ext uri="{FF2B5EF4-FFF2-40B4-BE49-F238E27FC236}">
+                <a16:creationId xmlns:a16="http://schemas.microsoft.com/office/drawing/2014/main" id="{90FAB6E9-1B1E-4AC3-8107-7514F14484D4}"/>
+              </a:ext>
+            </a:extLst>
+          </p:cNvPr>
+          <p:cNvSpPr>
+            <a:spLocks noGrp="1"/>
+          </p:cNvSpPr>
+          <p:nvPr/>
+        </p:nvSpPr>
+        <p:spPr>
+          <a:xfrm>
+            <a:off x="-29250" y="5071875"/>
+            <a:ext cx="9173400" cy="97800"/>
+          </a:xfrm>
+          <a:prstGeom prst="rect">
+            <a:avLst/>
+          </a:prstGeom>
+          <a:solidFill>
+            <a:schemeClr val="dk1"/>
+          </a:solidFill>
+          <a:ln>
+            <a:noFill/>
+          </a:ln>
+        </p:spPr>
+        <p:txBody>
+          <a:bodyPr spcFirstLastPara="1" wrap="square" lIns="91425" tIns="91425" rIns="91425" bIns="91425" anchor="ctr">
+            <a:noAutofit/>
+          </a:bodyPr>
+          <a:lstStyle/>
+          <a:p>
+            <a:pPr marL="0" lvl="0" indent="0" algn="ctr">
+              <a:spcBef>
+                <a:spcPts val="0"/>
+              </a:spcBef>
+              <a:spcAft>
+                <a:spcPts val="0"/>
+              </a:spcAft>
+              <a:buNone/>
+            </a:pPr>
+            <a:r>
+              <a:t/>
+            </a:r>
+            <a:endParaRPr/>
+          </a:p>
+        </p:txBody>
+      </p:sp>
+      <p:sp>
+        <p:nvSpPr>
+          <p:cNvPr id="119" name="Google Shape;119;p21">
+            <a:extLst>
+              <a:ext uri="{FF2B5EF4-FFF2-40B4-BE49-F238E27FC236}">
+                <a16:creationId xmlns:a16="http://schemas.microsoft.com/office/drawing/2014/main" id="{70EF1269-C4C4-4ABB-BEEE-D0867E087EA7}"/>
+              </a:ext>
+            </a:extLst>
+          </p:cNvPr>
+          <p:cNvSpPr>
+            <a:spLocks noGrp="1"/>
+          </p:cNvSpPr>
+          <p:nvPr/>
+        </p:nvSpPr>
+        <p:spPr>
+          <a:xfrm>
+            <a:off x="266700" y="676275"/>
+            <a:ext cx="8524875" cy="542925"/>
+          </a:xfrm>
+          <a:prstGeom prst="rect">
+            <a:avLst/>
+          </a:prstGeom>
+          <a:noFill/>
+          <a:ln>
+            <a:noFill/>
+          </a:ln>
+        </p:spPr>
+        <p:txBody>
+          <a:bodyPr spcFirstLastPara="1" wrap="square" lIns="0" tIns="0" rIns="0" bIns="0" anchor="t">
+            <a:normAutofit fontScale="100000"/>
+          </a:bodyPr>
+          <a:lstStyle/>
+          <a:p>
+            <a:pPr marL="0" lvl="0" indent="0" algn="l">
+              <a:spcBef>
+                <a:spcPts val="0"/>
+              </a:spcBef>
+              <a:spcAft>
+                <a:spcPts val="0"/>
+              </a:spcAft>
+              <a:buNone/>
+              <a:defRPr sz="1725">
+                <a:solidFill>
+                  <a:srgbClr val="161616"/>
+                </a:solidFill>
+                <a:latin typeface="Arial"/>
+                <a:ea typeface="Arial"/>
+                <a:cs typeface="Arial"/>
+              </a:defRPr>
+            </a:pPr>
+            <a:r>
+              <a:rPr sz="1725">
+                <a:solidFill>
+                  <a:srgbClr val="161616"/>
+                </a:solidFill>
+                <a:latin typeface="Arial"/>
+                <a:ea typeface="Arial"/>
+                <a:cs typeface="Arial"/>
+              </a:rPr>
+              <a:t>Trust built in: fraud prevention</a:t>
+            </a:r>
+            <a:endParaRPr sz="1600">
+              <a:latin typeface="Google Sans Flex Medium"/>
+              <a:ea typeface="Google Sans Flex Medium"/>
+              <a:cs typeface="Google Sans Flex Medium"/>
+            </a:endParaRPr>
+          </a:p>
+        </p:txBody>
+      </p:sp>
+      <p:sp>
+        <p:nvSpPr>
+          <p:cNvPr id="200" name="trust-label-0">
+            <a:extLst>
+              <a:ext uri="{FF2B5EF4-FFF2-40B4-BE49-F238E27FC236}">
+                <a16:creationId xmlns:a16="http://schemas.microsoft.com/office/drawing/2014/main" id="{FD321D03-A498-4D36-A747-32F9961F2285}"/>
+              </a:ext>
+            </a:extLst>
+          </p:cNvPr>
+          <p:cNvSpPr>
+            <a:spLocks noGrp="1"/>
+          </p:cNvSpPr>
+          <p:nvPr/>
+        </p:nvSpPr>
+        <p:spPr>
+          <a:xfrm>
+            <a:off x="523875" y="1400175"/>
+            <a:ext cx="2714625" cy="285750"/>
+          </a:xfrm>
+          <a:prstGeom prst="rect">
+            <a:avLst/>
+          </a:prstGeom>
+          <a:noFill/>
+          <a:ln w="0">
+            <a:noFill/>
+          </a:ln>
+        </p:spPr>
+        <p:txBody>
+          <a:bodyPr wrap="square" lIns="0" tIns="0" rIns="0" bIns="0" anchor="t">
+            <a:normAutofit fontScale="100000"/>
+          </a:bodyPr>
+          <a:lstStyle/>
+          <a:p>
+            <a:pPr>
+              <a:defRPr sz="1500" b="1">
+                <a:solidFill>
+                  <a:srgbClr val="161616"/>
+                </a:solidFill>
+                <a:latin typeface="Arial"/>
+                <a:ea typeface="Arial"/>
+                <a:cs typeface="Arial"/>
+              </a:defRPr>
+            </a:pPr>
+            <a:r>
+              <a:rPr sz="1500" b="1">
+                <a:solidFill>
+                  <a:srgbClr val="161616"/>
+                </a:solidFill>
+                <a:latin typeface="Arial"/>
+                <a:ea typeface="Arial"/>
+                <a:cs typeface="Arial"/>
+              </a:rPr>
+              <a:t>Pickup/booking pass</a:t>
+            </a:r>
+          </a:p>
+        </p:txBody>
+      </p:sp>
+      <p:sp>
+        <p:nvSpPr>
+          <p:cNvPr id="201" name="trust-desc-0">
+            <a:extLst>
+              <a:ext uri="{FF2B5EF4-FFF2-40B4-BE49-F238E27FC236}">
+                <a16:creationId xmlns:a16="http://schemas.microsoft.com/office/drawing/2014/main" id="{D75CB656-661E-4542-A438-C941DA210235}"/>
+              </a:ext>
+            </a:extLst>
+          </p:cNvPr>
+          <p:cNvSpPr>
+            <a:spLocks noGrp="1"/>
+          </p:cNvSpPr>
+          <p:nvPr/>
+        </p:nvSpPr>
+        <p:spPr>
+          <a:xfrm>
+            <a:off x="3324225" y="1400175"/>
+            <a:ext cx="5238750" cy="400050"/>
+          </a:xfrm>
+          <a:prstGeom prst="rect">
+            <a:avLst/>
+          </a:prstGeom>
+          <a:noFill/>
+          <a:ln w="0">
+            <a:noFill/>
+          </a:ln>
+        </p:spPr>
+        <p:txBody>
+          <a:bodyPr wrap="square" lIns="0" tIns="0" rIns="0" bIns="0" anchor="t">
+            <a:normAutofit fontScale="100000"/>
+          </a:bodyPr>
+          <a:lstStyle/>
+          <a:p>
+            <a:pPr>
+              <a:defRPr sz="1350" b="0">
+                <a:solidFill>
+                  <a:srgbClr val="444444"/>
+                </a:solidFill>
+                <a:latin typeface="Arial"/>
+                <a:ea typeface="Arial"/>
+                <a:cs typeface="Arial"/>
+              </a:defRPr>
+            </a:pPr>
+            <a:r>
+              <a:rPr sz="1350" b="0">
+                <a:solidFill>
+                  <a:srgbClr val="444444"/>
+                </a:solidFill>
+                <a:latin typeface="Arial"/>
+                <a:ea typeface="Arial"/>
+                <a:cs typeface="Arial"/>
+              </a:rPr>
+              <a:t>Second scan refused; the seller is matched by account</a:t>
+            </a:r>
+          </a:p>
+        </p:txBody>
+      </p:sp>
+      <p:sp>
+        <p:nvSpPr>
+          <p:cNvPr id="202" name="trust-rule-0">
+            <a:extLst>
+              <a:ext uri="{FF2B5EF4-FFF2-40B4-BE49-F238E27FC236}">
+                <a16:creationId xmlns:a16="http://schemas.microsoft.com/office/drawing/2014/main" id="{FC78AC28-F000-4B80-B03D-BB2D9F6AC8B7}"/>
+              </a:ext>
+            </a:extLst>
+          </p:cNvPr>
+          <p:cNvSpPr>
+            <a:spLocks noGrp="1"/>
+          </p:cNvSpPr>
+          <p:nvPr/>
+        </p:nvSpPr>
+        <p:spPr>
+          <a:xfrm>
+            <a:off x="523875" y="1819275"/>
+            <a:ext cx="8048625" cy="9525"/>
+          </a:xfrm>
+          <a:prstGeom prst="rect">
+            <a:avLst/>
+          </a:prstGeom>
+          <a:solidFill>
+            <a:srgbClr val="D8D8D8"/>
+          </a:solidFill>
+          <a:ln w="0">
+            <a:noFill/>
+          </a:ln>
+        </p:spPr>
+      </p:sp>
+      <p:sp>
+        <p:nvSpPr>
+          <p:cNvPr id="203" name="trust-label-1">
+            <a:extLst>
+              <a:ext uri="{FF2B5EF4-FFF2-40B4-BE49-F238E27FC236}">
+                <a16:creationId xmlns:a16="http://schemas.microsoft.com/office/drawing/2014/main" id="{306D714D-3713-4E36-99CE-710E4EA69727}"/>
+              </a:ext>
+            </a:extLst>
+          </p:cNvPr>
+          <p:cNvSpPr>
+            <a:spLocks noGrp="1"/>
+          </p:cNvSpPr>
+          <p:nvPr/>
+        </p:nvSpPr>
+        <p:spPr>
+          <a:xfrm>
+            <a:off x="523875" y="1876425"/>
+            <a:ext cx="2714625" cy="285750"/>
+          </a:xfrm>
+          <a:prstGeom prst="rect">
+            <a:avLst/>
+          </a:prstGeom>
+          <a:noFill/>
+          <a:ln w="0">
+            <a:noFill/>
+          </a:ln>
+        </p:spPr>
+        <p:txBody>
+          <a:bodyPr wrap="square" lIns="0" tIns="0" rIns="0" bIns="0" anchor="t">
+            <a:normAutofit fontScale="100000"/>
+          </a:bodyPr>
+          <a:lstStyle/>
+          <a:p>
+            <a:pPr>
+              <a:defRPr sz="1500" b="1">
+                <a:solidFill>
+                  <a:srgbClr val="161616"/>
+                </a:solidFill>
+                <a:latin typeface="Arial"/>
+                <a:ea typeface="Arial"/>
+                <a:cs typeface="Arial"/>
+              </a:defRPr>
+            </a:pPr>
+            <a:r>
+              <a:rPr sz="1500" b="1">
+                <a:solidFill>
+                  <a:srgbClr val="161616"/>
+                </a:solidFill>
+                <a:latin typeface="Arial"/>
+                <a:ea typeface="Arial"/>
+                <a:cs typeface="Arial"/>
+              </a:rPr>
+              <a:t>Signed receipts</a:t>
+            </a:r>
+          </a:p>
+        </p:txBody>
+      </p:sp>
+      <p:sp>
+        <p:nvSpPr>
+          <p:cNvPr id="204" name="trust-desc-1">
+            <a:extLst>
+              <a:ext uri="{FF2B5EF4-FFF2-40B4-BE49-F238E27FC236}">
+                <a16:creationId xmlns:a16="http://schemas.microsoft.com/office/drawing/2014/main" id="{E4B36518-440C-4DCC-B26D-4C2FF3468013}"/>
+              </a:ext>
+            </a:extLst>
+          </p:cNvPr>
+          <p:cNvSpPr>
+            <a:spLocks noGrp="1"/>
+          </p:cNvSpPr>
+          <p:nvPr/>
+        </p:nvSpPr>
+        <p:spPr>
+          <a:xfrm>
+            <a:off x="3324225" y="1876425"/>
+            <a:ext cx="5238750" cy="400050"/>
+          </a:xfrm>
+          <a:prstGeom prst="rect">
+            <a:avLst/>
+          </a:prstGeom>
+          <a:noFill/>
+          <a:ln w="0">
+            <a:noFill/>
+          </a:ln>
+        </p:spPr>
+        <p:txBody>
+          <a:bodyPr wrap="square" lIns="0" tIns="0" rIns="0" bIns="0" anchor="t">
+            <a:normAutofit fontScale="100000"/>
+          </a:bodyPr>
+          <a:lstStyle/>
+          <a:p>
+            <a:pPr>
+              <a:defRPr sz="1350" b="0">
+                <a:solidFill>
+                  <a:srgbClr val="444444"/>
+                </a:solidFill>
+                <a:latin typeface="Arial"/>
+                <a:ea typeface="Arial"/>
+                <a:cs typeface="Arial"/>
+              </a:defRPr>
+            </a:pPr>
+            <a:r>
+              <a:rPr sz="1350" b="0">
+                <a:solidFill>
+                  <a:srgbClr val="444444"/>
+                </a:solidFill>
+                <a:latin typeface="Arial"/>
+                <a:ea typeface="Arial"/>
+                <a:cs typeface="Arial"/>
+              </a:rPr>
+              <a:t>Ed25519-signed; any edit fails. Demo: “Try changing the price”</a:t>
+            </a:r>
+          </a:p>
+        </p:txBody>
+      </p:sp>
+      <p:sp>
+        <p:nvSpPr>
+          <p:cNvPr id="205" name="trust-rule-1">
+            <a:extLst>
+              <a:ext uri="{FF2B5EF4-FFF2-40B4-BE49-F238E27FC236}">
+                <a16:creationId xmlns:a16="http://schemas.microsoft.com/office/drawing/2014/main" id="{7FC6007B-C4A5-4369-972C-B6F2D8576849}"/>
+              </a:ext>
+            </a:extLst>
+          </p:cNvPr>
+          <p:cNvSpPr>
+            <a:spLocks noGrp="1"/>
+          </p:cNvSpPr>
+          <p:nvPr/>
+        </p:nvSpPr>
+        <p:spPr>
+          <a:xfrm>
+            <a:off x="523875" y="2295525"/>
+            <a:ext cx="8048625" cy="9525"/>
+          </a:xfrm>
+          <a:prstGeom prst="rect">
+            <a:avLst/>
+          </a:prstGeom>
+          <a:solidFill>
+            <a:srgbClr val="D8D8D8"/>
+          </a:solidFill>
+          <a:ln w="0">
+            <a:noFill/>
+          </a:ln>
+        </p:spPr>
+      </p:sp>
+      <p:sp>
+        <p:nvSpPr>
+          <p:cNvPr id="206" name="trust-label-2">
+            <a:extLst>
+              <a:ext uri="{FF2B5EF4-FFF2-40B4-BE49-F238E27FC236}">
+                <a16:creationId xmlns:a16="http://schemas.microsoft.com/office/drawing/2014/main" id="{1E2ADF80-DE49-4419-90BF-B51735CF84D9}"/>
+              </a:ext>
+            </a:extLst>
+          </p:cNvPr>
+          <p:cNvSpPr>
+            <a:spLocks noGrp="1"/>
+          </p:cNvSpPr>
+          <p:nvPr/>
+        </p:nvSpPr>
+        <p:spPr>
+          <a:xfrm>
+            <a:off x="523875" y="2352675"/>
+            <a:ext cx="2714625" cy="285750"/>
+          </a:xfrm>
+          <a:prstGeom prst="rect">
+            <a:avLst/>
+          </a:prstGeom>
+          <a:noFill/>
+          <a:ln w="0">
+            <a:noFill/>
+          </a:ln>
+        </p:spPr>
+        <p:txBody>
+          <a:bodyPr wrap="square" lIns="0" tIns="0" rIns="0" bIns="0" anchor="t">
+            <a:normAutofit fontScale="100000"/>
+          </a:bodyPr>
+          <a:lstStyle/>
+          <a:p>
+            <a:pPr>
+              <a:defRPr sz="1500" b="1">
+                <a:solidFill>
+                  <a:srgbClr val="161616"/>
+                </a:solidFill>
+                <a:latin typeface="Arial"/>
+                <a:ea typeface="Arial"/>
+                <a:cs typeface="Arial"/>
+              </a:defRPr>
+            </a:pPr>
+            <a:r>
+              <a:rPr sz="1500" b="1">
+                <a:solidFill>
+                  <a:srgbClr val="161616"/>
+                </a:solidFill>
+                <a:latin typeface="Arial"/>
+                <a:ea typeface="Arial"/>
+                <a:cs typeface="Arial"/>
+              </a:rPr>
+              <a:t>Model Armor</a:t>
+            </a:r>
+          </a:p>
+        </p:txBody>
+      </p:sp>
+      <p:sp>
+        <p:nvSpPr>
+          <p:cNvPr id="207" name="trust-desc-2">
+            <a:extLst>
+              <a:ext uri="{FF2B5EF4-FFF2-40B4-BE49-F238E27FC236}">
+                <a16:creationId xmlns:a16="http://schemas.microsoft.com/office/drawing/2014/main" id="{E8FA3B8F-4642-416B-A5C4-555C93DD5035}"/>
+              </a:ext>
+            </a:extLst>
+          </p:cNvPr>
+          <p:cNvSpPr>
+            <a:spLocks noGrp="1"/>
+          </p:cNvSpPr>
+          <p:nvPr/>
+        </p:nvSpPr>
+        <p:spPr>
+          <a:xfrm>
+            <a:off x="3324225" y="2352675"/>
+            <a:ext cx="5238750" cy="400050"/>
+          </a:xfrm>
+          <a:prstGeom prst="rect">
+            <a:avLst/>
+          </a:prstGeom>
+          <a:noFill/>
+          <a:ln w="0">
+            <a:noFill/>
+          </a:ln>
+        </p:spPr>
+        <p:txBody>
+          <a:bodyPr wrap="square" lIns="0" tIns="0" rIns="0" bIns="0" anchor="t">
+            <a:normAutofit fontScale="100000"/>
+          </a:bodyPr>
+          <a:lstStyle/>
+          <a:p>
+            <a:pPr>
+              <a:defRPr sz="1350" b="0">
+                <a:solidFill>
+                  <a:srgbClr val="444444"/>
+                </a:solidFill>
+                <a:latin typeface="Arial"/>
+                <a:ea typeface="Arial"/>
+                <a:cs typeface="Arial"/>
+              </a:defRPr>
+            </a:pPr>
+            <a:r>
+              <a:rPr sz="1350" b="0">
+                <a:solidFill>
+                  <a:srgbClr val="444444"/>
+                </a:solidFill>
+                <a:latin typeface="Arial"/>
+                <a:ea typeface="Arial"/>
+                <a:cs typeface="Arial"/>
+              </a:rPr>
+              <a:t>Screens every message from other agents for prompt injection</a:t>
+            </a:r>
+          </a:p>
+        </p:txBody>
+      </p:sp>
+      <p:sp>
+        <p:nvSpPr>
+          <p:cNvPr id="208" name="trust-rule-2">
+            <a:extLst>
+              <a:ext uri="{FF2B5EF4-FFF2-40B4-BE49-F238E27FC236}">
+                <a16:creationId xmlns:a16="http://schemas.microsoft.com/office/drawing/2014/main" id="{5C17DB77-BE48-49C7-9722-FAEA26B2820B}"/>
+              </a:ext>
+            </a:extLst>
+          </p:cNvPr>
+          <p:cNvSpPr>
+            <a:spLocks noGrp="1"/>
+          </p:cNvSpPr>
+          <p:nvPr/>
+        </p:nvSpPr>
+        <p:spPr>
+          <a:xfrm>
+            <a:off x="523875" y="2771775"/>
+            <a:ext cx="8048625" cy="9525"/>
+          </a:xfrm>
+          <a:prstGeom prst="rect">
+            <a:avLst/>
+          </a:prstGeom>
+          <a:solidFill>
+            <a:srgbClr val="D8D8D8"/>
+          </a:solidFill>
+          <a:ln w="0">
+            <a:noFill/>
+          </a:ln>
+        </p:spPr>
+      </p:sp>
+      <p:sp>
+        <p:nvSpPr>
+          <p:cNvPr id="209" name="trust-label-3">
+            <a:extLst>
+              <a:ext uri="{FF2B5EF4-FFF2-40B4-BE49-F238E27FC236}">
+                <a16:creationId xmlns:a16="http://schemas.microsoft.com/office/drawing/2014/main" id="{6606DE32-A264-4C34-9AA0-D2608F344A0F}"/>
+              </a:ext>
+            </a:extLst>
+          </p:cNvPr>
+          <p:cNvSpPr>
+            <a:spLocks noGrp="1"/>
+          </p:cNvSpPr>
+          <p:nvPr/>
+        </p:nvSpPr>
+        <p:spPr>
+          <a:xfrm>
+            <a:off x="523875" y="2828925"/>
+            <a:ext cx="2714625" cy="285750"/>
+          </a:xfrm>
+          <a:prstGeom prst="rect">
+            <a:avLst/>
+          </a:prstGeom>
+          <a:noFill/>
+          <a:ln w="0">
+            <a:noFill/>
+          </a:ln>
+        </p:spPr>
+        <p:txBody>
+          <a:bodyPr wrap="square" lIns="0" tIns="0" rIns="0" bIns="0" anchor="t">
+            <a:normAutofit fontScale="100000"/>
+          </a:bodyPr>
+          <a:lstStyle/>
+          <a:p>
+            <a:pPr>
+              <a:defRPr sz="1500" b="1">
+                <a:solidFill>
+                  <a:srgbClr val="161616"/>
+                </a:solidFill>
+                <a:latin typeface="Arial"/>
+                <a:ea typeface="Arial"/>
+                <a:cs typeface="Arial"/>
+              </a:defRPr>
+            </a:pPr>
+            <a:r>
+              <a:rPr sz="1500" b="1">
+                <a:solidFill>
+                  <a:srgbClr val="161616"/>
+                </a:solidFill>
+                <a:latin typeface="Arial"/>
+                <a:ea typeface="Arial"/>
+                <a:cs typeface="Arial"/>
+              </a:rPr>
+              <a:t>No overselling</a:t>
+            </a:r>
+          </a:p>
+        </p:txBody>
+      </p:sp>
+      <p:sp>
+        <p:nvSpPr>
+          <p:cNvPr id="210" name="trust-desc-3">
+            <a:extLst>
+              <a:ext uri="{FF2B5EF4-FFF2-40B4-BE49-F238E27FC236}">
+                <a16:creationId xmlns:a16="http://schemas.microsoft.com/office/drawing/2014/main" id="{37D2A817-21B7-4522-A73F-056BD95468FA}"/>
+              </a:ext>
+            </a:extLst>
+          </p:cNvPr>
+          <p:cNvSpPr>
+            <a:spLocks noGrp="1"/>
+          </p:cNvSpPr>
+          <p:nvPr/>
+        </p:nvSpPr>
+        <p:spPr>
+          <a:xfrm>
+            <a:off x="3324225" y="2828925"/>
+            <a:ext cx="5238750" cy="400050"/>
+          </a:xfrm>
+          <a:prstGeom prst="rect">
+            <a:avLst/>
+          </a:prstGeom>
+          <a:noFill/>
+          <a:ln w="0">
+            <a:noFill/>
+          </a:ln>
+        </p:spPr>
+        <p:txBody>
+          <a:bodyPr wrap="square" lIns="0" tIns="0" rIns="0" bIns="0" anchor="t">
+            <a:normAutofit fontScale="100000"/>
+          </a:bodyPr>
+          <a:lstStyle/>
+          <a:p>
+            <a:pPr>
+              <a:defRPr sz="1350" b="0">
+                <a:solidFill>
+                  <a:srgbClr val="444444"/>
+                </a:solidFill>
+                <a:latin typeface="Arial"/>
+                <a:ea typeface="Arial"/>
+                <a:cs typeface="Arial"/>
+              </a:defRPr>
+            </a:pPr>
+            <a:r>
+              <a:rPr sz="1350" b="0">
+                <a:solidFill>
+                  <a:srgbClr val="444444"/>
+                </a:solidFill>
+                <a:latin typeface="Arial"/>
+                <a:ea typeface="Arial"/>
+                <a:cs typeface="Arial"/>
+              </a:rPr>
+              <a:t>Per-buyer limits and atomic stock holds</a:t>
+            </a:r>
+          </a:p>
+        </p:txBody>
+      </p:sp>
+      <p:sp>
+        <p:nvSpPr>
+          <p:cNvPr id="211" name="trust-rule-3">
+            <a:extLst>
+              <a:ext uri="{FF2B5EF4-FFF2-40B4-BE49-F238E27FC236}">
+                <a16:creationId xmlns:a16="http://schemas.microsoft.com/office/drawing/2014/main" id="{6DA57FBA-32BC-4A96-93AE-1893C01314E8}"/>
+              </a:ext>
+            </a:extLst>
+          </p:cNvPr>
+          <p:cNvSpPr>
+            <a:spLocks noGrp="1"/>
+          </p:cNvSpPr>
+          <p:nvPr/>
+        </p:nvSpPr>
+        <p:spPr>
+          <a:xfrm>
+            <a:off x="523875" y="3248025"/>
+            <a:ext cx="8048625" cy="9525"/>
+          </a:xfrm>
+          <a:prstGeom prst="rect">
+            <a:avLst/>
+          </a:prstGeom>
+          <a:solidFill>
+            <a:srgbClr val="D8D8D8"/>
+          </a:solidFill>
+          <a:ln w="0">
+            <a:noFill/>
+          </a:ln>
+        </p:spPr>
+      </p:sp>
+      <p:sp>
+        <p:nvSpPr>
+          <p:cNvPr id="212" name="trust-label-4">
+            <a:extLst>
+              <a:ext uri="{FF2B5EF4-FFF2-40B4-BE49-F238E27FC236}">
+                <a16:creationId xmlns:a16="http://schemas.microsoft.com/office/drawing/2014/main" id="{4DA1622D-B8DF-40A3-B2A6-CAEC0CD79027}"/>
+              </a:ext>
+            </a:extLst>
+          </p:cNvPr>
+          <p:cNvSpPr>
+            <a:spLocks noGrp="1"/>
+          </p:cNvSpPr>
+          <p:nvPr/>
+        </p:nvSpPr>
+        <p:spPr>
+          <a:xfrm>
+            <a:off x="523875" y="3305175"/>
+            <a:ext cx="2714625" cy="285750"/>
+          </a:xfrm>
+          <a:prstGeom prst="rect">
+            <a:avLst/>
+          </a:prstGeom>
+          <a:noFill/>
+          <a:ln w="0">
+            <a:noFill/>
+          </a:ln>
+        </p:spPr>
+        <p:txBody>
+          <a:bodyPr wrap="square" lIns="0" tIns="0" rIns="0" bIns="0" anchor="t">
+            <a:normAutofit fontScale="100000"/>
+          </a:bodyPr>
+          <a:lstStyle/>
+          <a:p>
+            <a:pPr>
+              <a:defRPr sz="1500" b="1">
+                <a:solidFill>
+                  <a:srgbClr val="161616"/>
+                </a:solidFill>
+                <a:latin typeface="Arial"/>
+                <a:ea typeface="Arial"/>
+                <a:cs typeface="Arial"/>
+              </a:defRPr>
+            </a:pPr>
+            <a:r>
+              <a:rPr sz="1500" b="1">
+                <a:solidFill>
+                  <a:srgbClr val="161616"/>
+                </a:solidFill>
+                <a:latin typeface="Arial"/>
+                <a:ea typeface="Arial"/>
+                <a:cs typeface="Arial"/>
+              </a:rPr>
+              <a:t>Seller record</a:t>
+            </a:r>
+          </a:p>
+        </p:txBody>
+      </p:sp>
+      <p:sp>
+        <p:nvSpPr>
+          <p:cNvPr id="213" name="trust-desc-4">
+            <a:extLst>
+              <a:ext uri="{FF2B5EF4-FFF2-40B4-BE49-F238E27FC236}">
+                <a16:creationId xmlns:a16="http://schemas.microsoft.com/office/drawing/2014/main" id="{4FA94DED-7A0B-410F-8873-6BBCB4B6A911}"/>
+              </a:ext>
+            </a:extLst>
+          </p:cNvPr>
+          <p:cNvSpPr>
+            <a:spLocks noGrp="1"/>
+          </p:cNvSpPr>
+          <p:nvPr/>
+        </p:nvSpPr>
+        <p:spPr>
+          <a:xfrm>
+            <a:off x="3324225" y="3305175"/>
+            <a:ext cx="5238750" cy="400050"/>
+          </a:xfrm>
+          <a:prstGeom prst="rect">
+            <a:avLst/>
+          </a:prstGeom>
+          <a:noFill/>
+          <a:ln w="0">
+            <a:noFill/>
+          </a:ln>
+        </p:spPr>
+        <p:txBody>
+          <a:bodyPr wrap="square" lIns="0" tIns="0" rIns="0" bIns="0" anchor="t">
+            <a:normAutofit fontScale="100000"/>
+          </a:bodyPr>
+          <a:lstStyle/>
+          <a:p>
+            <a:pPr>
+              <a:defRPr sz="1350" b="0">
+                <a:solidFill>
+                  <a:srgbClr val="444444"/>
+                </a:solidFill>
+                <a:latin typeface="Arial"/>
+                <a:ea typeface="Arial"/>
+                <a:cs typeface="Arial"/>
+              </a:defRPr>
+            </a:pPr>
+            <a:r>
+              <a:rPr sz="1350" b="0">
+                <a:solidFill>
+                  <a:srgbClr val="444444"/>
+                </a:solidFill>
+                <a:latin typeface="Arial"/>
+                <a:ea typeface="Arial"/>
+                <a:cs typeface="Arial"/>
+              </a:rPr>
+              <a:t>Public record counts problems from signed receipts</a:t>
+            </a:r>
+          </a:p>
+        </p:txBody>
+      </p:sp>
+      <p:sp>
+        <p:nvSpPr>
+          <p:cNvPr id="214" name="trust-rule-4">
+            <a:extLst>
+              <a:ext uri="{FF2B5EF4-FFF2-40B4-BE49-F238E27FC236}">
+                <a16:creationId xmlns:a16="http://schemas.microsoft.com/office/drawing/2014/main" id="{BD9C8BD4-63D6-4B52-A903-DCCE1D91C5D8}"/>
+              </a:ext>
+            </a:extLst>
+          </p:cNvPr>
+          <p:cNvSpPr>
+            <a:spLocks noGrp="1"/>
+          </p:cNvSpPr>
+          <p:nvPr/>
+        </p:nvSpPr>
+        <p:spPr>
+          <a:xfrm>
+            <a:off x="523875" y="3724275"/>
+            <a:ext cx="8048625" cy="9525"/>
+          </a:xfrm>
+          <a:prstGeom prst="rect">
+            <a:avLst/>
+          </a:prstGeom>
+          <a:solidFill>
+            <a:srgbClr val="D8D8D8"/>
+          </a:solidFill>
+          <a:ln w="0">
+            <a:noFill/>
+          </a:ln>
+        </p:spPr>
+      </p:sp>
+      <p:sp>
+        <p:nvSpPr>
+          <p:cNvPr id="215" name="trust-label-5">
+            <a:extLst>
+              <a:ext uri="{FF2B5EF4-FFF2-40B4-BE49-F238E27FC236}">
+                <a16:creationId xmlns:a16="http://schemas.microsoft.com/office/drawing/2014/main" id="{7F7FC35F-157B-4123-B8F2-874FA6076F18}"/>
+              </a:ext>
+            </a:extLst>
+          </p:cNvPr>
+          <p:cNvSpPr>
+            <a:spLocks noGrp="1"/>
+          </p:cNvSpPr>
+          <p:nvPr/>
+        </p:nvSpPr>
+        <p:spPr>
+          <a:xfrm>
+            <a:off x="523875" y="3781425"/>
+            <a:ext cx="2714625" cy="285750"/>
+          </a:xfrm>
+          <a:prstGeom prst="rect">
+            <a:avLst/>
+          </a:prstGeom>
+          <a:noFill/>
+          <a:ln w="0">
+            <a:noFill/>
+          </a:ln>
+        </p:spPr>
+        <p:txBody>
+          <a:bodyPr wrap="square" lIns="0" tIns="0" rIns="0" bIns="0" anchor="t">
+            <a:normAutofit fontScale="100000"/>
+          </a:bodyPr>
+          <a:lstStyle/>
+          <a:p>
+            <a:pPr>
+              <a:defRPr sz="1500" b="1">
+                <a:solidFill>
+                  <a:srgbClr val="161616"/>
+                </a:solidFill>
+                <a:latin typeface="Arial"/>
+                <a:ea typeface="Arial"/>
+                <a:cs typeface="Arial"/>
+              </a:defRPr>
+            </a:pPr>
+            <a:r>
+              <a:rPr sz="1500" b="1">
+                <a:solidFill>
+                  <a:srgbClr val="161616"/>
+                </a:solidFill>
+                <a:latin typeface="Arial"/>
+                <a:ea typeface="Arial"/>
+                <a:cs typeface="Arial"/>
+              </a:rPr>
+              <a:t>App Check</a:t>
+            </a:r>
+          </a:p>
+        </p:txBody>
+      </p:sp>
+      <p:sp>
+        <p:nvSpPr>
+          <p:cNvPr id="216" name="trust-desc-5">
+            <a:extLst>
+              <a:ext uri="{FF2B5EF4-FFF2-40B4-BE49-F238E27FC236}">
+                <a16:creationId xmlns:a16="http://schemas.microsoft.com/office/drawing/2014/main" id="{2029E64E-53AE-495C-8A70-0255D58920E6}"/>
+              </a:ext>
+            </a:extLst>
+          </p:cNvPr>
+          <p:cNvSpPr>
+            <a:spLocks noGrp="1"/>
+          </p:cNvSpPr>
+          <p:nvPr/>
+        </p:nvSpPr>
+        <p:spPr>
+          <a:xfrm>
+            <a:off x="3324225" y="3781425"/>
+            <a:ext cx="5238750" cy="400050"/>
+          </a:xfrm>
+          <a:prstGeom prst="rect">
+            <a:avLst/>
+          </a:prstGeom>
+          <a:noFill/>
+          <a:ln w="0">
+            <a:noFill/>
+          </a:ln>
+        </p:spPr>
+        <p:txBody>
+          <a:bodyPr wrap="square" lIns="0" tIns="0" rIns="0" bIns="0" anchor="t">
+            <a:normAutofit fontScale="100000"/>
+          </a:bodyPr>
+          <a:lstStyle/>
+          <a:p>
+            <a:pPr>
+              <a:defRPr sz="1350" b="0">
+                <a:solidFill>
+                  <a:srgbClr val="444444"/>
+                </a:solidFill>
+                <a:latin typeface="Arial"/>
+                <a:ea typeface="Arial"/>
+                <a:cs typeface="Arial"/>
+              </a:defRPr>
+            </a:pPr>
+            <a:r>
+              <a:rPr sz="1350" b="0">
+                <a:solidFill>
+                  <a:srgbClr val="444444"/>
+                </a:solidFill>
+                <a:latin typeface="Arial"/>
+                <a:ea typeface="Arial"/>
+                <a:cs typeface="Arial"/>
+              </a:rPr>
+              <a:t>Checks every write; unverified browsers are rate-limited</a:t>
+            </a:r>
+          </a:p>
+        </p:txBody>
+      </p:sp>
+      <p:sp>
+        <p:nvSpPr>
+          <p:cNvPr id="217" name="trust-rule-5">
+            <a:extLst>
+              <a:ext uri="{FF2B5EF4-FFF2-40B4-BE49-F238E27FC236}">
+                <a16:creationId xmlns:a16="http://schemas.microsoft.com/office/drawing/2014/main" id="{6C65EBE2-8D16-4D24-BFD7-953FDFE208D6}"/>
+              </a:ext>
+            </a:extLst>
+          </p:cNvPr>
+          <p:cNvSpPr>
+            <a:spLocks noGrp="1"/>
+          </p:cNvSpPr>
+          <p:nvPr/>
+        </p:nvSpPr>
+        <p:spPr>
+          <a:xfrm>
+            <a:off x="523875" y="4200525"/>
+            <a:ext cx="8048625" cy="9525"/>
+          </a:xfrm>
+          <a:prstGeom prst="rect">
+            <a:avLst/>
+          </a:prstGeom>
+          <a:solidFill>
+            <a:srgbClr val="D8D8D8"/>
+          </a:solidFill>
+          <a:ln w="0">
+            <a:noFill/>
+          </a:ln>
+        </p:spPr>
+      </p:sp>
+      <p:sp>
+        <p:nvSpPr>
+          <p:cNvPr id="218" name="trust-label-6">
+            <a:extLst>
+              <a:ext uri="{FF2B5EF4-FFF2-40B4-BE49-F238E27FC236}">
+                <a16:creationId xmlns:a16="http://schemas.microsoft.com/office/drawing/2014/main" id="{ADEB4F0F-A210-41C3-8C88-79CE64E51AA9}"/>
+              </a:ext>
+            </a:extLst>
+          </p:cNvPr>
+          <p:cNvSpPr>
+            <a:spLocks noGrp="1"/>
+          </p:cNvSpPr>
+          <p:nvPr/>
+        </p:nvSpPr>
+        <p:spPr>
+          <a:xfrm>
+            <a:off x="523875" y="4257675"/>
+            <a:ext cx="2714625" cy="285750"/>
+          </a:xfrm>
+          <a:prstGeom prst="rect">
+            <a:avLst/>
+          </a:prstGeom>
+          <a:noFill/>
+          <a:ln w="0">
+            <a:noFill/>
+          </a:ln>
+        </p:spPr>
+        <p:txBody>
+          <a:bodyPr wrap="square" lIns="0" tIns="0" rIns="0" bIns="0" anchor="t">
+            <a:normAutofit fontScale="100000"/>
+          </a:bodyPr>
+          <a:lstStyle/>
+          <a:p>
+            <a:pPr>
+              <a:defRPr sz="1500" b="1">
+                <a:solidFill>
+                  <a:srgbClr val="161616"/>
+                </a:solidFill>
+                <a:latin typeface="Arial"/>
+                <a:ea typeface="Arial"/>
+                <a:cs typeface="Arial"/>
+              </a:defRPr>
+            </a:pPr>
+            <a:r>
+              <a:rPr sz="1500" b="1">
+                <a:solidFill>
+                  <a:srgbClr val="161616"/>
+                </a:solidFill>
+                <a:latin typeface="Arial"/>
+                <a:ea typeface="Arial"/>
+                <a:cs typeface="Arial"/>
+              </a:rPr>
+              <a:t>Demo payments</a:t>
+            </a:r>
+          </a:p>
+        </p:txBody>
+      </p:sp>
+      <p:sp>
+        <p:nvSpPr>
+          <p:cNvPr id="219" name="trust-desc-6">
+            <a:extLst>
+              <a:ext uri="{FF2B5EF4-FFF2-40B4-BE49-F238E27FC236}">
+                <a16:creationId xmlns:a16="http://schemas.microsoft.com/office/drawing/2014/main" id="{D15180C2-1A42-424E-96A1-79006A17B70A}"/>
+              </a:ext>
+            </a:extLst>
+          </p:cNvPr>
+          <p:cNvSpPr>
+            <a:spLocks noGrp="1"/>
+          </p:cNvSpPr>
+          <p:nvPr/>
+        </p:nvSpPr>
+        <p:spPr>
+          <a:xfrm>
+            <a:off x="3324225" y="4257675"/>
+            <a:ext cx="5238750" cy="400050"/>
+          </a:xfrm>
+          <a:prstGeom prst="rect">
+            <a:avLst/>
+          </a:prstGeom>
+          <a:noFill/>
+          <a:ln w="0">
+            <a:noFill/>
+          </a:ln>
+        </p:spPr>
+        <p:txBody>
+          <a:bodyPr wrap="square" lIns="0" tIns="0" rIns="0" bIns="0" anchor="t">
+            <a:normAutofit fontScale="100000"/>
+          </a:bodyPr>
+          <a:lstStyle/>
+          <a:p>
+            <a:pPr>
+              <a:defRPr sz="1350" b="0">
+                <a:solidFill>
+                  <a:srgbClr val="444444"/>
+                </a:solidFill>
+                <a:latin typeface="Arial"/>
+                <a:ea typeface="Arial"/>
+                <a:cs typeface="Arial"/>
+              </a:defRPr>
+            </a:pPr>
+            <a:r>
+              <a:rPr sz="1350" b="0">
+                <a:solidFill>
+                  <a:srgbClr val="444444"/>
+                </a:solidFill>
+                <a:latin typeface="Arial"/>
+                <a:ea typeface="Arial"/>
+                <a:cs typeface="Arial"/>
+              </a:rPr>
+              <a:t>Clearly tagged test mode; no real money moves</a:t>
+            </a:r>
+          </a:p>
+        </p:txBody>
+      </p:sp>
+    </p:spTree>
+  </p:cSld>
+  <p:clrMapOvr>
+    <a:masterClrMapping/>
+  </p:clrMapOvr>
+</p:sld>
+</file>
+
 <file path=ppt/slides/slide2.xml><?xml version="1.0" encoding="utf-8"?>
 <p:sld xmlns:p="http://schemas.openxmlformats.org/presentationml/2006/main">
   <p:cSld>

--- a/submission/Collab_AI_Builder_Cup_Submission.pptx
+++ b/submission/Collab_AI_Builder_Cup_Submission.pptx
@@ -7067,14 +7067,14 @@
       </p:grpSpPr>
       <p:pic>
         <p:nvPicPr>
-          <p:cNvPr id="146" name="Google Shape;132;p23"/>
+          <p:cNvPr id="135" name="Google Shape;124;p22"/>
           <p:cNvPicPr>
             <a:picLocks xmlns:a="http://schemas.openxmlformats.org/drawingml/2006/main" noChangeAspect="1"/>
           </p:cNvPicPr>
           <p:nvPr/>
         </p:nvPicPr>
         <p:blipFill rotWithShape="1">
-          <a:blip xmlns:r="http://schemas.openxmlformats.org/officeDocument/2006/relationships" xmlns:a="http://schemas.openxmlformats.org/drawingml/2006/main" r:embed="R79519ee31e874006">
+          <a:blip xmlns:r="http://schemas.openxmlformats.org/officeDocument/2006/relationships" xmlns:a="http://schemas.openxmlformats.org/drawingml/2006/main" r:embed="R3ca10b6ae21e4883">
             <a:alphaModFix/>
           </a:blip>
           <a:srcRect xmlns:a="http://schemas.openxmlformats.org/drawingml/2006/main" l="0" t="0" r="0" b="98001"/>
@@ -7095,14 +7095,14 @@
       </p:pic>
       <p:pic>
         <p:nvPicPr>
-          <p:cNvPr id="147" name="Google Shape;133;p23"/>
+          <p:cNvPr id="136" name="Google Shape;125;p22"/>
           <p:cNvPicPr>
             <a:picLocks xmlns:a="http://schemas.openxmlformats.org/drawingml/2006/main" noChangeAspect="1"/>
           </p:cNvPicPr>
           <p:nvPr/>
         </p:nvPicPr>
         <p:blipFill>
-          <a:blip xmlns:r="http://schemas.openxmlformats.org/officeDocument/2006/relationships" xmlns:a="http://schemas.openxmlformats.org/drawingml/2006/main" r:embed="Rd30ca69c078f4a1e">
+          <a:blip xmlns:r="http://schemas.openxmlformats.org/officeDocument/2006/relationships" xmlns:a="http://schemas.openxmlformats.org/drawingml/2006/main" r:embed="R212c670779284802">
             <a:alphaModFix/>
           </a:blip>
           <a:stretch xmlns:a="http://schemas.openxmlformats.org/drawingml/2006/main">
@@ -7124,10 +7124,10 @@
       </p:pic>
       <p:sp>
         <p:nvSpPr>
-          <p:cNvPr id="134" name="Google Shape;134;p23">
-            <a:extLst xmlns:a="http://schemas.openxmlformats.org/drawingml/2006/main">
-              <a:ext uri="{FF2B5EF4-FFF2-40B4-BE49-F238E27FC236}">
-                <a16:creationId xmlns:a16="http://schemas.microsoft.com/office/drawing/2014/main" id="{1649D3CF-6B28-400D-B741-84EA3BF3BE5C}"/>
+          <p:cNvPr id="126" name="Google Shape;126;p22">
+            <a:extLst xmlns:a="http://schemas.openxmlformats.org/drawingml/2006/main">
+              <a:ext uri="{FF2B5EF4-FFF2-40B4-BE49-F238E27FC236}">
+                <a16:creationId xmlns:a16="http://schemas.microsoft.com/office/drawing/2014/main" id="{4DD127D4-39C9-4B0B-835B-9667C17AD6BD}"/>
               </a:ext>
             </a:extLst>
           </p:cNvPr>
@@ -7175,10 +7175,10 @@
       </p:sp>
       <p:sp>
         <p:nvSpPr>
-          <p:cNvPr id="135" name="Google Shape;135;p23">
-            <a:extLst xmlns:a="http://schemas.openxmlformats.org/drawingml/2006/main">
-              <a:ext uri="{FF2B5EF4-FFF2-40B4-BE49-F238E27FC236}">
-                <a16:creationId xmlns:a16="http://schemas.microsoft.com/office/drawing/2014/main" id="{F9EE808A-B1C2-4A86-8714-8A792D3DA9CB}"/>
+          <p:cNvPr id="127" name="Google Shape;127;p22">
+            <a:extLst xmlns:a="http://schemas.openxmlformats.org/drawingml/2006/main">
+              <a:ext uri="{FF2B5EF4-FFF2-40B4-BE49-F238E27FC236}">
+                <a16:creationId xmlns:a16="http://schemas.microsoft.com/office/drawing/2014/main" id="{D6477BCC-1CF9-43DA-9A50-66B6AB8F6633}"/>
               </a:ext>
             </a:extLst>
           </p:cNvPr>
@@ -7232,7 +7232,7 @@
                 <a:ea typeface="Arial"/>
                 <a:cs typeface="Arial"/>
               </a:rPr>
-              <a:t>Production prototype evidence</a:t>
+              <a:t>Prototype cost evidence</a:t>
             </a:r>
             <a:endParaRPr sz="1600">
               <a:latin typeface="Google Sans Flex Medium"/>
@@ -7244,22 +7244,22 @@
       </p:sp>
       <p:sp>
         <p:nvSpPr>
-          <p:cNvPr id="138" name="prod-sub">
-            <a:extLst xmlns:a="http://schemas.openxmlformats.org/drawingml/2006/main">
-              <a:ext uri="{FF2B5EF4-FFF2-40B4-BE49-F238E27FC236}">
-                <a16:creationId xmlns:a16="http://schemas.microsoft.com/office/drawing/2014/main" id="{3CBDC816-1AC0-4FAA-AC7D-6946AE301FC1}"/>
-              </a:ext>
-            </a:extLst>
-          </p:cNvPr>
-          <p:cNvSpPr>
-            <a:spLocks xmlns:a="http://schemas.openxmlformats.org/drawingml/2006/main" noGrp="1"/>
-          </p:cNvSpPr>
-          <p:nvPr/>
-        </p:nvSpPr>
-        <p:spPr>
-          <a:xfrm xmlns:a="http://schemas.openxmlformats.org/drawingml/2006/main">
-            <a:off x="523875" y="1409700"/>
-            <a:ext cx="8096250" cy="333375"/>
+          <p:cNvPr id="130" name="cost-big">
+            <a:extLst xmlns:a="http://schemas.openxmlformats.org/drawingml/2006/main">
+              <a:ext uri="{FF2B5EF4-FFF2-40B4-BE49-F238E27FC236}">
+                <a16:creationId xmlns:a16="http://schemas.microsoft.com/office/drawing/2014/main" id="{A4448724-A993-44AB-BC5F-589E58BCAD30}"/>
+              </a:ext>
+            </a:extLst>
+          </p:cNvPr>
+          <p:cNvSpPr>
+            <a:spLocks xmlns:a="http://schemas.openxmlformats.org/drawingml/2006/main" noGrp="1"/>
+          </p:cNvSpPr>
+          <p:nvPr/>
+        </p:nvSpPr>
+        <p:spPr>
+          <a:xfrm xmlns:a="http://schemas.openxmlformats.org/drawingml/2006/main">
+            <a:off x="523875" y="1524000"/>
+            <a:ext cx="3619500" cy="781050"/>
           </a:xfrm>
           <a:prstGeom xmlns:a="http://schemas.openxmlformats.org/drawingml/2006/main" prst="rect">
             <a:avLst/>
@@ -7276,9 +7276,9 @@
           <a:lstStyle xmlns:a="http://schemas.openxmlformats.org/drawingml/2006/main"/>
           <a:p xmlns:a="http://schemas.openxmlformats.org/drawingml/2006/main">
             <a:pPr>
-              <a:defRPr sz="1650" b="1">
-                <a:solidFill>
-                  <a:srgbClr val="161616"/>
+              <a:defRPr sz="4350" b="1">
+                <a:solidFill>
+                  <a:srgbClr val="1A73E8"/>
                 </a:solidFill>
                 <a:latin typeface="Arial"/>
                 <a:ea typeface="Arial"/>
@@ -7286,70 +7286,37 @@
               </a:defRPr>
             </a:pPr>
             <a:r>
-              <a:rPr sz="1650" b="1">
-                <a:solidFill>
-                  <a:srgbClr val="161616"/>
+              <a:rPr sz="4350" b="1">
+                <a:solidFill>
+                  <a:srgbClr val="1A73E8"/>
                 </a:solidFill>
                 <a:latin typeface="Arial"/>
                 <a:ea typeface="Arial"/>
                 <a:cs typeface="Arial"/>
               </a:rPr>
-              <a:t>Paid listing-origin order on the deployed app, 15 Oct 2026</a:t>
+              <a:t>$1.10</a:t>
             </a:r>
           </a:p>
         </p:txBody>
       </p:sp>
       <p:sp>
         <p:nvSpPr>
-          <p:cNvPr id="139" name="prod-deal">
-            <a:extLst xmlns:a="http://schemas.openxmlformats.org/drawingml/2006/main">
-              <a:ext uri="{FF2B5EF4-FFF2-40B4-BE49-F238E27FC236}">
-                <a16:creationId xmlns:a16="http://schemas.microsoft.com/office/drawing/2014/main" id="{6AFB6FA9-F8B7-46A3-A086-2EEF97E0D49D}"/>
-              </a:ext>
-            </a:extLst>
-          </p:cNvPr>
-          <p:cNvSpPr>
-            <a:spLocks xmlns:a="http://schemas.openxmlformats.org/drawingml/2006/main" noGrp="1"/>
-          </p:cNvSpPr>
-          <p:nvPr/>
-        </p:nvSpPr>
-        <p:spPr>
-          <a:xfrm xmlns:a="http://schemas.openxmlformats.org/drawingml/2006/main">
-            <a:off x="523875" y="1971675"/>
-            <a:ext cx="3810000" cy="2171700"/>
-          </a:xfrm>
-          <a:prstGeom xmlns:a="http://schemas.openxmlformats.org/drawingml/2006/main" prst="rect">
-            <a:avLst/>
-          </a:prstGeom>
-          <a:solidFill xmlns:a="http://schemas.openxmlformats.org/drawingml/2006/main">
-            <a:srgbClr val="FFFFFF"/>
-          </a:solidFill>
-          <a:ln xmlns:a="http://schemas.openxmlformats.org/drawingml/2006/main" w="14288">
-            <a:solidFill>
-              <a:srgbClr val="333333"/>
-            </a:solidFill>
-            <a:prstDash val="solid"/>
-          </a:ln>
-        </p:spPr>
-      </p:sp>
-      <p:sp>
-        <p:nvSpPr>
-          <p:cNvPr id="140" name="prod-deal-head">
-            <a:extLst xmlns:a="http://schemas.openxmlformats.org/drawingml/2006/main">
-              <a:ext uri="{FF2B5EF4-FFF2-40B4-BE49-F238E27FC236}">
-                <a16:creationId xmlns:a16="http://schemas.microsoft.com/office/drawing/2014/main" id="{7138C8CF-1F61-4583-99C1-6EF1C2DF1055}"/>
-              </a:ext>
-            </a:extLst>
-          </p:cNvPr>
-          <p:cNvSpPr>
-            <a:spLocks xmlns:a="http://schemas.openxmlformats.org/drawingml/2006/main" noGrp="1"/>
-          </p:cNvSpPr>
-          <p:nvPr/>
-        </p:nvSpPr>
-        <p:spPr>
-          <a:xfrm xmlns:a="http://schemas.openxmlformats.org/drawingml/2006/main">
-            <a:off x="685800" y="2133600"/>
-            <a:ext cx="3476625" cy="285750"/>
+          <p:cNvPr id="131" name="cost-desc">
+            <a:extLst xmlns:a="http://schemas.openxmlformats.org/drawingml/2006/main">
+              <a:ext uri="{FF2B5EF4-FFF2-40B4-BE49-F238E27FC236}">
+                <a16:creationId xmlns:a16="http://schemas.microsoft.com/office/drawing/2014/main" id="{3A8C5B21-D39A-4D74-BA4C-8778449E8312}"/>
+              </a:ext>
+            </a:extLst>
+          </p:cNvPr>
+          <p:cNvSpPr>
+            <a:spLocks xmlns:a="http://schemas.openxmlformats.org/drawingml/2006/main" noGrp="1"/>
+          </p:cNvSpPr>
+          <p:nvPr/>
+        </p:nvSpPr>
+        <p:spPr>
+          <a:xfrm xmlns:a="http://schemas.openxmlformats.org/drawingml/2006/main">
+            <a:off x="523875" y="2333625"/>
+            <a:ext cx="5905500" cy="638175"/>
           </a:xfrm>
           <a:prstGeom xmlns:a="http://schemas.openxmlformats.org/drawingml/2006/main" prst="rect">
             <a:avLst/>
@@ -7366,7 +7333,7 @@
           <a:lstStyle xmlns:a="http://schemas.openxmlformats.org/drawingml/2006/main"/>
           <a:p xmlns:a="http://schemas.openxmlformats.org/drawingml/2006/main">
             <a:pPr>
-              <a:defRPr sz="1500" b="1">
+              <a:defRPr sz="1725" b="0">
                 <a:solidFill>
                   <a:srgbClr val="161616"/>
                 </a:solidFill>
@@ -7376,7 +7343,7 @@
               </a:defRPr>
             </a:pPr>
             <a:r>
-              <a:rPr sz="1500" b="1">
+              <a:rPr sz="1725" b="0">
                 <a:solidFill>
                   <a:srgbClr val="161616"/>
                 </a:solidFill>
@@ -7384,29 +7351,59 @@
                 <a:ea typeface="Arial"/>
                 <a:cs typeface="Arial"/>
               </a:rPr>
-              <a:t>Buyer’s deal card</a:t>
+              <a:t>Estimated Gemini token cost for the full local benchmark</a:t>
             </a:r>
           </a:p>
         </p:txBody>
       </p:sp>
       <p:sp>
         <p:nvSpPr>
-          <p:cNvPr id="141" name="prod-deal-body">
-            <a:extLst xmlns:a="http://schemas.openxmlformats.org/drawingml/2006/main">
-              <a:ext uri="{FF2B5EF4-FFF2-40B4-BE49-F238E27FC236}">
-                <a16:creationId xmlns:a16="http://schemas.microsoft.com/office/drawing/2014/main" id="{852BCAA7-8BDD-4A3B-B353-FB8C2E4BBD1F}"/>
-              </a:ext>
-            </a:extLst>
-          </p:cNvPr>
-          <p:cNvSpPr>
-            <a:spLocks xmlns:a="http://schemas.openxmlformats.org/drawingml/2006/main" noGrp="1"/>
-          </p:cNvSpPr>
-          <p:nvPr/>
-        </p:nvSpPr>
-        <p:spPr>
-          <a:xfrm xmlns:a="http://schemas.openxmlformats.org/drawingml/2006/main">
-            <a:off x="685800" y="2600325"/>
-            <a:ext cx="3476625" cy="1352550"/>
+          <p:cNvPr id="132" name="cost-rule">
+            <a:extLst xmlns:a="http://schemas.openxmlformats.org/drawingml/2006/main">
+              <a:ext uri="{FF2B5EF4-FFF2-40B4-BE49-F238E27FC236}">
+                <a16:creationId xmlns:a16="http://schemas.microsoft.com/office/drawing/2014/main" id="{860F91EC-8300-43C6-AFDA-B11307D8BAA0}"/>
+              </a:ext>
+            </a:extLst>
+          </p:cNvPr>
+          <p:cNvSpPr>
+            <a:spLocks xmlns:a="http://schemas.openxmlformats.org/drawingml/2006/main" noGrp="1"/>
+          </p:cNvSpPr>
+          <p:nvPr/>
+        </p:nvSpPr>
+        <p:spPr>
+          <a:xfrm xmlns:a="http://schemas.openxmlformats.org/drawingml/2006/main">
+            <a:off x="523875" y="3181350"/>
+            <a:ext cx="8048625" cy="19050"/>
+          </a:xfrm>
+          <a:prstGeom xmlns:a="http://schemas.openxmlformats.org/drawingml/2006/main" prst="rect">
+            <a:avLst/>
+          </a:prstGeom>
+          <a:solidFill xmlns:a="http://schemas.openxmlformats.org/drawingml/2006/main">
+            <a:srgbClr val="B9B9B9"/>
+          </a:solidFill>
+          <a:ln xmlns:a="http://schemas.openxmlformats.org/drawingml/2006/main" w="0">
+            <a:noFill/>
+          </a:ln>
+        </p:spPr>
+      </p:sp>
+      <p:sp>
+        <p:nvSpPr>
+          <p:cNvPr id="133" name="cost-calls">
+            <a:extLst xmlns:a="http://schemas.openxmlformats.org/drawingml/2006/main">
+              <a:ext uri="{FF2B5EF4-FFF2-40B4-BE49-F238E27FC236}">
+                <a16:creationId xmlns:a16="http://schemas.microsoft.com/office/drawing/2014/main" id="{622342BB-180E-4E3E-80D2-193ACD547C15}"/>
+              </a:ext>
+            </a:extLst>
+          </p:cNvPr>
+          <p:cNvSpPr>
+            <a:spLocks xmlns:a="http://schemas.openxmlformats.org/drawingml/2006/main" noGrp="1"/>
+          </p:cNvSpPr>
+          <p:nvPr/>
+        </p:nvSpPr>
+        <p:spPr>
+          <a:xfrm xmlns:a="http://schemas.openxmlformats.org/drawingml/2006/main">
+            <a:off x="523875" y="3343275"/>
+            <a:ext cx="7715250" cy="314325"/>
           </a:xfrm>
           <a:prstGeom xmlns:a="http://schemas.openxmlformats.org/drawingml/2006/main" prst="rect">
             <a:avLst/>
@@ -7423,7 +7420,7 @@
           <a:lstStyle xmlns:a="http://schemas.openxmlformats.org/drawingml/2006/main"/>
           <a:p xmlns:a="http://schemas.openxmlformats.org/drawingml/2006/main">
             <a:pPr>
-              <a:defRPr sz="1575" b="0">
+              <a:defRPr sz="1725" b="1">
                 <a:solidFill>
                   <a:srgbClr val="161616"/>
                 </a:solidFill>
@@ -7433,7 +7430,7 @@
               </a:defRPr>
             </a:pPr>
             <a:r>
-              <a:rPr sz="1575" b="0">
+              <a:rPr sz="1725" b="1">
                 <a:solidFill>
                   <a:srgbClr val="161616"/>
                 </a:solidFill>
@@ -7441,131 +7438,29 @@
                 <a:ea typeface="Arial"/>
                 <a:cs typeface="Arial"/>
               </a:rPr>
-              <a:t>Steel Bottle Store</a:t>
+              <a:t>1,402 Gemini calls</a:t>
             </a:r>
           </a:p>
-          <a:p xmlns:a="http://schemas.openxmlformats.org/drawingml/2006/main">
-            <a:pPr>
-              <a:defRPr sz="1575" b="0">
-                <a:solidFill>
-                  <a:srgbClr val="161616"/>
-                </a:solidFill>
-                <a:latin typeface="Arial"/>
-                <a:ea typeface="Arial"/>
-                <a:cs typeface="Arial"/>
-              </a:defRPr>
-            </a:pPr>
-            <a:r>
-              <a:rPr sz="1575" b="0">
-                <a:solidFill>
-                  <a:srgbClr val="161616"/>
-                </a:solidFill>
-                <a:latin typeface="Arial"/>
-                <a:ea typeface="Arial"/>
-                <a:cs typeface="Arial"/>
-              </a:rPr>
-              <a:t>Water bottles · ₹410 each</a:t>
-            </a:r>
-          </a:p>
-          <a:p xmlns:a="http://schemas.openxmlformats.org/drawingml/2006/main">
-            <a:pPr>
-              <a:defRPr sz="1575" b="0">
-                <a:solidFill>
-                  <a:srgbClr val="161616"/>
-                </a:solidFill>
-                <a:latin typeface="Arial"/>
-                <a:ea typeface="Arial"/>
-                <a:cs typeface="Arial"/>
-              </a:defRPr>
-            </a:pPr>
-            <a:r>
-              <a:rPr sz="1575" b="0">
-                <a:solidFill>
-                  <a:srgbClr val="161616"/>
-                </a:solidFill>
-                <a:latin typeface="Arial"/>
-                <a:ea typeface="Arial"/>
-                <a:cs typeface="Arial"/>
-              </a:rPr>
-              <a:t>✓ Paid in test mode</a:t>
-            </a:r>
-          </a:p>
-          <a:p xmlns:a="http://schemas.openxmlformats.org/drawingml/2006/main">
-            <a:pPr>
-              <a:defRPr sz="1575" b="0">
-                <a:solidFill>
-                  <a:srgbClr val="161616"/>
-                </a:solidFill>
-                <a:latin typeface="Arial"/>
-                <a:ea typeface="Arial"/>
-                <a:cs typeface="Arial"/>
-              </a:defRPr>
-            </a:pPr>
-            <a:r>
-              <a:rPr sz="1575" b="0">
-                <a:solidFill>
-                  <a:srgbClr val="161616"/>
-                </a:solidFill>
-                <a:latin typeface="Arial"/>
-                <a:ea typeface="Arial"/>
-                <a:cs typeface="Arial"/>
-              </a:rPr>
-              <a:t>Pickup QR available</a:t>
-            </a:r>
-          </a:p>
-        </p:txBody>
-      </p:sp>
-      <p:sp>
-        <p:nvSpPr>
-          <p:cNvPr id="142" name="prod-pass">
-            <a:extLst xmlns:a="http://schemas.openxmlformats.org/drawingml/2006/main">
-              <a:ext uri="{FF2B5EF4-FFF2-40B4-BE49-F238E27FC236}">
-                <a16:creationId xmlns:a16="http://schemas.microsoft.com/office/drawing/2014/main" id="{31C4EE25-418E-4781-BC65-9EF59A77AC53}"/>
-              </a:ext>
-            </a:extLst>
-          </p:cNvPr>
-          <p:cNvSpPr>
-            <a:spLocks xmlns:a="http://schemas.openxmlformats.org/drawingml/2006/main" noGrp="1"/>
-          </p:cNvSpPr>
-          <p:nvPr/>
-        </p:nvSpPr>
-        <p:spPr>
-          <a:xfrm xmlns:a="http://schemas.openxmlformats.org/drawingml/2006/main">
-            <a:off x="4762500" y="1971675"/>
-            <a:ext cx="3810000" cy="2171700"/>
-          </a:xfrm>
-          <a:prstGeom xmlns:a="http://schemas.openxmlformats.org/drawingml/2006/main" prst="rect">
-            <a:avLst/>
-          </a:prstGeom>
-          <a:solidFill xmlns:a="http://schemas.openxmlformats.org/drawingml/2006/main">
-            <a:srgbClr val="FFFFFF"/>
-          </a:solidFill>
-          <a:ln xmlns:a="http://schemas.openxmlformats.org/drawingml/2006/main" w="14288">
-            <a:solidFill>
-              <a:srgbClr val="333333"/>
-            </a:solidFill>
-            <a:prstDash val="solid"/>
-          </a:ln>
-        </p:spPr>
-      </p:sp>
-      <p:sp>
-        <p:nvSpPr>
-          <p:cNvPr id="143" name="prod-pass-head">
-            <a:extLst xmlns:a="http://schemas.openxmlformats.org/drawingml/2006/main">
-              <a:ext uri="{FF2B5EF4-FFF2-40B4-BE49-F238E27FC236}">
-                <a16:creationId xmlns:a16="http://schemas.microsoft.com/office/drawing/2014/main" id="{4BFEF74F-D750-4335-8D08-909B0740EEA4}"/>
-              </a:ext>
-            </a:extLst>
-          </p:cNvPr>
-          <p:cNvSpPr>
-            <a:spLocks xmlns:a="http://schemas.openxmlformats.org/drawingml/2006/main" noGrp="1"/>
-          </p:cNvSpPr>
-          <p:nvPr/>
-        </p:nvSpPr>
-        <p:spPr>
-          <a:xfrm xmlns:a="http://schemas.openxmlformats.org/drawingml/2006/main">
-            <a:off x="4924425" y="2133600"/>
-            <a:ext cx="3476625" cy="285750"/>
+        </p:txBody>
+      </p:sp>
+      <p:sp>
+        <p:nvSpPr>
+          <p:cNvPr id="134" name="cost-caveat">
+            <a:extLst xmlns:a="http://schemas.openxmlformats.org/drawingml/2006/main">
+              <a:ext uri="{FF2B5EF4-FFF2-40B4-BE49-F238E27FC236}">
+                <a16:creationId xmlns:a16="http://schemas.microsoft.com/office/drawing/2014/main" id="{09BCE2C3-8237-4CD3-B2FB-3D6B51E118A7}"/>
+              </a:ext>
+            </a:extLst>
+          </p:cNvPr>
+          <p:cNvSpPr>
+            <a:spLocks xmlns:a="http://schemas.openxmlformats.org/drawingml/2006/main" noGrp="1"/>
+          </p:cNvSpPr>
+          <p:nvPr/>
+        </p:nvSpPr>
+        <p:spPr>
+          <a:xfrm xmlns:a="http://schemas.openxmlformats.org/drawingml/2006/main">
+            <a:off x="523875" y="3781425"/>
+            <a:ext cx="7905750" cy="847725"/>
           </a:xfrm>
           <a:prstGeom xmlns:a="http://schemas.openxmlformats.org/drawingml/2006/main" prst="rect">
             <a:avLst/>
@@ -7582,9 +7477,9 @@
           <a:lstStyle xmlns:a="http://schemas.openxmlformats.org/drawingml/2006/main"/>
           <a:p xmlns:a="http://schemas.openxmlformats.org/drawingml/2006/main">
             <a:pPr>
-              <a:defRPr sz="1500" b="1">
-                <a:solidFill>
-                  <a:srgbClr val="161616"/>
+              <a:defRPr sz="1350" b="0">
+                <a:solidFill>
+                  <a:srgbClr val="444444"/>
                 </a:solidFill>
                 <a:latin typeface="Arial"/>
                 <a:ea typeface="Arial"/>
@@ -7592,198 +7487,15 @@
               </a:defRPr>
             </a:pPr>
             <a:r>
-              <a:rPr sz="1500" b="1">
-                <a:solidFill>
-                  <a:srgbClr val="161616"/>
+              <a:rPr sz="1350" b="0">
+                <a:solidFill>
+                  <a:srgbClr val="444444"/>
                 </a:solidFill>
                 <a:latin typeface="Arial"/>
                 <a:ea typeface="Arial"/>
                 <a:cs typeface="Arial"/>
               </a:rPr>
-              <a:t>Public pickup page</a:t>
-            </a:r>
-          </a:p>
-        </p:txBody>
-      </p:sp>
-      <p:sp>
-        <p:nvSpPr>
-          <p:cNvPr id="144" name="prod-pass-body">
-            <a:extLst xmlns:a="http://schemas.openxmlformats.org/drawingml/2006/main">
-              <a:ext uri="{FF2B5EF4-FFF2-40B4-BE49-F238E27FC236}">
-                <a16:creationId xmlns:a16="http://schemas.microsoft.com/office/drawing/2014/main" id="{4EC8260F-1303-4B1F-BCDD-15CE74D3CC7D}"/>
-              </a:ext>
-            </a:extLst>
-          </p:cNvPr>
-          <p:cNvSpPr>
-            <a:spLocks xmlns:a="http://schemas.openxmlformats.org/drawingml/2006/main" noGrp="1"/>
-          </p:cNvSpPr>
-          <p:nvPr/>
-        </p:nvSpPr>
-        <p:spPr>
-          <a:xfrm xmlns:a="http://schemas.openxmlformats.org/drawingml/2006/main">
-            <a:off x="4924425" y="2600325"/>
-            <a:ext cx="3476625" cy="1352550"/>
-          </a:xfrm>
-          <a:prstGeom xmlns:a="http://schemas.openxmlformats.org/drawingml/2006/main" prst="rect">
-            <a:avLst/>
-          </a:prstGeom>
-          <a:noFill xmlns:a="http://schemas.openxmlformats.org/drawingml/2006/main"/>
-          <a:ln xmlns:a="http://schemas.openxmlformats.org/drawingml/2006/main" w="0">
-            <a:noFill/>
-          </a:ln>
-        </p:spPr>
-        <p:txBody>
-          <a:bodyPr xmlns:a="http://schemas.openxmlformats.org/drawingml/2006/main" wrap="square" lIns="0" tIns="0" rIns="0" bIns="0" anchor="t">
-            <a:normAutofit fontScale="100000"/>
-          </a:bodyPr>
-          <a:lstStyle xmlns:a="http://schemas.openxmlformats.org/drawingml/2006/main"/>
-          <a:p xmlns:a="http://schemas.openxmlformats.org/drawingml/2006/main">
-            <a:pPr>
-              <a:defRPr sz="1575" b="0">
-                <a:solidFill>
-                  <a:srgbClr val="161616"/>
-                </a:solidFill>
-                <a:latin typeface="Arial"/>
-                <a:ea typeface="Arial"/>
-                <a:cs typeface="Arial"/>
-              </a:defRPr>
-            </a:pPr>
-            <a:r>
-              <a:rPr sz="1575" b="0">
-                <a:solidFill>
-                  <a:srgbClr val="161616"/>
-                </a:solidFill>
-                <a:latin typeface="Arial"/>
-                <a:ea typeface="Arial"/>
-                <a:cs typeface="Arial"/>
-              </a:rPr>
-              <a:t>✓ Paid · Not collected yet</a:t>
-            </a:r>
-          </a:p>
-          <a:p xmlns:a="http://schemas.openxmlformats.org/drawingml/2006/main">
-            <a:pPr>
-              <a:defRPr sz="1575" b="0">
-                <a:solidFill>
-                  <a:srgbClr val="161616"/>
-                </a:solidFill>
-                <a:latin typeface="Arial"/>
-                <a:ea typeface="Arial"/>
-                <a:cs typeface="Arial"/>
-              </a:defRPr>
-            </a:pPr>
-            <a:r>
-              <a:rPr sz="1575" b="0">
-                <a:solidFill>
-                  <a:srgbClr val="161616"/>
-                </a:solidFill>
-                <a:latin typeface="Arial"/>
-                <a:ea typeface="Arial"/>
-                <a:cs typeface="Arial"/>
-              </a:rPr>
-              <a:t>Item: Water bottles</a:t>
-            </a:r>
-          </a:p>
-          <a:p xmlns:a="http://schemas.openxmlformats.org/drawingml/2006/main">
-            <a:pPr>
-              <a:defRPr sz="1575" b="0">
-                <a:solidFill>
-                  <a:srgbClr val="161616"/>
-                </a:solidFill>
-                <a:latin typeface="Arial"/>
-                <a:ea typeface="Arial"/>
-                <a:cs typeface="Arial"/>
-              </a:defRPr>
-            </a:pPr>
-            <a:r>
-              <a:rPr sz="1575" b="0">
-                <a:solidFill>
-                  <a:srgbClr val="161616"/>
-                </a:solidFill>
-                <a:latin typeface="Arial"/>
-                <a:ea typeface="Arial"/>
-                <a:cs typeface="Arial"/>
-              </a:rPr>
-              <a:t>Amount: INR 410</a:t>
-            </a:r>
-          </a:p>
-          <a:p xmlns:a="http://schemas.openxmlformats.org/drawingml/2006/main">
-            <a:pPr>
-              <a:defRPr sz="1575" b="0">
-                <a:solidFill>
-                  <a:srgbClr val="161616"/>
-                </a:solidFill>
-                <a:latin typeface="Arial"/>
-                <a:ea typeface="Arial"/>
-                <a:cs typeface="Arial"/>
-              </a:defRPr>
-            </a:pPr>
-            <a:r>
-              <a:rPr sz="1575" b="0">
-                <a:solidFill>
-                  <a:srgbClr val="161616"/>
-                </a:solidFill>
-                <a:latin typeface="Arial"/>
-                <a:ea typeface="Arial"/>
-                <a:cs typeface="Arial"/>
-              </a:rPr>
-              <a:t>Buyer: Anu</a:t>
-            </a:r>
-          </a:p>
-        </p:txBody>
-      </p:sp>
-      <p:sp>
-        <p:nvSpPr>
-          <p:cNvPr id="145" name="prod-note">
-            <a:extLst xmlns:a="http://schemas.openxmlformats.org/drawingml/2006/main">
-              <a:ext uri="{FF2B5EF4-FFF2-40B4-BE49-F238E27FC236}">
-                <a16:creationId xmlns:a16="http://schemas.microsoft.com/office/drawing/2014/main" id="{80439488-5AA4-4426-8689-627B66627C8B}"/>
-              </a:ext>
-            </a:extLst>
-          </p:cNvPr>
-          <p:cNvSpPr>
-            <a:spLocks xmlns:a="http://schemas.openxmlformats.org/drawingml/2006/main" noGrp="1"/>
-          </p:cNvSpPr>
-          <p:nvPr/>
-        </p:nvSpPr>
-        <p:spPr>
-          <a:xfrm xmlns:a="http://schemas.openxmlformats.org/drawingml/2006/main">
-            <a:off x="523875" y="4305300"/>
-            <a:ext cx="8048625" cy="552450"/>
-          </a:xfrm>
-          <a:prstGeom xmlns:a="http://schemas.openxmlformats.org/drawingml/2006/main" prst="rect">
-            <a:avLst/>
-          </a:prstGeom>
-          <a:noFill xmlns:a="http://schemas.openxmlformats.org/drawingml/2006/main"/>
-          <a:ln xmlns:a="http://schemas.openxmlformats.org/drawingml/2006/main" w="0">
-            <a:noFill/>
-          </a:ln>
-        </p:spPr>
-        <p:txBody>
-          <a:bodyPr xmlns:a="http://schemas.openxmlformats.org/drawingml/2006/main" wrap="square" lIns="0" tIns="0" rIns="0" bIns="0" anchor="t">
-            <a:normAutofit fontScale="100000"/>
-          </a:bodyPr>
-          <a:lstStyle xmlns:a="http://schemas.openxmlformats.org/drawingml/2006/main"/>
-          <a:p xmlns:a="http://schemas.openxmlformats.org/drawingml/2006/main">
-            <a:pPr>
-              <a:defRPr sz="1200" b="0">
-                <a:solidFill>
-                  <a:srgbClr val="444444"/>
-                </a:solidFill>
-                <a:latin typeface="Arial"/>
-                <a:ea typeface="Arial"/>
-                <a:cs typeface="Arial"/>
-              </a:defRPr>
-            </a:pPr>
-            <a:r>
-              <a:rPr sz="1200" b="0">
-                <a:solidFill>
-                  <a:srgbClr val="444444"/>
-                </a:solidFill>
-                <a:latin typeface="Arial"/>
-                <a:ea typeface="Arial"/>
-                <a:cs typeface="Arial"/>
-              </a:rPr>
-              <a:t>Schematic reconstruction of the live screens. The public receipt page verified a Collab-issued Ed25519 attestation; this older order’s payment signatures are legacy HMAC.</a:t>
+              <a:t>This is a token estimate, not a cloud bill. Google Search grounding, Cloud Run, Firestore and networking are excluded. Production cost depends on usage.</a:t>
             </a:r>
           </a:p>
         </p:txBody>
@@ -7791,7 +7503,7 @@
     </p:spTree>
     <p:extLst>
       <p:ext uri="{BB962C8B-B14F-4D97-AF65-F5344CB8AC3E}">
-        <p14:creationId xmlns:p14="http://schemas.microsoft.com/office/powerpoint/2010/main" val="492101900"/>
+        <p14:creationId xmlns:p14="http://schemas.microsoft.com/office/powerpoint/2010/main" val="1223253623"/>
       </p:ext>
     </p:extLst>
   </p:cSld>
@@ -7812,14 +7524,14 @@
       </p:grpSpPr>
       <p:pic>
         <p:nvPicPr>
-          <p:cNvPr id="156" name="Google Shape;140;p24"/>
+          <p:cNvPr id="146" name="Google Shape;132;p23"/>
           <p:cNvPicPr>
             <a:picLocks xmlns:a="http://schemas.openxmlformats.org/drawingml/2006/main" noChangeAspect="1"/>
           </p:cNvPicPr>
           <p:nvPr/>
         </p:nvPicPr>
         <p:blipFill rotWithShape="1">
-          <a:blip xmlns:r="http://schemas.openxmlformats.org/officeDocument/2006/relationships" xmlns:a="http://schemas.openxmlformats.org/drawingml/2006/main" r:embed="Rad79405bbcff468d">
+          <a:blip xmlns:r="http://schemas.openxmlformats.org/officeDocument/2006/relationships" xmlns:a="http://schemas.openxmlformats.org/drawingml/2006/main" r:embed="R79519ee31e874006">
             <a:alphaModFix/>
           </a:blip>
           <a:srcRect xmlns:a="http://schemas.openxmlformats.org/drawingml/2006/main" l="0" t="0" r="0" b="98001"/>
@@ -7840,14 +7552,14 @@
       </p:pic>
       <p:pic>
         <p:nvPicPr>
-          <p:cNvPr id="157" name="Google Shape;141;p24"/>
+          <p:cNvPr id="147" name="Google Shape;133;p23"/>
           <p:cNvPicPr>
             <a:picLocks xmlns:a="http://schemas.openxmlformats.org/drawingml/2006/main" noChangeAspect="1"/>
           </p:cNvPicPr>
           <p:nvPr/>
         </p:nvPicPr>
         <p:blipFill>
-          <a:blip xmlns:r="http://schemas.openxmlformats.org/officeDocument/2006/relationships" xmlns:a="http://schemas.openxmlformats.org/drawingml/2006/main" r:embed="R4a4d9fa2dfef49ce">
+          <a:blip xmlns:r="http://schemas.openxmlformats.org/officeDocument/2006/relationships" xmlns:a="http://schemas.openxmlformats.org/drawingml/2006/main" r:embed="Rd30ca69c078f4a1e">
             <a:alphaModFix/>
           </a:blip>
           <a:stretch xmlns:a="http://schemas.openxmlformats.org/drawingml/2006/main">
@@ -7869,10 +7581,10 @@
       </p:pic>
       <p:sp>
         <p:nvSpPr>
-          <p:cNvPr id="142" name="Google Shape;142;p24">
-            <a:extLst xmlns:a="http://schemas.openxmlformats.org/drawingml/2006/main">
-              <a:ext uri="{FF2B5EF4-FFF2-40B4-BE49-F238E27FC236}">
-                <a16:creationId xmlns:a16="http://schemas.microsoft.com/office/drawing/2014/main" id="{8D3D96A8-EA02-446B-B557-59343D8C2E8E}"/>
+          <p:cNvPr id="134" name="Google Shape;134;p23">
+            <a:extLst xmlns:a="http://schemas.openxmlformats.org/drawingml/2006/main">
+              <a:ext uri="{FF2B5EF4-FFF2-40B4-BE49-F238E27FC236}">
+                <a16:creationId xmlns:a16="http://schemas.microsoft.com/office/drawing/2014/main" id="{1649D3CF-6B28-400D-B741-84EA3BF3BE5C}"/>
               </a:ext>
             </a:extLst>
           </p:cNvPr>
@@ -7920,10 +7632,10 @@
       </p:sp>
       <p:sp>
         <p:nvSpPr>
-          <p:cNvPr id="143" name="Google Shape;143;p24">
-            <a:extLst xmlns:a="http://schemas.openxmlformats.org/drawingml/2006/main">
-              <a:ext uri="{FF2B5EF4-FFF2-40B4-BE49-F238E27FC236}">
-                <a16:creationId xmlns:a16="http://schemas.microsoft.com/office/drawing/2014/main" id="{3932C7D3-549F-4BE3-B31C-673A6DE14438}"/>
+          <p:cNvPr id="135" name="Google Shape;135;p23">
+            <a:extLst xmlns:a="http://schemas.openxmlformats.org/drawingml/2006/main">
+              <a:ext uri="{FF2B5EF4-FFF2-40B4-BE49-F238E27FC236}">
+                <a16:creationId xmlns:a16="http://schemas.microsoft.com/office/drawing/2014/main" id="{F9EE808A-B1C2-4A86-8714-8A792D3DA9CB}"/>
               </a:ext>
             </a:extLst>
           </p:cNvPr>
@@ -7977,7 +7689,7 @@
                 <a:ea typeface="Arial"/>
                 <a:cs typeface="Arial"/>
               </a:rPr>
-              <a:t>Prototype performance and tests</a:t>
+              <a:t>Production prototype evidence</a:t>
             </a:r>
             <a:endParaRPr sz="1600">
               <a:latin typeface="Google Sans Flex Medium"/>
@@ -7989,22 +7701,22 @@
       </p:sp>
       <p:sp>
         <p:nvSpPr>
-          <p:cNvPr id="146" name="m1">
-            <a:extLst xmlns:a="http://schemas.openxmlformats.org/drawingml/2006/main">
-              <a:ext uri="{FF2B5EF4-FFF2-40B4-BE49-F238E27FC236}">
-                <a16:creationId xmlns:a16="http://schemas.microsoft.com/office/drawing/2014/main" id="{4B3B3E66-D2AB-4883-A214-776F396F0D3D}"/>
-              </a:ext>
-            </a:extLst>
-          </p:cNvPr>
-          <p:cNvSpPr>
-            <a:spLocks xmlns:a="http://schemas.openxmlformats.org/drawingml/2006/main" noGrp="1"/>
-          </p:cNvSpPr>
-          <p:nvPr/>
-        </p:nvSpPr>
-        <p:spPr>
-          <a:xfrm xmlns:a="http://schemas.openxmlformats.org/drawingml/2006/main">
-            <a:off x="523875" y="1495425"/>
-            <a:ext cx="2257425" cy="485775"/>
+          <p:cNvPr id="138" name="prod-sub">
+            <a:extLst xmlns:a="http://schemas.openxmlformats.org/drawingml/2006/main">
+              <a:ext uri="{FF2B5EF4-FFF2-40B4-BE49-F238E27FC236}">
+                <a16:creationId xmlns:a16="http://schemas.microsoft.com/office/drawing/2014/main" id="{3CBDC816-1AC0-4FAA-AC7D-6946AE301FC1}"/>
+              </a:ext>
+            </a:extLst>
+          </p:cNvPr>
+          <p:cNvSpPr>
+            <a:spLocks xmlns:a="http://schemas.openxmlformats.org/drawingml/2006/main" noGrp="1"/>
+          </p:cNvSpPr>
+          <p:nvPr/>
+        </p:nvSpPr>
+        <p:spPr>
+          <a:xfrm xmlns:a="http://schemas.openxmlformats.org/drawingml/2006/main">
+            <a:off x="523875" y="1409700"/>
+            <a:ext cx="8096250" cy="333375"/>
           </a:xfrm>
           <a:prstGeom xmlns:a="http://schemas.openxmlformats.org/drawingml/2006/main" prst="rect">
             <a:avLst/>
@@ -8021,9 +7733,9 @@
           <a:lstStyle xmlns:a="http://schemas.openxmlformats.org/drawingml/2006/main"/>
           <a:p xmlns:a="http://schemas.openxmlformats.org/drawingml/2006/main">
             <a:pPr>
-              <a:defRPr sz="2625" b="1">
-                <a:solidFill>
-                  <a:srgbClr val="1A73E8"/>
+              <a:defRPr sz="1650" b="1">
+                <a:solidFill>
+                  <a:srgbClr val="161616"/>
                 </a:solidFill>
                 <a:latin typeface="Arial"/>
                 <a:ea typeface="Arial"/>
@@ -8031,37 +7743,70 @@
               </a:defRPr>
             </a:pPr>
             <a:r>
-              <a:rPr sz="2625" b="1">
-                <a:solidFill>
-                  <a:srgbClr val="1A73E8"/>
+              <a:rPr sz="1650" b="1">
+                <a:solidFill>
+                  <a:srgbClr val="161616"/>
                 </a:solidFill>
                 <a:latin typeface="Arial"/>
                 <a:ea typeface="Arial"/>
                 <a:cs typeface="Arial"/>
               </a:rPr>
-              <a:t>58 / 58</a:t>
+              <a:t>Paid listing-origin order on the deployed app, 15 Oct 2026</a:t>
             </a:r>
           </a:p>
         </p:txBody>
       </p:sp>
       <p:sp>
         <p:nvSpPr>
-          <p:cNvPr id="147" name="m1b">
-            <a:extLst xmlns:a="http://schemas.openxmlformats.org/drawingml/2006/main">
-              <a:ext uri="{FF2B5EF4-FFF2-40B4-BE49-F238E27FC236}">
-                <a16:creationId xmlns:a16="http://schemas.microsoft.com/office/drawing/2014/main" id="{A5A762FD-807A-44CD-8BD1-19E04DDB1E5A}"/>
-              </a:ext>
-            </a:extLst>
-          </p:cNvPr>
-          <p:cNvSpPr>
-            <a:spLocks xmlns:a="http://schemas.openxmlformats.org/drawingml/2006/main" noGrp="1"/>
-          </p:cNvSpPr>
-          <p:nvPr/>
-        </p:nvSpPr>
-        <p:spPr>
-          <a:xfrm xmlns:a="http://schemas.openxmlformats.org/drawingml/2006/main">
-            <a:off x="523875" y="2009775"/>
-            <a:ext cx="2333625" cy="323850"/>
+          <p:cNvPr id="139" name="prod-deal">
+            <a:extLst xmlns:a="http://schemas.openxmlformats.org/drawingml/2006/main">
+              <a:ext uri="{FF2B5EF4-FFF2-40B4-BE49-F238E27FC236}">
+                <a16:creationId xmlns:a16="http://schemas.microsoft.com/office/drawing/2014/main" id="{6AFB6FA9-F8B7-46A3-A086-2EEF97E0D49D}"/>
+              </a:ext>
+            </a:extLst>
+          </p:cNvPr>
+          <p:cNvSpPr>
+            <a:spLocks xmlns:a="http://schemas.openxmlformats.org/drawingml/2006/main" noGrp="1"/>
+          </p:cNvSpPr>
+          <p:nvPr/>
+        </p:nvSpPr>
+        <p:spPr>
+          <a:xfrm xmlns:a="http://schemas.openxmlformats.org/drawingml/2006/main">
+            <a:off x="523875" y="1971675"/>
+            <a:ext cx="3810000" cy="2171700"/>
+          </a:xfrm>
+          <a:prstGeom xmlns:a="http://schemas.openxmlformats.org/drawingml/2006/main" prst="rect">
+            <a:avLst/>
+          </a:prstGeom>
+          <a:solidFill xmlns:a="http://schemas.openxmlformats.org/drawingml/2006/main">
+            <a:srgbClr val="FFFFFF"/>
+          </a:solidFill>
+          <a:ln xmlns:a="http://schemas.openxmlformats.org/drawingml/2006/main" w="14288">
+            <a:solidFill>
+              <a:srgbClr val="333333"/>
+            </a:solidFill>
+            <a:prstDash val="solid"/>
+          </a:ln>
+        </p:spPr>
+      </p:sp>
+      <p:sp>
+        <p:nvSpPr>
+          <p:cNvPr id="140" name="prod-deal-head">
+            <a:extLst xmlns:a="http://schemas.openxmlformats.org/drawingml/2006/main">
+              <a:ext uri="{FF2B5EF4-FFF2-40B4-BE49-F238E27FC236}">
+                <a16:creationId xmlns:a16="http://schemas.microsoft.com/office/drawing/2014/main" id="{7138C8CF-1F61-4583-99C1-6EF1C2DF1055}"/>
+              </a:ext>
+            </a:extLst>
+          </p:cNvPr>
+          <p:cNvSpPr>
+            <a:spLocks xmlns:a="http://schemas.openxmlformats.org/drawingml/2006/main" noGrp="1"/>
+          </p:cNvSpPr>
+          <p:nvPr/>
+        </p:nvSpPr>
+        <p:spPr>
+          <a:xfrm xmlns:a="http://schemas.openxmlformats.org/drawingml/2006/main">
+            <a:off x="685800" y="2133600"/>
+            <a:ext cx="3476625" cy="285750"/>
           </a:xfrm>
           <a:prstGeom xmlns:a="http://schemas.openxmlformats.org/drawingml/2006/main" prst="rect">
             <a:avLst/>
@@ -8078,7 +7823,7 @@
           <a:lstStyle xmlns:a="http://schemas.openxmlformats.org/drawingml/2006/main"/>
           <a:p xmlns:a="http://schemas.openxmlformats.org/drawingml/2006/main">
             <a:pPr>
-              <a:defRPr sz="1350" b="0">
+              <a:defRPr sz="1500" b="1">
                 <a:solidFill>
                   <a:srgbClr val="161616"/>
                 </a:solidFill>
@@ -8088,7 +7833,7 @@
               </a:defRPr>
             </a:pPr>
             <a:r>
-              <a:rPr sz="1350" b="0">
+              <a:rPr sz="1500" b="1">
                 <a:solidFill>
                   <a:srgbClr val="161616"/>
                 </a:solidFill>
@@ -8096,287 +7841,29 @@
                 <a:ea typeface="Arial"/>
                 <a:cs typeface="Arial"/>
               </a:rPr>
-              <a:t>automated tests passed</a:t>
+              <a:t>Buyer’s deal card</a:t>
             </a:r>
           </a:p>
         </p:txBody>
       </p:sp>
       <p:sp>
         <p:nvSpPr>
-          <p:cNvPr id="148" name="m2">
-            <a:extLst xmlns:a="http://schemas.openxmlformats.org/drawingml/2006/main">
-              <a:ext uri="{FF2B5EF4-FFF2-40B4-BE49-F238E27FC236}">
-                <a16:creationId xmlns:a16="http://schemas.microsoft.com/office/drawing/2014/main" id="{19E7129B-7B01-48E9-9B1D-FFD7D92D6525}"/>
-              </a:ext>
-            </a:extLst>
-          </p:cNvPr>
-          <p:cNvSpPr>
-            <a:spLocks xmlns:a="http://schemas.openxmlformats.org/drawingml/2006/main" noGrp="1"/>
-          </p:cNvSpPr>
-          <p:nvPr/>
-        </p:nvSpPr>
-        <p:spPr>
-          <a:xfrm xmlns:a="http://schemas.openxmlformats.org/drawingml/2006/main">
-            <a:off x="3238500" y="1495425"/>
-            <a:ext cx="2257425" cy="485775"/>
-          </a:xfrm>
-          <a:prstGeom xmlns:a="http://schemas.openxmlformats.org/drawingml/2006/main" prst="rect">
-            <a:avLst/>
-          </a:prstGeom>
-          <a:noFill xmlns:a="http://schemas.openxmlformats.org/drawingml/2006/main"/>
-          <a:ln xmlns:a="http://schemas.openxmlformats.org/drawingml/2006/main" w="0">
-            <a:noFill/>
-          </a:ln>
-        </p:spPr>
-        <p:txBody>
-          <a:bodyPr xmlns:a="http://schemas.openxmlformats.org/drawingml/2006/main" wrap="square" lIns="0" tIns="0" rIns="0" bIns="0" anchor="t">
-            <a:normAutofit fontScale="100000"/>
-          </a:bodyPr>
-          <a:lstStyle xmlns:a="http://schemas.openxmlformats.org/drawingml/2006/main"/>
-          <a:p xmlns:a="http://schemas.openxmlformats.org/drawingml/2006/main">
-            <a:pPr>
-              <a:defRPr sz="2625" b="1">
-                <a:solidFill>
-                  <a:srgbClr val="1A73E8"/>
-                </a:solidFill>
-                <a:latin typeface="Arial"/>
-                <a:ea typeface="Arial"/>
-                <a:cs typeface="Arial"/>
-              </a:defRPr>
-            </a:pPr>
-            <a:r>
-              <a:rPr sz="2625" b="1">
-                <a:solidFill>
-                  <a:srgbClr val="1A73E8"/>
-                </a:solidFill>
-                <a:latin typeface="Arial"/>
-                <a:ea typeface="Arial"/>
-                <a:cs typeface="Arial"/>
-              </a:rPr>
-              <a:t>38 / 39</a:t>
-            </a:r>
-          </a:p>
-        </p:txBody>
-      </p:sp>
-      <p:sp>
-        <p:nvSpPr>
-          <p:cNvPr id="149" name="m2b">
-            <a:extLst xmlns:a="http://schemas.openxmlformats.org/drawingml/2006/main">
-              <a:ext uri="{FF2B5EF4-FFF2-40B4-BE49-F238E27FC236}">
-                <a16:creationId xmlns:a16="http://schemas.microsoft.com/office/drawing/2014/main" id="{3678C00E-88C6-428E-B583-C33F5E35671E}"/>
-              </a:ext>
-            </a:extLst>
-          </p:cNvPr>
-          <p:cNvSpPr>
-            <a:spLocks xmlns:a="http://schemas.openxmlformats.org/drawingml/2006/main" noGrp="1"/>
-          </p:cNvSpPr>
-          <p:nvPr/>
-        </p:nvSpPr>
-        <p:spPr>
-          <a:xfrm xmlns:a="http://schemas.openxmlformats.org/drawingml/2006/main">
-            <a:off x="3238500" y="2009775"/>
-            <a:ext cx="2447925" cy="323850"/>
-          </a:xfrm>
-          <a:prstGeom xmlns:a="http://schemas.openxmlformats.org/drawingml/2006/main" prst="rect">
-            <a:avLst/>
-          </a:prstGeom>
-          <a:noFill xmlns:a="http://schemas.openxmlformats.org/drawingml/2006/main"/>
-          <a:ln xmlns:a="http://schemas.openxmlformats.org/drawingml/2006/main" w="0">
-            <a:noFill/>
-          </a:ln>
-        </p:spPr>
-        <p:txBody>
-          <a:bodyPr xmlns:a="http://schemas.openxmlformats.org/drawingml/2006/main" wrap="square" lIns="0" tIns="0" rIns="0" bIns="0" anchor="t">
-            <a:normAutofit fontScale="100000"/>
-          </a:bodyPr>
-          <a:lstStyle xmlns:a="http://schemas.openxmlformats.org/drawingml/2006/main"/>
-          <a:p xmlns:a="http://schemas.openxmlformats.org/drawingml/2006/main">
-            <a:pPr>
-              <a:defRPr sz="1350" b="0">
-                <a:solidFill>
-                  <a:srgbClr val="161616"/>
-                </a:solidFill>
-                <a:latin typeface="Arial"/>
-                <a:ea typeface="Arial"/>
-                <a:cs typeface="Arial"/>
-              </a:defRPr>
-            </a:pPr>
-            <a:r>
-              <a:rPr sz="1350" b="0">
-                <a:solidFill>
-                  <a:srgbClr val="161616"/>
-                </a:solidFill>
-                <a:latin typeface="Arial"/>
-                <a:ea typeface="Arial"/>
-                <a:cs typeface="Arial"/>
-              </a:rPr>
-              <a:t>feasible price pairs agreed</a:t>
-            </a:r>
-          </a:p>
-        </p:txBody>
-      </p:sp>
-      <p:sp>
-        <p:nvSpPr>
-          <p:cNvPr id="150" name="m3">
-            <a:extLst xmlns:a="http://schemas.openxmlformats.org/drawingml/2006/main">
-              <a:ext uri="{FF2B5EF4-FFF2-40B4-BE49-F238E27FC236}">
-                <a16:creationId xmlns:a16="http://schemas.microsoft.com/office/drawing/2014/main" id="{C51414E7-AB31-4A71-A746-3D057881B33B}"/>
-              </a:ext>
-            </a:extLst>
-          </p:cNvPr>
-          <p:cNvSpPr>
-            <a:spLocks xmlns:a="http://schemas.openxmlformats.org/drawingml/2006/main" noGrp="1"/>
-          </p:cNvSpPr>
-          <p:nvPr/>
-        </p:nvSpPr>
-        <p:spPr>
-          <a:xfrm xmlns:a="http://schemas.openxmlformats.org/drawingml/2006/main">
-            <a:off x="6162675" y="1495425"/>
-            <a:ext cx="2505075" cy="485775"/>
-          </a:xfrm>
-          <a:prstGeom xmlns:a="http://schemas.openxmlformats.org/drawingml/2006/main" prst="rect">
-            <a:avLst/>
-          </a:prstGeom>
-          <a:noFill xmlns:a="http://schemas.openxmlformats.org/drawingml/2006/main"/>
-          <a:ln xmlns:a="http://schemas.openxmlformats.org/drawingml/2006/main" w="0">
-            <a:noFill/>
-          </a:ln>
-        </p:spPr>
-        <p:txBody>
-          <a:bodyPr xmlns:a="http://schemas.openxmlformats.org/drawingml/2006/main" wrap="square" lIns="0" tIns="0" rIns="0" bIns="0" anchor="t">
-            <a:normAutofit fontScale="100000"/>
-          </a:bodyPr>
-          <a:lstStyle xmlns:a="http://schemas.openxmlformats.org/drawingml/2006/main"/>
-          <a:p xmlns:a="http://schemas.openxmlformats.org/drawingml/2006/main">
-            <a:pPr>
-              <a:defRPr sz="2625" b="1">
-                <a:solidFill>
-                  <a:srgbClr val="1A73E8"/>
-                </a:solidFill>
-                <a:latin typeface="Arial"/>
-                <a:ea typeface="Arial"/>
-                <a:cs typeface="Arial"/>
-              </a:defRPr>
-            </a:pPr>
-            <a:r>
-              <a:rPr sz="2625" b="1">
-                <a:solidFill>
-                  <a:srgbClr val="1A73E8"/>
-                </a:solidFill>
-                <a:latin typeface="Arial"/>
-                <a:ea typeface="Arial"/>
-                <a:cs typeface="Arial"/>
-              </a:rPr>
-              <a:t>100 / 100</a:t>
-            </a:r>
-          </a:p>
-        </p:txBody>
-      </p:sp>
-      <p:sp>
-        <p:nvSpPr>
-          <p:cNvPr id="151" name="m3b">
-            <a:extLst xmlns:a="http://schemas.openxmlformats.org/drawingml/2006/main">
-              <a:ext uri="{FF2B5EF4-FFF2-40B4-BE49-F238E27FC236}">
-                <a16:creationId xmlns:a16="http://schemas.microsoft.com/office/drawing/2014/main" id="{2541CD8B-C88E-429C-83FF-18F8BC02CB30}"/>
-              </a:ext>
-            </a:extLst>
-          </p:cNvPr>
-          <p:cNvSpPr>
-            <a:spLocks xmlns:a="http://schemas.openxmlformats.org/drawingml/2006/main" noGrp="1"/>
-          </p:cNvSpPr>
-          <p:nvPr/>
-        </p:nvSpPr>
-        <p:spPr>
-          <a:xfrm xmlns:a="http://schemas.openxmlformats.org/drawingml/2006/main">
-            <a:off x="6162675" y="2009775"/>
-            <a:ext cx="2505075" cy="323850"/>
-          </a:xfrm>
-          <a:prstGeom xmlns:a="http://schemas.openxmlformats.org/drawingml/2006/main" prst="rect">
-            <a:avLst/>
-          </a:prstGeom>
-          <a:noFill xmlns:a="http://schemas.openxmlformats.org/drawingml/2006/main"/>
-          <a:ln xmlns:a="http://schemas.openxmlformats.org/drawingml/2006/main" w="0">
-            <a:noFill/>
-          </a:ln>
-        </p:spPr>
-        <p:txBody>
-          <a:bodyPr xmlns:a="http://schemas.openxmlformats.org/drawingml/2006/main" wrap="square" lIns="0" tIns="0" rIns="0" bIns="0" anchor="t">
-            <a:normAutofit fontScale="100000"/>
-          </a:bodyPr>
-          <a:lstStyle xmlns:a="http://schemas.openxmlformats.org/drawingml/2006/main"/>
-          <a:p xmlns:a="http://schemas.openxmlformats.org/drawingml/2006/main">
-            <a:pPr>
-              <a:defRPr sz="1350" b="0">
-                <a:solidFill>
-                  <a:srgbClr val="161616"/>
-                </a:solidFill>
-                <a:latin typeface="Arial"/>
-                <a:ea typeface="Arial"/>
-                <a:cs typeface="Arial"/>
-              </a:defRPr>
-            </a:pPr>
-            <a:r>
-              <a:rPr sz="1350" b="0">
-                <a:solidFill>
-                  <a:srgbClr val="161616"/>
-                </a:solidFill>
-                <a:latin typeface="Arial"/>
-                <a:ea typeface="Arial"/>
-                <a:cs typeface="Arial"/>
-              </a:rPr>
-              <a:t>canary probes withheld</a:t>
-            </a:r>
-          </a:p>
-        </p:txBody>
-      </p:sp>
-      <p:sp>
-        <p:nvSpPr>
-          <p:cNvPr id="152" name="metric-rule">
-            <a:extLst xmlns:a="http://schemas.openxmlformats.org/drawingml/2006/main">
-              <a:ext uri="{FF2B5EF4-FFF2-40B4-BE49-F238E27FC236}">
-                <a16:creationId xmlns:a16="http://schemas.microsoft.com/office/drawing/2014/main" id="{693DDF3D-8A48-48F4-AB2C-28A1CFC0AC27}"/>
-              </a:ext>
-            </a:extLst>
-          </p:cNvPr>
-          <p:cNvSpPr>
-            <a:spLocks xmlns:a="http://schemas.openxmlformats.org/drawingml/2006/main" noGrp="1"/>
-          </p:cNvSpPr>
-          <p:nvPr/>
-        </p:nvSpPr>
-        <p:spPr>
-          <a:xfrm xmlns:a="http://schemas.openxmlformats.org/drawingml/2006/main">
-            <a:off x="523875" y="2476500"/>
-            <a:ext cx="8048625" cy="19050"/>
-          </a:xfrm>
-          <a:prstGeom xmlns:a="http://schemas.openxmlformats.org/drawingml/2006/main" prst="rect">
-            <a:avLst/>
-          </a:prstGeom>
-          <a:solidFill xmlns:a="http://schemas.openxmlformats.org/drawingml/2006/main">
-            <a:srgbClr val="B9B9B9"/>
-          </a:solidFill>
-          <a:ln xmlns:a="http://schemas.openxmlformats.org/drawingml/2006/main" w="0">
-            <a:noFill/>
-          </a:ln>
-        </p:spPr>
-      </p:sp>
-      <p:sp>
-        <p:nvSpPr>
-          <p:cNvPr id="153" name="latency">
-            <a:extLst xmlns:a="http://schemas.openxmlformats.org/drawingml/2006/main">
-              <a:ext uri="{FF2B5EF4-FFF2-40B4-BE49-F238E27FC236}">
-                <a16:creationId xmlns:a16="http://schemas.microsoft.com/office/drawing/2014/main" id="{4BCDDCD2-7A30-4A02-B026-6A6241C4204A}"/>
-              </a:ext>
-            </a:extLst>
-          </p:cNvPr>
-          <p:cNvSpPr>
-            <a:spLocks xmlns:a="http://schemas.openxmlformats.org/drawingml/2006/main" noGrp="1"/>
-          </p:cNvSpPr>
-          <p:nvPr/>
-        </p:nvSpPr>
-        <p:spPr>
-          <a:xfrm xmlns:a="http://schemas.openxmlformats.org/drawingml/2006/main">
-            <a:off x="523875" y="2705100"/>
-            <a:ext cx="8048625" cy="409575"/>
+          <p:cNvPr id="141" name="prod-deal-body">
+            <a:extLst xmlns:a="http://schemas.openxmlformats.org/drawingml/2006/main">
+              <a:ext uri="{FF2B5EF4-FFF2-40B4-BE49-F238E27FC236}">
+                <a16:creationId xmlns:a16="http://schemas.microsoft.com/office/drawing/2014/main" id="{852BCAA7-8BDD-4A3B-B353-FB8C2E4BBD1F}"/>
+              </a:ext>
+            </a:extLst>
+          </p:cNvPr>
+          <p:cNvSpPr>
+            <a:spLocks xmlns:a="http://schemas.openxmlformats.org/drawingml/2006/main" noGrp="1"/>
+          </p:cNvSpPr>
+          <p:nvPr/>
+        </p:nvSpPr>
+        <p:spPr>
+          <a:xfrm xmlns:a="http://schemas.openxmlformats.org/drawingml/2006/main">
+            <a:off x="685800" y="2600325"/>
+            <a:ext cx="3476625" cy="1352550"/>
           </a:xfrm>
           <a:prstGeom xmlns:a="http://schemas.openxmlformats.org/drawingml/2006/main" prst="rect">
             <a:avLst/>
@@ -8411,29 +7898,188 @@
                 <a:ea typeface="Arial"/>
                 <a:cs typeface="Arial"/>
               </a:rPr>
-              <a:t>Intent routing on real Gemini: p50 1.1 s, p95 1.4 s (120 requests).</a:t>
+              <a:t>Steel Bottle Store</a:t>
             </a:r>
           </a:p>
-        </p:txBody>
-      </p:sp>
-      <p:sp>
-        <p:nvSpPr>
-          <p:cNvPr id="154" name="neg">
-            <a:extLst xmlns:a="http://schemas.openxmlformats.org/drawingml/2006/main">
-              <a:ext uri="{FF2B5EF4-FFF2-40B4-BE49-F238E27FC236}">
-                <a16:creationId xmlns:a16="http://schemas.microsoft.com/office/drawing/2014/main" id="{7CE5179E-0F94-42D5-99E1-77DB2C03965C}"/>
-              </a:ext>
-            </a:extLst>
-          </p:cNvPr>
-          <p:cNvSpPr>
-            <a:spLocks xmlns:a="http://schemas.openxmlformats.org/drawingml/2006/main" noGrp="1"/>
-          </p:cNvSpPr>
-          <p:nvPr/>
-        </p:nvSpPr>
-        <p:spPr>
-          <a:xfrm xmlns:a="http://schemas.openxmlformats.org/drawingml/2006/main">
-            <a:off x="523875" y="3228975"/>
-            <a:ext cx="8048625" cy="628650"/>
+          <a:p xmlns:a="http://schemas.openxmlformats.org/drawingml/2006/main">
+            <a:pPr>
+              <a:defRPr sz="1575" b="0">
+                <a:solidFill>
+                  <a:srgbClr val="161616"/>
+                </a:solidFill>
+                <a:latin typeface="Arial"/>
+                <a:ea typeface="Arial"/>
+                <a:cs typeface="Arial"/>
+              </a:defRPr>
+            </a:pPr>
+            <a:r>
+              <a:rPr sz="1575" b="0">
+                <a:solidFill>
+                  <a:srgbClr val="161616"/>
+                </a:solidFill>
+                <a:latin typeface="Arial"/>
+                <a:ea typeface="Arial"/>
+                <a:cs typeface="Arial"/>
+              </a:rPr>
+              <a:t>Water bottles · ₹410 each</a:t>
+            </a:r>
+          </a:p>
+          <a:p xmlns:a="http://schemas.openxmlformats.org/drawingml/2006/main">
+            <a:pPr>
+              <a:defRPr sz="1575" b="0">
+                <a:solidFill>
+                  <a:srgbClr val="161616"/>
+                </a:solidFill>
+                <a:latin typeface="Arial"/>
+                <a:ea typeface="Arial"/>
+                <a:cs typeface="Arial"/>
+              </a:defRPr>
+            </a:pPr>
+            <a:r>
+              <a:rPr sz="1575" b="0">
+                <a:solidFill>
+                  <a:srgbClr val="161616"/>
+                </a:solidFill>
+                <a:latin typeface="Arial"/>
+                <a:ea typeface="Arial"/>
+                <a:cs typeface="Arial"/>
+              </a:rPr>
+              <a:t>✓ Paid in test mode</a:t>
+            </a:r>
+          </a:p>
+          <a:p xmlns:a="http://schemas.openxmlformats.org/drawingml/2006/main">
+            <a:pPr>
+              <a:defRPr sz="1575" b="0">
+                <a:solidFill>
+                  <a:srgbClr val="161616"/>
+                </a:solidFill>
+                <a:latin typeface="Arial"/>
+                <a:ea typeface="Arial"/>
+                <a:cs typeface="Arial"/>
+              </a:defRPr>
+            </a:pPr>
+            <a:r>
+              <a:rPr sz="1575" b="0">
+                <a:solidFill>
+                  <a:srgbClr val="161616"/>
+                </a:solidFill>
+                <a:latin typeface="Arial"/>
+                <a:ea typeface="Arial"/>
+                <a:cs typeface="Arial"/>
+              </a:rPr>
+              <a:t>Pickup QR available</a:t>
+            </a:r>
+          </a:p>
+        </p:txBody>
+      </p:sp>
+      <p:sp>
+        <p:nvSpPr>
+          <p:cNvPr id="142" name="prod-pass">
+            <a:extLst xmlns:a="http://schemas.openxmlformats.org/drawingml/2006/main">
+              <a:ext uri="{FF2B5EF4-FFF2-40B4-BE49-F238E27FC236}">
+                <a16:creationId xmlns:a16="http://schemas.microsoft.com/office/drawing/2014/main" id="{31C4EE25-418E-4781-BC65-9EF59A77AC53}"/>
+              </a:ext>
+            </a:extLst>
+          </p:cNvPr>
+          <p:cNvSpPr>
+            <a:spLocks xmlns:a="http://schemas.openxmlformats.org/drawingml/2006/main" noGrp="1"/>
+          </p:cNvSpPr>
+          <p:nvPr/>
+        </p:nvSpPr>
+        <p:spPr>
+          <a:xfrm xmlns:a="http://schemas.openxmlformats.org/drawingml/2006/main">
+            <a:off x="4762500" y="1971675"/>
+            <a:ext cx="3810000" cy="2171700"/>
+          </a:xfrm>
+          <a:prstGeom xmlns:a="http://schemas.openxmlformats.org/drawingml/2006/main" prst="rect">
+            <a:avLst/>
+          </a:prstGeom>
+          <a:solidFill xmlns:a="http://schemas.openxmlformats.org/drawingml/2006/main">
+            <a:srgbClr val="FFFFFF"/>
+          </a:solidFill>
+          <a:ln xmlns:a="http://schemas.openxmlformats.org/drawingml/2006/main" w="14288">
+            <a:solidFill>
+              <a:srgbClr val="333333"/>
+            </a:solidFill>
+            <a:prstDash val="solid"/>
+          </a:ln>
+        </p:spPr>
+      </p:sp>
+      <p:sp>
+        <p:nvSpPr>
+          <p:cNvPr id="143" name="prod-pass-head">
+            <a:extLst xmlns:a="http://schemas.openxmlformats.org/drawingml/2006/main">
+              <a:ext uri="{FF2B5EF4-FFF2-40B4-BE49-F238E27FC236}">
+                <a16:creationId xmlns:a16="http://schemas.microsoft.com/office/drawing/2014/main" id="{4BFEF74F-D750-4335-8D08-909B0740EEA4}"/>
+              </a:ext>
+            </a:extLst>
+          </p:cNvPr>
+          <p:cNvSpPr>
+            <a:spLocks xmlns:a="http://schemas.openxmlformats.org/drawingml/2006/main" noGrp="1"/>
+          </p:cNvSpPr>
+          <p:nvPr/>
+        </p:nvSpPr>
+        <p:spPr>
+          <a:xfrm xmlns:a="http://schemas.openxmlformats.org/drawingml/2006/main">
+            <a:off x="4924425" y="2133600"/>
+            <a:ext cx="3476625" cy="285750"/>
+          </a:xfrm>
+          <a:prstGeom xmlns:a="http://schemas.openxmlformats.org/drawingml/2006/main" prst="rect">
+            <a:avLst/>
+          </a:prstGeom>
+          <a:noFill xmlns:a="http://schemas.openxmlformats.org/drawingml/2006/main"/>
+          <a:ln xmlns:a="http://schemas.openxmlformats.org/drawingml/2006/main" w="0">
+            <a:noFill/>
+          </a:ln>
+        </p:spPr>
+        <p:txBody>
+          <a:bodyPr xmlns:a="http://schemas.openxmlformats.org/drawingml/2006/main" wrap="square" lIns="0" tIns="0" rIns="0" bIns="0" anchor="t">
+            <a:normAutofit fontScale="100000"/>
+          </a:bodyPr>
+          <a:lstStyle xmlns:a="http://schemas.openxmlformats.org/drawingml/2006/main"/>
+          <a:p xmlns:a="http://schemas.openxmlformats.org/drawingml/2006/main">
+            <a:pPr>
+              <a:defRPr sz="1500" b="1">
+                <a:solidFill>
+                  <a:srgbClr val="161616"/>
+                </a:solidFill>
+                <a:latin typeface="Arial"/>
+                <a:ea typeface="Arial"/>
+                <a:cs typeface="Arial"/>
+              </a:defRPr>
+            </a:pPr>
+            <a:r>
+              <a:rPr sz="1500" b="1">
+                <a:solidFill>
+                  <a:srgbClr val="161616"/>
+                </a:solidFill>
+                <a:latin typeface="Arial"/>
+                <a:ea typeface="Arial"/>
+                <a:cs typeface="Arial"/>
+              </a:rPr>
+              <a:t>Public pickup page</a:t>
+            </a:r>
+          </a:p>
+        </p:txBody>
+      </p:sp>
+      <p:sp>
+        <p:nvSpPr>
+          <p:cNvPr id="144" name="prod-pass-body">
+            <a:extLst xmlns:a="http://schemas.openxmlformats.org/drawingml/2006/main">
+              <a:ext uri="{FF2B5EF4-FFF2-40B4-BE49-F238E27FC236}">
+                <a16:creationId xmlns:a16="http://schemas.microsoft.com/office/drawing/2014/main" id="{4EC8260F-1303-4B1F-BCDD-15CE74D3CC7D}"/>
+              </a:ext>
+            </a:extLst>
+          </p:cNvPr>
+          <p:cNvSpPr>
+            <a:spLocks xmlns:a="http://schemas.openxmlformats.org/drawingml/2006/main" noGrp="1"/>
+          </p:cNvSpPr>
+          <p:nvPr/>
+        </p:nvSpPr>
+        <p:spPr>
+          <a:xfrm xmlns:a="http://schemas.openxmlformats.org/drawingml/2006/main">
+            <a:off x="4924425" y="2600325"/>
+            <a:ext cx="3476625" cy="1352550"/>
           </a:xfrm>
           <a:prstGeom xmlns:a="http://schemas.openxmlformats.org/drawingml/2006/main" prst="rect">
             <a:avLst/>
@@ -8468,29 +8114,98 @@
                 <a:ea typeface="Arial"/>
                 <a:cs typeface="Arial"/>
               </a:rPr>
-              <a:t>Every agreed benchmark price stayed within both parties’ private limits. Ten infeasible pairs made no deal.</a:t>
+              <a:t>✓ Paid · Not collected yet</a:t>
             </a:r>
           </a:p>
-        </p:txBody>
-      </p:sp>
-      <p:sp>
-        <p:nvSpPr>
-          <p:cNvPr id="155" name="limits">
-            <a:extLst xmlns:a="http://schemas.openxmlformats.org/drawingml/2006/main">
-              <a:ext uri="{FF2B5EF4-FFF2-40B4-BE49-F238E27FC236}">
-                <a16:creationId xmlns:a16="http://schemas.microsoft.com/office/drawing/2014/main" id="{742CDEE7-83F6-4246-9650-057B75EB553E}"/>
-              </a:ext>
-            </a:extLst>
-          </p:cNvPr>
-          <p:cNvSpPr>
-            <a:spLocks xmlns:a="http://schemas.openxmlformats.org/drawingml/2006/main" noGrp="1"/>
-          </p:cNvSpPr>
-          <p:nvPr/>
-        </p:nvSpPr>
-        <p:spPr>
-          <a:xfrm xmlns:a="http://schemas.openxmlformats.org/drawingml/2006/main">
-            <a:off x="523875" y="4019550"/>
-            <a:ext cx="8048625" cy="714375"/>
+          <a:p xmlns:a="http://schemas.openxmlformats.org/drawingml/2006/main">
+            <a:pPr>
+              <a:defRPr sz="1575" b="0">
+                <a:solidFill>
+                  <a:srgbClr val="161616"/>
+                </a:solidFill>
+                <a:latin typeface="Arial"/>
+                <a:ea typeface="Arial"/>
+                <a:cs typeface="Arial"/>
+              </a:defRPr>
+            </a:pPr>
+            <a:r>
+              <a:rPr sz="1575" b="0">
+                <a:solidFill>
+                  <a:srgbClr val="161616"/>
+                </a:solidFill>
+                <a:latin typeface="Arial"/>
+                <a:ea typeface="Arial"/>
+                <a:cs typeface="Arial"/>
+              </a:rPr>
+              <a:t>Item: Water bottles</a:t>
+            </a:r>
+          </a:p>
+          <a:p xmlns:a="http://schemas.openxmlformats.org/drawingml/2006/main">
+            <a:pPr>
+              <a:defRPr sz="1575" b="0">
+                <a:solidFill>
+                  <a:srgbClr val="161616"/>
+                </a:solidFill>
+                <a:latin typeface="Arial"/>
+                <a:ea typeface="Arial"/>
+                <a:cs typeface="Arial"/>
+              </a:defRPr>
+            </a:pPr>
+            <a:r>
+              <a:rPr sz="1575" b="0">
+                <a:solidFill>
+                  <a:srgbClr val="161616"/>
+                </a:solidFill>
+                <a:latin typeface="Arial"/>
+                <a:ea typeface="Arial"/>
+                <a:cs typeface="Arial"/>
+              </a:rPr>
+              <a:t>Amount: INR 410</a:t>
+            </a:r>
+          </a:p>
+          <a:p xmlns:a="http://schemas.openxmlformats.org/drawingml/2006/main">
+            <a:pPr>
+              <a:defRPr sz="1575" b="0">
+                <a:solidFill>
+                  <a:srgbClr val="161616"/>
+                </a:solidFill>
+                <a:latin typeface="Arial"/>
+                <a:ea typeface="Arial"/>
+                <a:cs typeface="Arial"/>
+              </a:defRPr>
+            </a:pPr>
+            <a:r>
+              <a:rPr sz="1575" b="0">
+                <a:solidFill>
+                  <a:srgbClr val="161616"/>
+                </a:solidFill>
+                <a:latin typeface="Arial"/>
+                <a:ea typeface="Arial"/>
+                <a:cs typeface="Arial"/>
+              </a:rPr>
+              <a:t>Buyer: Anu</a:t>
+            </a:r>
+          </a:p>
+        </p:txBody>
+      </p:sp>
+      <p:sp>
+        <p:nvSpPr>
+          <p:cNvPr id="145" name="prod-note">
+            <a:extLst xmlns:a="http://schemas.openxmlformats.org/drawingml/2006/main">
+              <a:ext uri="{FF2B5EF4-FFF2-40B4-BE49-F238E27FC236}">
+                <a16:creationId xmlns:a16="http://schemas.microsoft.com/office/drawing/2014/main" id="{80439488-5AA4-4426-8689-627B66627C8B}"/>
+              </a:ext>
+            </a:extLst>
+          </p:cNvPr>
+          <p:cNvSpPr>
+            <a:spLocks xmlns:a="http://schemas.openxmlformats.org/drawingml/2006/main" noGrp="1"/>
+          </p:cNvSpPr>
+          <p:nvPr/>
+        </p:nvSpPr>
+        <p:spPr>
+          <a:xfrm xmlns:a="http://schemas.openxmlformats.org/drawingml/2006/main">
+            <a:off x="523875" y="4305300"/>
+            <a:ext cx="8048625" cy="552450"/>
           </a:xfrm>
           <a:prstGeom xmlns:a="http://schemas.openxmlformats.org/drawingml/2006/main" prst="rect">
             <a:avLst/>
@@ -8507,7 +8222,7 @@
           <a:lstStyle xmlns:a="http://schemas.openxmlformats.org/drawingml/2006/main"/>
           <a:p xmlns:a="http://schemas.openxmlformats.org/drawingml/2006/main">
             <a:pPr>
-              <a:defRPr sz="1275" b="0">
+              <a:defRPr sz="1200" b="0">
                 <a:solidFill>
                   <a:srgbClr val="444444"/>
                 </a:solidFill>
@@ -8517,7 +8232,7 @@
               </a:defRPr>
             </a:pPr>
             <a:r>
-              <a:rPr sz="1275" b="0">
+              <a:rPr sz="1200" b="0">
                 <a:solidFill>
                   <a:srgbClr val="444444"/>
                 </a:solidFill>
@@ -8525,7 +8240,7 @@
                 <a:ea typeface="Arial"/>
                 <a:cs typeface="Arial"/>
               </a:rPr>
-              <a:t>Benchmark used one product, repeated intent and attack templates, an in-memory store and laptop-to-Vertex latency. All 100 privacy probes escalated to the owner.</a:t>
+              <a:t>Schematic reconstruction of the live screens. The public receipt page verified a Collab-issued Ed25519 attestation; this older order’s payment signatures are legacy HMAC.</a:t>
             </a:r>
           </a:p>
         </p:txBody>
@@ -8533,7 +8248,7 @@
     </p:spTree>
     <p:extLst>
       <p:ext uri="{BB962C8B-B14F-4D97-AF65-F5344CB8AC3E}">
-        <p14:creationId xmlns:p14="http://schemas.microsoft.com/office/powerpoint/2010/main" val="1240018232"/>
+        <p14:creationId xmlns:p14="http://schemas.microsoft.com/office/powerpoint/2010/main" val="492101900"/>
       </p:ext>
     </p:extLst>
   </p:cSld>
@@ -8554,14 +8269,14 @@
       </p:grpSpPr>
       <p:pic>
         <p:nvPicPr>
-          <p:cNvPr id="160" name="Google Shape;148;p25"/>
+          <p:cNvPr id="156" name="Google Shape;140;p24"/>
           <p:cNvPicPr>
             <a:picLocks xmlns:a="http://schemas.openxmlformats.org/drawingml/2006/main" noChangeAspect="1"/>
           </p:cNvPicPr>
           <p:nvPr/>
         </p:nvPicPr>
         <p:blipFill rotWithShape="1">
-          <a:blip xmlns:r="http://schemas.openxmlformats.org/officeDocument/2006/relationships" xmlns:a="http://schemas.openxmlformats.org/drawingml/2006/main" r:embed="R6960c18a294d44bd">
+          <a:blip xmlns:r="http://schemas.openxmlformats.org/officeDocument/2006/relationships" xmlns:a="http://schemas.openxmlformats.org/drawingml/2006/main" r:embed="Rad79405bbcff468d">
             <a:alphaModFix/>
           </a:blip>
           <a:srcRect xmlns:a="http://schemas.openxmlformats.org/drawingml/2006/main" l="0" t="0" r="0" b="98001"/>
@@ -8582,14 +8297,14 @@
       </p:pic>
       <p:pic>
         <p:nvPicPr>
-          <p:cNvPr id="161" name="Google Shape;149;p25"/>
+          <p:cNvPr id="157" name="Google Shape;141;p24"/>
           <p:cNvPicPr>
             <a:picLocks xmlns:a="http://schemas.openxmlformats.org/drawingml/2006/main" noChangeAspect="1"/>
           </p:cNvPicPr>
           <p:nvPr/>
         </p:nvPicPr>
         <p:blipFill>
-          <a:blip xmlns:r="http://schemas.openxmlformats.org/officeDocument/2006/relationships" xmlns:a="http://schemas.openxmlformats.org/drawingml/2006/main" r:embed="R9698732274bf4fb9">
+          <a:blip xmlns:r="http://schemas.openxmlformats.org/officeDocument/2006/relationships" xmlns:a="http://schemas.openxmlformats.org/drawingml/2006/main" r:embed="R4a4d9fa2dfef49ce">
             <a:alphaModFix/>
           </a:blip>
           <a:stretch xmlns:a="http://schemas.openxmlformats.org/drawingml/2006/main">
@@ -8611,10 +8326,10 @@
       </p:pic>
       <p:sp>
         <p:nvSpPr>
-          <p:cNvPr id="150" name="Google Shape;150;p25">
-            <a:extLst xmlns:a="http://schemas.openxmlformats.org/drawingml/2006/main">
-              <a:ext uri="{FF2B5EF4-FFF2-40B4-BE49-F238E27FC236}">
-                <a16:creationId xmlns:a16="http://schemas.microsoft.com/office/drawing/2014/main" id="{277D2E1B-3C3B-4C6A-BD9C-D8B3E9E4C643}"/>
+          <p:cNvPr id="142" name="Google Shape;142;p24">
+            <a:extLst xmlns:a="http://schemas.openxmlformats.org/drawingml/2006/main">
+              <a:ext uri="{FF2B5EF4-FFF2-40B4-BE49-F238E27FC236}">
+                <a16:creationId xmlns:a16="http://schemas.microsoft.com/office/drawing/2014/main" id="{8D3D96A8-EA02-446B-B557-59343D8C2E8E}"/>
               </a:ext>
             </a:extLst>
           </p:cNvPr>
@@ -8662,10 +8377,10 @@
       </p:sp>
       <p:sp>
         <p:nvSpPr>
-          <p:cNvPr id="151" name="Google Shape;151;p25">
-            <a:extLst xmlns:a="http://schemas.openxmlformats.org/drawingml/2006/main">
-              <a:ext uri="{FF2B5EF4-FFF2-40B4-BE49-F238E27FC236}">
-                <a16:creationId xmlns:a16="http://schemas.microsoft.com/office/drawing/2014/main" id="{D14D4CE4-ED9C-42FA-AD82-1973C334E6D1}"/>
+          <p:cNvPr id="143" name="Google Shape;143;p24">
+            <a:extLst xmlns:a="http://schemas.openxmlformats.org/drawingml/2006/main">
+              <a:ext uri="{FF2B5EF4-FFF2-40B4-BE49-F238E27FC236}">
+                <a16:creationId xmlns:a16="http://schemas.microsoft.com/office/drawing/2014/main" id="{3932C7D3-549F-4BE3-B31C-673A6DE14438}"/>
               </a:ext>
             </a:extLst>
           </p:cNvPr>
@@ -8719,7 +8434,7 @@
                 <a:ea typeface="Arial"/>
                 <a:cs typeface="Arial"/>
               </a:rPr>
-              <a:t>Next steps and provenance</a:t>
+              <a:t>Prototype performance and tests</a:t>
             </a:r>
             <a:endParaRPr sz="1600">
               <a:latin typeface="Google Sans Flex Medium"/>
@@ -8731,10 +8446,10 @@
       </p:sp>
       <p:sp>
         <p:nvSpPr>
-          <p:cNvPr id="154" name="next1">
-            <a:extLst xmlns:a="http://schemas.openxmlformats.org/drawingml/2006/main">
-              <a:ext uri="{FF2B5EF4-FFF2-40B4-BE49-F238E27FC236}">
-                <a16:creationId xmlns:a16="http://schemas.microsoft.com/office/drawing/2014/main" id="{7BB9F454-8E46-451E-8EE2-FF709400A600}"/>
+          <p:cNvPr id="146" name="m1">
+            <a:extLst xmlns:a="http://schemas.openxmlformats.org/drawingml/2006/main">
+              <a:ext uri="{FF2B5EF4-FFF2-40B4-BE49-F238E27FC236}">
+                <a16:creationId xmlns:a16="http://schemas.microsoft.com/office/drawing/2014/main" id="{4B3B3E66-D2AB-4883-A214-776F396F0D3D}"/>
               </a:ext>
             </a:extLst>
           </p:cNvPr>
@@ -8746,7 +8461,7 @@
         <p:spPr>
           <a:xfrm xmlns:a="http://schemas.openxmlformats.org/drawingml/2006/main">
             <a:off x="523875" y="1495425"/>
-            <a:ext cx="8048625" cy="323850"/>
+            <a:ext cx="2257425" cy="485775"/>
           </a:xfrm>
           <a:prstGeom xmlns:a="http://schemas.openxmlformats.org/drawingml/2006/main" prst="rect">
             <a:avLst/>
@@ -8763,9 +8478,9 @@
           <a:lstStyle xmlns:a="http://schemas.openxmlformats.org/drawingml/2006/main"/>
           <a:p xmlns:a="http://schemas.openxmlformats.org/drawingml/2006/main">
             <a:pPr>
-              <a:defRPr sz="1725" b="1">
-                <a:solidFill>
-                  <a:srgbClr val="161616"/>
+              <a:defRPr sz="2625" b="1">
+                <a:solidFill>
+                  <a:srgbClr val="1A73E8"/>
                 </a:solidFill>
                 <a:latin typeface="Arial"/>
                 <a:ea typeface="Arial"/>
@@ -8773,37 +8488,37 @@
               </a:defRPr>
             </a:pPr>
             <a:r>
-              <a:rPr sz="1725" b="1">
-                <a:solidFill>
-                  <a:srgbClr val="161616"/>
+              <a:rPr sz="2625" b="1">
+                <a:solidFill>
+                  <a:srgbClr val="1A73E8"/>
                 </a:solidFill>
                 <a:latin typeface="Arial"/>
                 <a:ea typeface="Arial"/>
                 <a:cs typeface="Arial"/>
               </a:rPr>
-              <a:t>Near-term additions</a:t>
+              <a:t>58 / 58</a:t>
             </a:r>
           </a:p>
         </p:txBody>
       </p:sp>
       <p:sp>
         <p:nvSpPr>
-          <p:cNvPr id="155" name="next1b">
-            <a:extLst xmlns:a="http://schemas.openxmlformats.org/drawingml/2006/main">
-              <a:ext uri="{FF2B5EF4-FFF2-40B4-BE49-F238E27FC236}">
-                <a16:creationId xmlns:a16="http://schemas.microsoft.com/office/drawing/2014/main" id="{3474E016-C04B-4A4A-9B6A-793936D0D3B1}"/>
-              </a:ext>
-            </a:extLst>
-          </p:cNvPr>
-          <p:cNvSpPr>
-            <a:spLocks xmlns:a="http://schemas.openxmlformats.org/drawingml/2006/main" noGrp="1"/>
-          </p:cNvSpPr>
-          <p:nvPr/>
-        </p:nvSpPr>
-        <p:spPr>
-          <a:xfrm xmlns:a="http://schemas.openxmlformats.org/drawingml/2006/main">
-            <a:off x="523875" y="1895475"/>
-            <a:ext cx="8048625" cy="771525"/>
+          <p:cNvPr id="147" name="m1b">
+            <a:extLst xmlns:a="http://schemas.openxmlformats.org/drawingml/2006/main">
+              <a:ext uri="{FF2B5EF4-FFF2-40B4-BE49-F238E27FC236}">
+                <a16:creationId xmlns:a16="http://schemas.microsoft.com/office/drawing/2014/main" id="{A5A762FD-807A-44CD-8BD1-19E04DDB1E5A}"/>
+              </a:ext>
+            </a:extLst>
+          </p:cNvPr>
+          <p:cNvSpPr>
+            <a:spLocks xmlns:a="http://schemas.openxmlformats.org/drawingml/2006/main" noGrp="1"/>
+          </p:cNvSpPr>
+          <p:nvPr/>
+        </p:nvSpPr>
+        <p:spPr>
+          <a:xfrm xmlns:a="http://schemas.openxmlformats.org/drawingml/2006/main">
+            <a:off x="523875" y="2009775"/>
+            <a:ext cx="2333625" cy="323850"/>
           </a:xfrm>
           <a:prstGeom xmlns:a="http://schemas.openxmlformats.org/drawingml/2006/main" prst="rect">
             <a:avLst/>
@@ -8820,7 +8535,7 @@
           <a:lstStyle xmlns:a="http://schemas.openxmlformats.org/drawingml/2006/main"/>
           <a:p xmlns:a="http://schemas.openxmlformats.org/drawingml/2006/main">
             <a:pPr>
-              <a:defRPr sz="1500" b="0">
+              <a:defRPr sz="1350" b="0">
                 <a:solidFill>
                   <a:srgbClr val="161616"/>
                 </a:solidFill>
@@ -8830,7 +8545,7 @@
               </a:defRPr>
             </a:pPr>
             <a:r>
-              <a:rPr sz="1500" b="0">
+              <a:rPr sz="1350" b="0">
                 <a:solidFill>
                   <a:srgbClr val="161616"/>
                 </a:solidFill>
@@ -8838,59 +8553,29 @@
                 <a:ea typeface="Arial"/>
                 <a:cs typeface="Arial"/>
               </a:rPr>
-              <a:t>Seller counter view for today’s paid orders; controlled pickup-window tradeoffs; Model Armor screening on outside-agent text.</a:t>
+              <a:t>automated tests passed</a:t>
             </a:r>
           </a:p>
         </p:txBody>
       </p:sp>
       <p:sp>
         <p:nvSpPr>
-          <p:cNvPr id="156" name="next-rule">
-            <a:extLst xmlns:a="http://schemas.openxmlformats.org/drawingml/2006/main">
-              <a:ext uri="{FF2B5EF4-FFF2-40B4-BE49-F238E27FC236}">
-                <a16:creationId xmlns:a16="http://schemas.microsoft.com/office/drawing/2014/main" id="{C8BE332B-F2FE-4819-83D7-4C30F1007BEE}"/>
-              </a:ext>
-            </a:extLst>
-          </p:cNvPr>
-          <p:cNvSpPr>
-            <a:spLocks xmlns:a="http://schemas.openxmlformats.org/drawingml/2006/main" noGrp="1"/>
-          </p:cNvSpPr>
-          <p:nvPr/>
-        </p:nvSpPr>
-        <p:spPr>
-          <a:xfrm xmlns:a="http://schemas.openxmlformats.org/drawingml/2006/main">
-            <a:off x="523875" y="2828925"/>
-            <a:ext cx="8048625" cy="19050"/>
-          </a:xfrm>
-          <a:prstGeom xmlns:a="http://schemas.openxmlformats.org/drawingml/2006/main" prst="rect">
-            <a:avLst/>
-          </a:prstGeom>
-          <a:solidFill xmlns:a="http://schemas.openxmlformats.org/drawingml/2006/main">
-            <a:srgbClr val="B9B9B9"/>
-          </a:solidFill>
-          <a:ln xmlns:a="http://schemas.openxmlformats.org/drawingml/2006/main" w="0">
-            <a:noFill/>
-          </a:ln>
-        </p:spPr>
-      </p:sp>
-      <p:sp>
-        <p:nvSpPr>
-          <p:cNvPr id="157" name="next2">
-            <a:extLst xmlns:a="http://schemas.openxmlformats.org/drawingml/2006/main">
-              <a:ext uri="{FF2B5EF4-FFF2-40B4-BE49-F238E27FC236}">
-                <a16:creationId xmlns:a16="http://schemas.microsoft.com/office/drawing/2014/main" id="{DC1E4EF6-5868-48B3-B5AB-2D2022DA0115}"/>
-              </a:ext>
-            </a:extLst>
-          </p:cNvPr>
-          <p:cNvSpPr>
-            <a:spLocks xmlns:a="http://schemas.openxmlformats.org/drawingml/2006/main" noGrp="1"/>
-          </p:cNvSpPr>
-          <p:nvPr/>
-        </p:nvSpPr>
-        <p:spPr>
-          <a:xfrm xmlns:a="http://schemas.openxmlformats.org/drawingml/2006/main">
-            <a:off x="523875" y="3000375"/>
-            <a:ext cx="8048625" cy="323850"/>
+          <p:cNvPr id="148" name="m2">
+            <a:extLst xmlns:a="http://schemas.openxmlformats.org/drawingml/2006/main">
+              <a:ext uri="{FF2B5EF4-FFF2-40B4-BE49-F238E27FC236}">
+                <a16:creationId xmlns:a16="http://schemas.microsoft.com/office/drawing/2014/main" id="{19E7129B-7B01-48E9-9B1D-FFD7D92D6525}"/>
+              </a:ext>
+            </a:extLst>
+          </p:cNvPr>
+          <p:cNvSpPr>
+            <a:spLocks xmlns:a="http://schemas.openxmlformats.org/drawingml/2006/main" noGrp="1"/>
+          </p:cNvSpPr>
+          <p:nvPr/>
+        </p:nvSpPr>
+        <p:spPr>
+          <a:xfrm xmlns:a="http://schemas.openxmlformats.org/drawingml/2006/main">
+            <a:off x="3238500" y="1495425"/>
+            <a:ext cx="2257425" cy="485775"/>
           </a:xfrm>
           <a:prstGeom xmlns:a="http://schemas.openxmlformats.org/drawingml/2006/main" prst="rect">
             <a:avLst/>
@@ -8907,9 +8592,9 @@
           <a:lstStyle xmlns:a="http://schemas.openxmlformats.org/drawingml/2006/main"/>
           <a:p xmlns:a="http://schemas.openxmlformats.org/drawingml/2006/main">
             <a:pPr>
-              <a:defRPr sz="1725" b="1">
-                <a:solidFill>
-                  <a:srgbClr val="161616"/>
+              <a:defRPr sz="2625" b="1">
+                <a:solidFill>
+                  <a:srgbClr val="1A73E8"/>
                 </a:solidFill>
                 <a:latin typeface="Arial"/>
                 <a:ea typeface="Arial"/>
@@ -8917,37 +8602,37 @@
               </a:defRPr>
             </a:pPr>
             <a:r>
-              <a:rPr sz="1725" b="1">
-                <a:solidFill>
-                  <a:srgbClr val="161616"/>
+              <a:rPr sz="2625" b="1">
+                <a:solidFill>
+                  <a:srgbClr val="1A73E8"/>
                 </a:solidFill>
                 <a:latin typeface="Arial"/>
                 <a:ea typeface="Arial"/>
                 <a:cs typeface="Arial"/>
               </a:rPr>
-              <a:t>Later roadmap</a:t>
+              <a:t>38 / 39</a:t>
             </a:r>
           </a:p>
         </p:txBody>
       </p:sp>
       <p:sp>
         <p:nvSpPr>
-          <p:cNvPr id="158" name="next2b">
-            <a:extLst xmlns:a="http://schemas.openxmlformats.org/drawingml/2006/main">
-              <a:ext uri="{FF2B5EF4-FFF2-40B4-BE49-F238E27FC236}">
-                <a16:creationId xmlns:a16="http://schemas.microsoft.com/office/drawing/2014/main" id="{F98C7AC8-2801-4C83-AD71-3052C17C0F66}"/>
-              </a:ext>
-            </a:extLst>
-          </p:cNvPr>
-          <p:cNvSpPr>
-            <a:spLocks xmlns:a="http://schemas.openxmlformats.org/drawingml/2006/main" noGrp="1"/>
-          </p:cNvSpPr>
-          <p:nvPr/>
-        </p:nvSpPr>
-        <p:spPr>
-          <a:xfrm xmlns:a="http://schemas.openxmlformats.org/drawingml/2006/main">
-            <a:off x="523875" y="3400425"/>
-            <a:ext cx="8048625" cy="542925"/>
+          <p:cNvPr id="149" name="m2b">
+            <a:extLst xmlns:a="http://schemas.openxmlformats.org/drawingml/2006/main">
+              <a:ext uri="{FF2B5EF4-FFF2-40B4-BE49-F238E27FC236}">
+                <a16:creationId xmlns:a16="http://schemas.microsoft.com/office/drawing/2014/main" id="{3678C00E-88C6-428E-B583-C33F5E35671E}"/>
+              </a:ext>
+            </a:extLst>
+          </p:cNvPr>
+          <p:cNvSpPr>
+            <a:spLocks xmlns:a="http://schemas.openxmlformats.org/drawingml/2006/main" noGrp="1"/>
+          </p:cNvSpPr>
+          <p:nvPr/>
+        </p:nvSpPr>
+        <p:spPr>
+          <a:xfrm xmlns:a="http://schemas.openxmlformats.org/drawingml/2006/main">
+            <a:off x="3238500" y="2009775"/>
+            <a:ext cx="2447925" cy="323850"/>
           </a:xfrm>
           <a:prstGeom xmlns:a="http://schemas.openxmlformats.org/drawingml/2006/main" prst="rect">
             <a:avLst/>
@@ -8964,7 +8649,7 @@
           <a:lstStyle xmlns:a="http://schemas.openxmlformats.org/drawingml/2006/main"/>
           <a:p xmlns:a="http://schemas.openxmlformats.org/drawingml/2006/main">
             <a:pPr>
-              <a:defRPr sz="1500" b="0">
+              <a:defRPr sz="1350" b="0">
                 <a:solidFill>
                   <a:srgbClr val="161616"/>
                 </a:solidFill>
@@ -8974,7 +8659,7 @@
               </a:defRPr>
             </a:pPr>
             <a:r>
-              <a:rPr sz="1500" b="0">
+              <a:rPr sz="1350" b="0">
                 <a:solidFill>
                   <a:srgbClr val="161616"/>
                 </a:solidFill>
@@ -8982,29 +8667,287 @@
                 <a:ea typeface="Arial"/>
                 <a:cs typeface="Arial"/>
               </a:rPr>
-              <a:t>Real payment-provider integration and UPI reconciliation. The hackathon prototype moves no money.</a:t>
+              <a:t>feasible price pairs agreed</a:t>
             </a:r>
           </a:p>
         </p:txBody>
       </p:sp>
       <p:sp>
         <p:nvSpPr>
-          <p:cNvPr id="159" name="prov">
-            <a:extLst xmlns:a="http://schemas.openxmlformats.org/drawingml/2006/main">
-              <a:ext uri="{FF2B5EF4-FFF2-40B4-BE49-F238E27FC236}">
-                <a16:creationId xmlns:a16="http://schemas.microsoft.com/office/drawing/2014/main" id="{DFD04ECC-DFF2-493C-A79C-18E1283CBB53}"/>
-              </a:ext>
-            </a:extLst>
-          </p:cNvPr>
-          <p:cNvSpPr>
-            <a:spLocks xmlns:a="http://schemas.openxmlformats.org/drawingml/2006/main" noGrp="1"/>
-          </p:cNvSpPr>
-          <p:nvPr/>
-        </p:nvSpPr>
-        <p:spPr>
-          <a:xfrm xmlns:a="http://schemas.openxmlformats.org/drawingml/2006/main">
-            <a:off x="523875" y="4219575"/>
-            <a:ext cx="8048625" cy="609600"/>
+          <p:cNvPr id="150" name="m3">
+            <a:extLst xmlns:a="http://schemas.openxmlformats.org/drawingml/2006/main">
+              <a:ext uri="{FF2B5EF4-FFF2-40B4-BE49-F238E27FC236}">
+                <a16:creationId xmlns:a16="http://schemas.microsoft.com/office/drawing/2014/main" id="{C51414E7-AB31-4A71-A746-3D057881B33B}"/>
+              </a:ext>
+            </a:extLst>
+          </p:cNvPr>
+          <p:cNvSpPr>
+            <a:spLocks xmlns:a="http://schemas.openxmlformats.org/drawingml/2006/main" noGrp="1"/>
+          </p:cNvSpPr>
+          <p:nvPr/>
+        </p:nvSpPr>
+        <p:spPr>
+          <a:xfrm xmlns:a="http://schemas.openxmlformats.org/drawingml/2006/main">
+            <a:off x="6162675" y="1495425"/>
+            <a:ext cx="2505075" cy="485775"/>
+          </a:xfrm>
+          <a:prstGeom xmlns:a="http://schemas.openxmlformats.org/drawingml/2006/main" prst="rect">
+            <a:avLst/>
+          </a:prstGeom>
+          <a:noFill xmlns:a="http://schemas.openxmlformats.org/drawingml/2006/main"/>
+          <a:ln xmlns:a="http://schemas.openxmlformats.org/drawingml/2006/main" w="0">
+            <a:noFill/>
+          </a:ln>
+        </p:spPr>
+        <p:txBody>
+          <a:bodyPr xmlns:a="http://schemas.openxmlformats.org/drawingml/2006/main" wrap="square" lIns="0" tIns="0" rIns="0" bIns="0" anchor="t">
+            <a:normAutofit fontScale="100000"/>
+          </a:bodyPr>
+          <a:lstStyle xmlns:a="http://schemas.openxmlformats.org/drawingml/2006/main"/>
+          <a:p xmlns:a="http://schemas.openxmlformats.org/drawingml/2006/main">
+            <a:pPr>
+              <a:defRPr sz="2625" b="1">
+                <a:solidFill>
+                  <a:srgbClr val="1A73E8"/>
+                </a:solidFill>
+                <a:latin typeface="Arial"/>
+                <a:ea typeface="Arial"/>
+                <a:cs typeface="Arial"/>
+              </a:defRPr>
+            </a:pPr>
+            <a:r>
+              <a:rPr sz="2625" b="1">
+                <a:solidFill>
+                  <a:srgbClr val="1A73E8"/>
+                </a:solidFill>
+                <a:latin typeface="Arial"/>
+                <a:ea typeface="Arial"/>
+                <a:cs typeface="Arial"/>
+              </a:rPr>
+              <a:t>100 / 100</a:t>
+            </a:r>
+          </a:p>
+        </p:txBody>
+      </p:sp>
+      <p:sp>
+        <p:nvSpPr>
+          <p:cNvPr id="151" name="m3b">
+            <a:extLst xmlns:a="http://schemas.openxmlformats.org/drawingml/2006/main">
+              <a:ext uri="{FF2B5EF4-FFF2-40B4-BE49-F238E27FC236}">
+                <a16:creationId xmlns:a16="http://schemas.microsoft.com/office/drawing/2014/main" id="{2541CD8B-C88E-429C-83FF-18F8BC02CB30}"/>
+              </a:ext>
+            </a:extLst>
+          </p:cNvPr>
+          <p:cNvSpPr>
+            <a:spLocks xmlns:a="http://schemas.openxmlformats.org/drawingml/2006/main" noGrp="1"/>
+          </p:cNvSpPr>
+          <p:nvPr/>
+        </p:nvSpPr>
+        <p:spPr>
+          <a:xfrm xmlns:a="http://schemas.openxmlformats.org/drawingml/2006/main">
+            <a:off x="6162675" y="2009775"/>
+            <a:ext cx="2505075" cy="323850"/>
+          </a:xfrm>
+          <a:prstGeom xmlns:a="http://schemas.openxmlformats.org/drawingml/2006/main" prst="rect">
+            <a:avLst/>
+          </a:prstGeom>
+          <a:noFill xmlns:a="http://schemas.openxmlformats.org/drawingml/2006/main"/>
+          <a:ln xmlns:a="http://schemas.openxmlformats.org/drawingml/2006/main" w="0">
+            <a:noFill/>
+          </a:ln>
+        </p:spPr>
+        <p:txBody>
+          <a:bodyPr xmlns:a="http://schemas.openxmlformats.org/drawingml/2006/main" wrap="square" lIns="0" tIns="0" rIns="0" bIns="0" anchor="t">
+            <a:normAutofit fontScale="100000"/>
+          </a:bodyPr>
+          <a:lstStyle xmlns:a="http://schemas.openxmlformats.org/drawingml/2006/main"/>
+          <a:p xmlns:a="http://schemas.openxmlformats.org/drawingml/2006/main">
+            <a:pPr>
+              <a:defRPr sz="1350" b="0">
+                <a:solidFill>
+                  <a:srgbClr val="161616"/>
+                </a:solidFill>
+                <a:latin typeface="Arial"/>
+                <a:ea typeface="Arial"/>
+                <a:cs typeface="Arial"/>
+              </a:defRPr>
+            </a:pPr>
+            <a:r>
+              <a:rPr sz="1350" b="0">
+                <a:solidFill>
+                  <a:srgbClr val="161616"/>
+                </a:solidFill>
+                <a:latin typeface="Arial"/>
+                <a:ea typeface="Arial"/>
+                <a:cs typeface="Arial"/>
+              </a:rPr>
+              <a:t>canary probes withheld</a:t>
+            </a:r>
+          </a:p>
+        </p:txBody>
+      </p:sp>
+      <p:sp>
+        <p:nvSpPr>
+          <p:cNvPr id="152" name="metric-rule">
+            <a:extLst xmlns:a="http://schemas.openxmlformats.org/drawingml/2006/main">
+              <a:ext uri="{FF2B5EF4-FFF2-40B4-BE49-F238E27FC236}">
+                <a16:creationId xmlns:a16="http://schemas.microsoft.com/office/drawing/2014/main" id="{693DDF3D-8A48-48F4-AB2C-28A1CFC0AC27}"/>
+              </a:ext>
+            </a:extLst>
+          </p:cNvPr>
+          <p:cNvSpPr>
+            <a:spLocks xmlns:a="http://schemas.openxmlformats.org/drawingml/2006/main" noGrp="1"/>
+          </p:cNvSpPr>
+          <p:nvPr/>
+        </p:nvSpPr>
+        <p:spPr>
+          <a:xfrm xmlns:a="http://schemas.openxmlformats.org/drawingml/2006/main">
+            <a:off x="523875" y="2476500"/>
+            <a:ext cx="8048625" cy="19050"/>
+          </a:xfrm>
+          <a:prstGeom xmlns:a="http://schemas.openxmlformats.org/drawingml/2006/main" prst="rect">
+            <a:avLst/>
+          </a:prstGeom>
+          <a:solidFill xmlns:a="http://schemas.openxmlformats.org/drawingml/2006/main">
+            <a:srgbClr val="B9B9B9"/>
+          </a:solidFill>
+          <a:ln xmlns:a="http://schemas.openxmlformats.org/drawingml/2006/main" w="0">
+            <a:noFill/>
+          </a:ln>
+        </p:spPr>
+      </p:sp>
+      <p:sp>
+        <p:nvSpPr>
+          <p:cNvPr id="153" name="latency">
+            <a:extLst xmlns:a="http://schemas.openxmlformats.org/drawingml/2006/main">
+              <a:ext uri="{FF2B5EF4-FFF2-40B4-BE49-F238E27FC236}">
+                <a16:creationId xmlns:a16="http://schemas.microsoft.com/office/drawing/2014/main" id="{4BCDDCD2-7A30-4A02-B026-6A6241C4204A}"/>
+              </a:ext>
+            </a:extLst>
+          </p:cNvPr>
+          <p:cNvSpPr>
+            <a:spLocks xmlns:a="http://schemas.openxmlformats.org/drawingml/2006/main" noGrp="1"/>
+          </p:cNvSpPr>
+          <p:nvPr/>
+        </p:nvSpPr>
+        <p:spPr>
+          <a:xfrm xmlns:a="http://schemas.openxmlformats.org/drawingml/2006/main">
+            <a:off x="523875" y="2705100"/>
+            <a:ext cx="8048625" cy="409575"/>
+          </a:xfrm>
+          <a:prstGeom xmlns:a="http://schemas.openxmlformats.org/drawingml/2006/main" prst="rect">
+            <a:avLst/>
+          </a:prstGeom>
+          <a:noFill xmlns:a="http://schemas.openxmlformats.org/drawingml/2006/main"/>
+          <a:ln xmlns:a="http://schemas.openxmlformats.org/drawingml/2006/main" w="0">
+            <a:noFill/>
+          </a:ln>
+        </p:spPr>
+        <p:txBody>
+          <a:bodyPr xmlns:a="http://schemas.openxmlformats.org/drawingml/2006/main" wrap="square" lIns="0" tIns="0" rIns="0" bIns="0" anchor="t">
+            <a:normAutofit fontScale="100000"/>
+          </a:bodyPr>
+          <a:lstStyle xmlns:a="http://schemas.openxmlformats.org/drawingml/2006/main"/>
+          <a:p xmlns:a="http://schemas.openxmlformats.org/drawingml/2006/main">
+            <a:pPr>
+              <a:defRPr sz="1575" b="0">
+                <a:solidFill>
+                  <a:srgbClr val="161616"/>
+                </a:solidFill>
+                <a:latin typeface="Arial"/>
+                <a:ea typeface="Arial"/>
+                <a:cs typeface="Arial"/>
+              </a:defRPr>
+            </a:pPr>
+            <a:r>
+              <a:rPr sz="1575" b="0">
+                <a:solidFill>
+                  <a:srgbClr val="161616"/>
+                </a:solidFill>
+                <a:latin typeface="Arial"/>
+                <a:ea typeface="Arial"/>
+                <a:cs typeface="Arial"/>
+              </a:rPr>
+              <a:t>Intent routing on real Gemini: p50 1.1 s, p95 1.4 s (120 requests).</a:t>
+            </a:r>
+          </a:p>
+        </p:txBody>
+      </p:sp>
+      <p:sp>
+        <p:nvSpPr>
+          <p:cNvPr id="154" name="neg">
+            <a:extLst xmlns:a="http://schemas.openxmlformats.org/drawingml/2006/main">
+              <a:ext uri="{FF2B5EF4-FFF2-40B4-BE49-F238E27FC236}">
+                <a16:creationId xmlns:a16="http://schemas.microsoft.com/office/drawing/2014/main" id="{7CE5179E-0F94-42D5-99E1-77DB2C03965C}"/>
+              </a:ext>
+            </a:extLst>
+          </p:cNvPr>
+          <p:cNvSpPr>
+            <a:spLocks xmlns:a="http://schemas.openxmlformats.org/drawingml/2006/main" noGrp="1"/>
+          </p:cNvSpPr>
+          <p:nvPr/>
+        </p:nvSpPr>
+        <p:spPr>
+          <a:xfrm xmlns:a="http://schemas.openxmlformats.org/drawingml/2006/main">
+            <a:off x="523875" y="3228975"/>
+            <a:ext cx="8048625" cy="628650"/>
+          </a:xfrm>
+          <a:prstGeom xmlns:a="http://schemas.openxmlformats.org/drawingml/2006/main" prst="rect">
+            <a:avLst/>
+          </a:prstGeom>
+          <a:noFill xmlns:a="http://schemas.openxmlformats.org/drawingml/2006/main"/>
+          <a:ln xmlns:a="http://schemas.openxmlformats.org/drawingml/2006/main" w="0">
+            <a:noFill/>
+          </a:ln>
+        </p:spPr>
+        <p:txBody>
+          <a:bodyPr xmlns:a="http://schemas.openxmlformats.org/drawingml/2006/main" wrap="square" lIns="0" tIns="0" rIns="0" bIns="0" anchor="t">
+            <a:normAutofit fontScale="100000"/>
+          </a:bodyPr>
+          <a:lstStyle xmlns:a="http://schemas.openxmlformats.org/drawingml/2006/main"/>
+          <a:p xmlns:a="http://schemas.openxmlformats.org/drawingml/2006/main">
+            <a:pPr>
+              <a:defRPr sz="1575" b="0">
+                <a:solidFill>
+                  <a:srgbClr val="161616"/>
+                </a:solidFill>
+                <a:latin typeface="Arial"/>
+                <a:ea typeface="Arial"/>
+                <a:cs typeface="Arial"/>
+              </a:defRPr>
+            </a:pPr>
+            <a:r>
+              <a:rPr sz="1575" b="0">
+                <a:solidFill>
+                  <a:srgbClr val="161616"/>
+                </a:solidFill>
+                <a:latin typeface="Arial"/>
+                <a:ea typeface="Arial"/>
+                <a:cs typeface="Arial"/>
+              </a:rPr>
+              <a:t>Every agreed benchmark price stayed within both parties’ private limits. Ten infeasible pairs made no deal.</a:t>
+            </a:r>
+          </a:p>
+        </p:txBody>
+      </p:sp>
+      <p:sp>
+        <p:nvSpPr>
+          <p:cNvPr id="155" name="limits">
+            <a:extLst xmlns:a="http://schemas.openxmlformats.org/drawingml/2006/main">
+              <a:ext uri="{FF2B5EF4-FFF2-40B4-BE49-F238E27FC236}">
+                <a16:creationId xmlns:a16="http://schemas.microsoft.com/office/drawing/2014/main" id="{742CDEE7-83F6-4246-9650-057B75EB553E}"/>
+              </a:ext>
+            </a:extLst>
+          </p:cNvPr>
+          <p:cNvSpPr>
+            <a:spLocks xmlns:a="http://schemas.openxmlformats.org/drawingml/2006/main" noGrp="1"/>
+          </p:cNvSpPr>
+          <p:nvPr/>
+        </p:nvSpPr>
+        <p:spPr>
+          <a:xfrm xmlns:a="http://schemas.openxmlformats.org/drawingml/2006/main">
+            <a:off x="523875" y="4019550"/>
+            <a:ext cx="8048625" cy="714375"/>
           </a:xfrm>
           <a:prstGeom xmlns:a="http://schemas.openxmlformats.org/drawingml/2006/main" prst="rect">
             <a:avLst/>
@@ -9039,7 +8982,7 @@
                 <a:ea typeface="Arial"/>
                 <a:cs typeface="Arial"/>
               </a:rPr>
-              <a:t>Provenance: reading, matching and negotiation logic was ported from the authors’ native Collab app. The web app and retail workflow were built for this event.</a:t>
+              <a:t>Benchmark used one product, repeated intent and attack templates, an in-memory store and laptop-to-Vertex latency. All 100 privacy probes escalated to the owner.</a:t>
             </a:r>
           </a:p>
         </p:txBody>
@@ -9047,7 +8990,7 @@
     </p:spTree>
     <p:extLst>
       <p:ext uri="{BB962C8B-B14F-4D97-AF65-F5344CB8AC3E}">
-        <p14:creationId xmlns:p14="http://schemas.microsoft.com/office/powerpoint/2010/main" val="1421043967"/>
+        <p14:creationId xmlns:p14="http://schemas.microsoft.com/office/powerpoint/2010/main" val="1240018232"/>
       </p:ext>
     </p:extLst>
   </p:cSld>
@@ -9068,14 +9011,14 @@
       </p:grpSpPr>
       <p:pic>
         <p:nvPicPr>
-          <p:cNvPr id="170" name="Google Shape;156;p26"/>
+          <p:cNvPr id="160" name="Google Shape;148;p25"/>
           <p:cNvPicPr>
             <a:picLocks xmlns:a="http://schemas.openxmlformats.org/drawingml/2006/main" noChangeAspect="1"/>
           </p:cNvPicPr>
           <p:nvPr/>
         </p:nvPicPr>
         <p:blipFill rotWithShape="1">
-          <a:blip xmlns:r="http://schemas.openxmlformats.org/officeDocument/2006/relationships" xmlns:a="http://schemas.openxmlformats.org/drawingml/2006/main" r:embed="R1c514f7e65b0428a">
+          <a:blip xmlns:r="http://schemas.openxmlformats.org/officeDocument/2006/relationships" xmlns:a="http://schemas.openxmlformats.org/drawingml/2006/main" r:embed="R6960c18a294d44bd">
             <a:alphaModFix/>
           </a:blip>
           <a:srcRect xmlns:a="http://schemas.openxmlformats.org/drawingml/2006/main" l="0" t="0" r="0" b="98001"/>
@@ -9096,14 +9039,14 @@
       </p:pic>
       <p:pic>
         <p:nvPicPr>
-          <p:cNvPr id="171" name="Google Shape;157;p26"/>
+          <p:cNvPr id="161" name="Google Shape;149;p25"/>
           <p:cNvPicPr>
             <a:picLocks xmlns:a="http://schemas.openxmlformats.org/drawingml/2006/main" noChangeAspect="1"/>
           </p:cNvPicPr>
           <p:nvPr/>
         </p:nvPicPr>
         <p:blipFill>
-          <a:blip xmlns:r="http://schemas.openxmlformats.org/officeDocument/2006/relationships" xmlns:a="http://schemas.openxmlformats.org/drawingml/2006/main" r:embed="R59af9b14316846e5">
+          <a:blip xmlns:r="http://schemas.openxmlformats.org/officeDocument/2006/relationships" xmlns:a="http://schemas.openxmlformats.org/drawingml/2006/main" r:embed="R9698732274bf4fb9">
             <a:alphaModFix/>
           </a:blip>
           <a:stretch xmlns:a="http://schemas.openxmlformats.org/drawingml/2006/main">
@@ -9125,10 +9068,10 @@
       </p:pic>
       <p:sp>
         <p:nvSpPr>
-          <p:cNvPr id="158" name="Google Shape;158;p26">
-            <a:extLst xmlns:a="http://schemas.openxmlformats.org/drawingml/2006/main">
-              <a:ext uri="{FF2B5EF4-FFF2-40B4-BE49-F238E27FC236}">
-                <a16:creationId xmlns:a16="http://schemas.microsoft.com/office/drawing/2014/main" id="{ECD007CF-3E8F-4142-A76C-838A2CDF66E8}"/>
+          <p:cNvPr id="150" name="Google Shape;150;p25">
+            <a:extLst xmlns:a="http://schemas.openxmlformats.org/drawingml/2006/main">
+              <a:ext uri="{FF2B5EF4-FFF2-40B4-BE49-F238E27FC236}">
+                <a16:creationId xmlns:a16="http://schemas.microsoft.com/office/drawing/2014/main" id="{277D2E1B-3C3B-4C6A-BD9C-D8B3E9E4C643}"/>
               </a:ext>
             </a:extLst>
           </p:cNvPr>
@@ -9176,10 +9119,10 @@
       </p:sp>
       <p:sp>
         <p:nvSpPr>
-          <p:cNvPr id="159" name="Google Shape;159;p26">
-            <a:extLst xmlns:a="http://schemas.openxmlformats.org/drawingml/2006/main">
-              <a:ext uri="{FF2B5EF4-FFF2-40B4-BE49-F238E27FC236}">
-                <a16:creationId xmlns:a16="http://schemas.microsoft.com/office/drawing/2014/main" id="{B7EC4203-4132-4649-B597-6278E9291F25}"/>
+          <p:cNvPr id="151" name="Google Shape;151;p25">
+            <a:extLst xmlns:a="http://schemas.openxmlformats.org/drawingml/2006/main">
+              <a:ext uri="{FF2B5EF4-FFF2-40B4-BE49-F238E27FC236}">
+                <a16:creationId xmlns:a16="http://schemas.microsoft.com/office/drawing/2014/main" id="{D14D4CE4-ED9C-42FA-AD82-1973C334E6D1}"/>
               </a:ext>
             </a:extLst>
           </p:cNvPr>
@@ -9233,7 +9176,7 @@
                 <a:ea typeface="Arial"/>
                 <a:cs typeface="Arial"/>
               </a:rPr>
-              <a:t>Product and submission links</a:t>
+              <a:t>Next steps and provenance</a:t>
             </a:r>
             <a:endParaRPr sz="1600">
               <a:latin typeface="Google Sans Flex Medium"/>
@@ -9245,22 +9188,22 @@
       </p:sp>
       <p:sp>
         <p:nvSpPr>
-          <p:cNvPr id="162" name="repo-label">
-            <a:extLst xmlns:a="http://schemas.openxmlformats.org/drawingml/2006/main">
-              <a:ext uri="{FF2B5EF4-FFF2-40B4-BE49-F238E27FC236}">
-                <a16:creationId xmlns:a16="http://schemas.microsoft.com/office/drawing/2014/main" id="{07B0969B-8CBE-47AB-9E2F-8817324A61E8}"/>
-              </a:ext>
-            </a:extLst>
-          </p:cNvPr>
-          <p:cNvSpPr>
-            <a:spLocks xmlns:a="http://schemas.openxmlformats.org/drawingml/2006/main" noGrp="1"/>
-          </p:cNvSpPr>
-          <p:nvPr/>
-        </p:nvSpPr>
-        <p:spPr>
-          <a:xfrm xmlns:a="http://schemas.openxmlformats.org/drawingml/2006/main">
-            <a:off x="523875" y="1514475"/>
-            <a:ext cx="8048625" cy="295275"/>
+          <p:cNvPr id="154" name="next1">
+            <a:extLst xmlns:a="http://schemas.openxmlformats.org/drawingml/2006/main">
+              <a:ext uri="{FF2B5EF4-FFF2-40B4-BE49-F238E27FC236}">
+                <a16:creationId xmlns:a16="http://schemas.microsoft.com/office/drawing/2014/main" id="{7BB9F454-8E46-451E-8EE2-FF709400A600}"/>
+              </a:ext>
+            </a:extLst>
+          </p:cNvPr>
+          <p:cNvSpPr>
+            <a:spLocks xmlns:a="http://schemas.openxmlformats.org/drawingml/2006/main" noGrp="1"/>
+          </p:cNvSpPr>
+          <p:nvPr/>
+        </p:nvSpPr>
+        <p:spPr>
+          <a:xfrm xmlns:a="http://schemas.openxmlformats.org/drawingml/2006/main">
+            <a:off x="523875" y="1495425"/>
+            <a:ext cx="8048625" cy="323850"/>
           </a:xfrm>
           <a:prstGeom xmlns:a="http://schemas.openxmlformats.org/drawingml/2006/main" prst="rect">
             <a:avLst/>
@@ -9295,29 +9238,29 @@
                 <a:ea typeface="Arial"/>
                 <a:cs typeface="Arial"/>
               </a:rPr>
-              <a:t>Public GitHub repository</a:t>
+              <a:t>Near-term additions</a:t>
             </a:r>
           </a:p>
         </p:txBody>
       </p:sp>
       <p:sp>
         <p:nvSpPr>
-          <p:cNvPr id="163" name="repo-url">
-            <a:extLst xmlns:a="http://schemas.openxmlformats.org/drawingml/2006/main">
-              <a:ext uri="{FF2B5EF4-FFF2-40B4-BE49-F238E27FC236}">
-                <a16:creationId xmlns:a16="http://schemas.microsoft.com/office/drawing/2014/main" id="{9BACA338-E826-42F3-81F9-8193D31AA9A6}"/>
-              </a:ext>
-            </a:extLst>
-          </p:cNvPr>
-          <p:cNvSpPr>
-            <a:spLocks xmlns:a="http://schemas.openxmlformats.org/drawingml/2006/main" noGrp="1"/>
-          </p:cNvSpPr>
-          <p:nvPr/>
-        </p:nvSpPr>
-        <p:spPr>
-          <a:xfrm xmlns:a="http://schemas.openxmlformats.org/drawingml/2006/main">
-            <a:off x="523875" y="1876425"/>
-            <a:ext cx="8048625" cy="352425"/>
+          <p:cNvPr id="155" name="next1b">
+            <a:extLst xmlns:a="http://schemas.openxmlformats.org/drawingml/2006/main">
+              <a:ext uri="{FF2B5EF4-FFF2-40B4-BE49-F238E27FC236}">
+                <a16:creationId xmlns:a16="http://schemas.microsoft.com/office/drawing/2014/main" id="{3474E016-C04B-4A4A-9B6A-793936D0D3B1}"/>
+              </a:ext>
+            </a:extLst>
+          </p:cNvPr>
+          <p:cNvSpPr>
+            <a:spLocks xmlns:a="http://schemas.openxmlformats.org/drawingml/2006/main" noGrp="1"/>
+          </p:cNvSpPr>
+          <p:nvPr/>
+        </p:nvSpPr>
+        <p:spPr>
+          <a:xfrm xmlns:a="http://schemas.openxmlformats.org/drawingml/2006/main">
+            <a:off x="523875" y="1895475"/>
+            <a:ext cx="8048625" cy="771525"/>
           </a:xfrm>
           <a:prstGeom xmlns:a="http://schemas.openxmlformats.org/drawingml/2006/main" prst="rect">
             <a:avLst/>
@@ -9334,9 +9277,9 @@
           <a:lstStyle xmlns:a="http://schemas.openxmlformats.org/drawingml/2006/main"/>
           <a:p xmlns:a="http://schemas.openxmlformats.org/drawingml/2006/main">
             <a:pPr>
-              <a:defRPr sz="1575" b="0">
-                <a:solidFill>
-                  <a:srgbClr val="1A73E8"/>
+              <a:defRPr sz="1500" b="0">
+                <a:solidFill>
+                  <a:srgbClr val="161616"/>
                 </a:solidFill>
                 <a:latin typeface="Arial"/>
                 <a:ea typeface="Arial"/>
@@ -9344,37 +9287,36 @@
               </a:defRPr>
             </a:pPr>
             <a:r>
-              <a:rPr sz="1575" b="0">
-                <a:solidFill>
-                  <a:srgbClr val="1A73E8"/>
-                </a:solidFill>
-                <a:latin typeface="Arial"/>
-                <a:ea typeface="Arial"/>
-                <a:cs typeface="Arial"/>
-                <a:hlinkClick xmlns:r="http://schemas.openxmlformats.org/officeDocument/2006/relationships" r:id="Rccd8f4d8b22f4b14"/>
+              <a:rPr sz="1500" b="0">
+                <a:solidFill>
+                  <a:srgbClr val="161616"/>
+                </a:solidFill>
+                <a:latin typeface="Arial"/>
+                <a:ea typeface="Arial"/>
+                <a:cs typeface="Arial"/>
               </a:rPr>
-              <a:t>https://github.com/kirav5/collab</a:t>
+              <a:t>Pickup-window tradeoffs; one basket for several items; photo search for buyers; block and report; export my data.</a:t>
             </a:r>
           </a:p>
         </p:txBody>
       </p:sp>
       <p:sp>
         <p:nvSpPr>
-          <p:cNvPr id="164" name="links-rule1">
-            <a:extLst xmlns:a="http://schemas.openxmlformats.org/drawingml/2006/main">
-              <a:ext uri="{FF2B5EF4-FFF2-40B4-BE49-F238E27FC236}">
-                <a16:creationId xmlns:a16="http://schemas.microsoft.com/office/drawing/2014/main" id="{9BC3523C-1B78-4CB0-92C2-6F0474C2D6DE}"/>
-              </a:ext>
-            </a:extLst>
-          </p:cNvPr>
-          <p:cNvSpPr>
-            <a:spLocks xmlns:a="http://schemas.openxmlformats.org/drawingml/2006/main" noGrp="1"/>
-          </p:cNvSpPr>
-          <p:nvPr/>
-        </p:nvSpPr>
-        <p:spPr>
-          <a:xfrm xmlns:a="http://schemas.openxmlformats.org/drawingml/2006/main">
-            <a:off x="523875" y="2362200"/>
+          <p:cNvPr id="156" name="next-rule">
+            <a:extLst xmlns:a="http://schemas.openxmlformats.org/drawingml/2006/main">
+              <a:ext uri="{FF2B5EF4-FFF2-40B4-BE49-F238E27FC236}">
+                <a16:creationId xmlns:a16="http://schemas.microsoft.com/office/drawing/2014/main" id="{C8BE332B-F2FE-4819-83D7-4C30F1007BEE}"/>
+              </a:ext>
+            </a:extLst>
+          </p:cNvPr>
+          <p:cNvSpPr>
+            <a:spLocks xmlns:a="http://schemas.openxmlformats.org/drawingml/2006/main" noGrp="1"/>
+          </p:cNvSpPr>
+          <p:nvPr/>
+        </p:nvSpPr>
+        <p:spPr>
+          <a:xfrm xmlns:a="http://schemas.openxmlformats.org/drawingml/2006/main">
+            <a:off x="523875" y="2828925"/>
             <a:ext cx="8048625" cy="19050"/>
           </a:xfrm>
           <a:prstGeom xmlns:a="http://schemas.openxmlformats.org/drawingml/2006/main" prst="rect">
@@ -9387,25 +9329,29 @@
             <a:noFill/>
           </a:ln>
         </p:spPr>
-      </p:sp>
-      <p:sp>
-        <p:nvSpPr>
-          <p:cNvPr id="165" name="video-label">
-            <a:extLst xmlns:a="http://schemas.openxmlformats.org/drawingml/2006/main">
-              <a:ext uri="{FF2B5EF4-FFF2-40B4-BE49-F238E27FC236}">
-                <a16:creationId xmlns:a16="http://schemas.microsoft.com/office/drawing/2014/main" id="{F6737FAD-ACA3-4F39-BEBD-C480649B9547}"/>
-              </a:ext>
-            </a:extLst>
-          </p:cNvPr>
-          <p:cNvSpPr>
-            <a:spLocks xmlns:a="http://schemas.openxmlformats.org/drawingml/2006/main" noGrp="1"/>
-          </p:cNvSpPr>
-          <p:nvPr/>
-        </p:nvSpPr>
-        <p:spPr>
-          <a:xfrm xmlns:a="http://schemas.openxmlformats.org/drawingml/2006/main">
-            <a:off x="523875" y="2533650"/>
-            <a:ext cx="8048625" cy="295275"/>
+        <p:txBody xmlns:a="http://schemas.openxmlformats.org/drawingml/2006/main">
+          <a:bodyPr/>
+          <a:p/>
+        </p:txBody>
+      </p:sp>
+      <p:sp>
+        <p:nvSpPr>
+          <p:cNvPr id="157" name="next2">
+            <a:extLst xmlns:a="http://schemas.openxmlformats.org/drawingml/2006/main">
+              <a:ext uri="{FF2B5EF4-FFF2-40B4-BE49-F238E27FC236}">
+                <a16:creationId xmlns:a16="http://schemas.microsoft.com/office/drawing/2014/main" id="{DC1E4EF6-5868-48B3-B5AB-2D2022DA0115}"/>
+              </a:ext>
+            </a:extLst>
+          </p:cNvPr>
+          <p:cNvSpPr>
+            <a:spLocks xmlns:a="http://schemas.openxmlformats.org/drawingml/2006/main" noGrp="1"/>
+          </p:cNvSpPr>
+          <p:nvPr/>
+        </p:nvSpPr>
+        <p:spPr>
+          <a:xfrm xmlns:a="http://schemas.openxmlformats.org/drawingml/2006/main">
+            <a:off x="523875" y="3000375"/>
+            <a:ext cx="8048625" cy="323850"/>
           </a:xfrm>
           <a:prstGeom xmlns:a="http://schemas.openxmlformats.org/drawingml/2006/main" prst="rect">
             <a:avLst/>
@@ -9440,29 +9386,29 @@
                 <a:ea typeface="Arial"/>
                 <a:cs typeface="Arial"/>
               </a:rPr>
-              <a:t>Demo video (3–4 minutes)</a:t>
+              <a:t>Later roadmap</a:t>
             </a:r>
           </a:p>
         </p:txBody>
       </p:sp>
       <p:sp>
         <p:nvSpPr>
-          <p:cNvPr id="166" name="video-pending">
-            <a:extLst xmlns:a="http://schemas.openxmlformats.org/drawingml/2006/main">
-              <a:ext uri="{FF2B5EF4-FFF2-40B4-BE49-F238E27FC236}">
-                <a16:creationId xmlns:a16="http://schemas.microsoft.com/office/drawing/2014/main" id="{FA68B6DF-C36F-4D01-9C59-D269E3626D73}"/>
-              </a:ext>
-            </a:extLst>
-          </p:cNvPr>
-          <p:cNvSpPr>
-            <a:spLocks xmlns:a="http://schemas.openxmlformats.org/drawingml/2006/main" noGrp="1"/>
-          </p:cNvSpPr>
-          <p:nvPr/>
-        </p:nvSpPr>
-        <p:spPr>
-          <a:xfrm xmlns:a="http://schemas.openxmlformats.org/drawingml/2006/main">
-            <a:off x="523875" y="2895600"/>
-            <a:ext cx="8048625" cy="361950"/>
+          <p:cNvPr id="158" name="next2b">
+            <a:extLst xmlns:a="http://schemas.openxmlformats.org/drawingml/2006/main">
+              <a:ext uri="{FF2B5EF4-FFF2-40B4-BE49-F238E27FC236}">
+                <a16:creationId xmlns:a16="http://schemas.microsoft.com/office/drawing/2014/main" id="{F98C7AC8-2801-4C83-AD71-3052C17C0F66}"/>
+              </a:ext>
+            </a:extLst>
+          </p:cNvPr>
+          <p:cNvSpPr>
+            <a:spLocks xmlns:a="http://schemas.openxmlformats.org/drawingml/2006/main" noGrp="1"/>
+          </p:cNvSpPr>
+          <p:nvPr/>
+        </p:nvSpPr>
+        <p:spPr>
+          <a:xfrm xmlns:a="http://schemas.openxmlformats.org/drawingml/2006/main">
+            <a:off x="523875" y="3400425"/>
+            <a:ext cx="8048625" cy="542925"/>
           </a:xfrm>
           <a:prstGeom xmlns:a="http://schemas.openxmlformats.org/drawingml/2006/main" prst="rect">
             <a:avLst/>
@@ -9481,7 +9427,7 @@
             <a:pPr>
               <a:defRPr sz="1500" b="0">
                 <a:solidFill>
-                  <a:srgbClr val="444444"/>
+                  <a:srgbClr val="161616"/>
                 </a:solidFill>
                 <a:latin typeface="Arial"/>
                 <a:ea typeface="Arial"/>
@@ -9491,65 +9437,35 @@
             <a:r>
               <a:rPr sz="1500" b="0">
                 <a:solidFill>
-                  <a:srgbClr val="444444"/>
+                  <a:srgbClr val="161616"/>
                 </a:solidFill>
                 <a:latin typeface="Arial"/>
                 <a:ea typeface="Arial"/>
                 <a:cs typeface="Arial"/>
               </a:rPr>
-              <a:t>Add link after recording. Required by the submission form.</a:t>
+              <a:t>Real payment-provider integration and UPI reconciliation. The hackathon prototype moves no money.</a:t>
             </a:r>
           </a:p>
         </p:txBody>
       </p:sp>
       <p:sp>
         <p:nvSpPr>
-          <p:cNvPr id="167" name="links-rule2">
-            <a:extLst xmlns:a="http://schemas.openxmlformats.org/drawingml/2006/main">
-              <a:ext uri="{FF2B5EF4-FFF2-40B4-BE49-F238E27FC236}">
-                <a16:creationId xmlns:a16="http://schemas.microsoft.com/office/drawing/2014/main" id="{63F447C6-22CC-4C16-83A1-4DAA60398C74}"/>
-              </a:ext>
-            </a:extLst>
-          </p:cNvPr>
-          <p:cNvSpPr>
-            <a:spLocks xmlns:a="http://schemas.openxmlformats.org/drawingml/2006/main" noGrp="1"/>
-          </p:cNvSpPr>
-          <p:nvPr/>
-        </p:nvSpPr>
-        <p:spPr>
-          <a:xfrm xmlns:a="http://schemas.openxmlformats.org/drawingml/2006/main">
-            <a:off x="523875" y="3409950"/>
-            <a:ext cx="8048625" cy="19050"/>
-          </a:xfrm>
-          <a:prstGeom xmlns:a="http://schemas.openxmlformats.org/drawingml/2006/main" prst="rect">
-            <a:avLst/>
-          </a:prstGeom>
-          <a:solidFill xmlns:a="http://schemas.openxmlformats.org/drawingml/2006/main">
-            <a:srgbClr val="B9B9B9"/>
-          </a:solidFill>
-          <a:ln xmlns:a="http://schemas.openxmlformats.org/drawingml/2006/main" w="0">
-            <a:noFill/>
-          </a:ln>
-        </p:spPr>
-      </p:sp>
-      <p:sp>
-        <p:nvSpPr>
-          <p:cNvPr id="168" name="product-label">
-            <a:extLst xmlns:a="http://schemas.openxmlformats.org/drawingml/2006/main">
-              <a:ext uri="{FF2B5EF4-FFF2-40B4-BE49-F238E27FC236}">
-                <a16:creationId xmlns:a16="http://schemas.microsoft.com/office/drawing/2014/main" id="{C18A17F5-C313-4E1B-B7F2-2884EA000BD2}"/>
-              </a:ext>
-            </a:extLst>
-          </p:cNvPr>
-          <p:cNvSpPr>
-            <a:spLocks xmlns:a="http://schemas.openxmlformats.org/drawingml/2006/main" noGrp="1"/>
-          </p:cNvSpPr>
-          <p:nvPr/>
-        </p:nvSpPr>
-        <p:spPr>
-          <a:xfrm xmlns:a="http://schemas.openxmlformats.org/drawingml/2006/main">
-            <a:off x="523875" y="3581400"/>
-            <a:ext cx="8048625" cy="295275"/>
+          <p:cNvPr id="159" name="prov">
+            <a:extLst xmlns:a="http://schemas.openxmlformats.org/drawingml/2006/main">
+              <a:ext uri="{FF2B5EF4-FFF2-40B4-BE49-F238E27FC236}">
+                <a16:creationId xmlns:a16="http://schemas.microsoft.com/office/drawing/2014/main" id="{DFD04ECC-DFF2-493C-A79C-18E1283CBB53}"/>
+              </a:ext>
+            </a:extLst>
+          </p:cNvPr>
+          <p:cNvSpPr>
+            <a:spLocks xmlns:a="http://schemas.openxmlformats.org/drawingml/2006/main" noGrp="1"/>
+          </p:cNvSpPr>
+          <p:nvPr/>
+        </p:nvSpPr>
+        <p:spPr>
+          <a:xfrm xmlns:a="http://schemas.openxmlformats.org/drawingml/2006/main">
+            <a:off x="523875" y="4219575"/>
+            <a:ext cx="8048625" cy="609600"/>
           </a:xfrm>
           <a:prstGeom xmlns:a="http://schemas.openxmlformats.org/drawingml/2006/main" prst="rect">
             <a:avLst/>
@@ -9566,9 +9482,9 @@
           <a:lstStyle xmlns:a="http://schemas.openxmlformats.org/drawingml/2006/main"/>
           <a:p xmlns:a="http://schemas.openxmlformats.org/drawingml/2006/main">
             <a:pPr>
-              <a:defRPr sz="1725" b="1">
-                <a:solidFill>
-                  <a:srgbClr val="161616"/>
+              <a:defRPr sz="1275" b="0">
+                <a:solidFill>
+                  <a:srgbClr val="444444"/>
                 </a:solidFill>
                 <a:latin typeface="Arial"/>
                 <a:ea typeface="Arial"/>
@@ -9576,73 +9492,15 @@
               </a:defRPr>
             </a:pPr>
             <a:r>
-              <a:rPr sz="1725" b="1">
-                <a:solidFill>
-                  <a:srgbClr val="161616"/>
+              <a:rPr sz="1275" b="0">
+                <a:solidFill>
+                  <a:srgbClr val="444444"/>
                 </a:solidFill>
                 <a:latin typeface="Arial"/>
                 <a:ea typeface="Arial"/>
                 <a:cs typeface="Arial"/>
               </a:rPr>
-              <a:t>Deployed prototype</a:t>
-            </a:r>
-          </a:p>
-        </p:txBody>
-      </p:sp>
-      <p:sp>
-        <p:nvSpPr>
-          <p:cNvPr id="169" name="product-url">
-            <a:extLst xmlns:a="http://schemas.openxmlformats.org/drawingml/2006/main">
-              <a:ext uri="{FF2B5EF4-FFF2-40B4-BE49-F238E27FC236}">
-                <a16:creationId xmlns:a16="http://schemas.microsoft.com/office/drawing/2014/main" id="{1ECB7502-5BF4-4B85-9822-F64DC2C4B322}"/>
-              </a:ext>
-            </a:extLst>
-          </p:cNvPr>
-          <p:cNvSpPr>
-            <a:spLocks xmlns:a="http://schemas.openxmlformats.org/drawingml/2006/main" noGrp="1"/>
-          </p:cNvSpPr>
-          <p:nvPr/>
-        </p:nvSpPr>
-        <p:spPr>
-          <a:xfrm xmlns:a="http://schemas.openxmlformats.org/drawingml/2006/main">
-            <a:off x="523875" y="3943350"/>
-            <a:ext cx="8048625" cy="352425"/>
-          </a:xfrm>
-          <a:prstGeom xmlns:a="http://schemas.openxmlformats.org/drawingml/2006/main" prst="rect">
-            <a:avLst/>
-          </a:prstGeom>
-          <a:noFill xmlns:a="http://schemas.openxmlformats.org/drawingml/2006/main"/>
-          <a:ln xmlns:a="http://schemas.openxmlformats.org/drawingml/2006/main" w="0">
-            <a:noFill/>
-          </a:ln>
-        </p:spPr>
-        <p:txBody>
-          <a:bodyPr xmlns:a="http://schemas.openxmlformats.org/drawingml/2006/main" wrap="square" lIns="0" tIns="0" rIns="0" bIns="0" anchor="t">
-            <a:normAutofit fontScale="100000"/>
-          </a:bodyPr>
-          <a:lstStyle xmlns:a="http://schemas.openxmlformats.org/drawingml/2006/main"/>
-          <a:p xmlns:a="http://schemas.openxmlformats.org/drawingml/2006/main">
-            <a:pPr>
-              <a:defRPr sz="1575" b="0">
-                <a:solidFill>
-                  <a:srgbClr val="1A73E8"/>
-                </a:solidFill>
-                <a:latin typeface="Arial"/>
-                <a:ea typeface="Arial"/>
-                <a:cs typeface="Arial"/>
-              </a:defRPr>
-            </a:pPr>
-            <a:r>
-              <a:rPr sz="1575" b="0">
-                <a:solidFill>
-                  <a:srgbClr val="1A73E8"/>
-                </a:solidFill>
-                <a:latin typeface="Arial"/>
-                <a:ea typeface="Arial"/>
-                <a:cs typeface="Arial"/>
-                <a:hlinkClick xmlns:r="http://schemas.openxmlformats.org/officeDocument/2006/relationships" r:id="R0756d7da1bb5467c"/>
-              </a:rPr>
-              <a:t>https://collab-55.web.app</a:t>
+              <a:t>Provenance: reading, matching and negotiation logic was ported from the authors’ native Collab app. The web app and retail workflow were built for this event.</a:t>
             </a:r>
           </a:p>
         </p:txBody>
@@ -9650,7 +9508,7 @@
     </p:spTree>
     <p:extLst>
       <p:ext uri="{BB962C8B-B14F-4D97-AF65-F5344CB8AC3E}">
-        <p14:creationId xmlns:p14="http://schemas.microsoft.com/office/powerpoint/2010/main" val="734990444"/>
+        <p14:creationId xmlns:p14="http://schemas.microsoft.com/office/powerpoint/2010/main" val="1421043967"/>
       </p:ext>
     </p:extLst>
   </p:cSld>
@@ -9671,6 +9529,609 @@
       </p:grpSpPr>
       <p:pic>
         <p:nvPicPr>
+          <p:cNvPr id="170" name="Google Shape;156;p26"/>
+          <p:cNvPicPr>
+            <a:picLocks xmlns:a="http://schemas.openxmlformats.org/drawingml/2006/main" noChangeAspect="1"/>
+          </p:cNvPicPr>
+          <p:nvPr/>
+        </p:nvPicPr>
+        <p:blipFill rotWithShape="1">
+          <a:blip xmlns:r="http://schemas.openxmlformats.org/officeDocument/2006/relationships" xmlns:a="http://schemas.openxmlformats.org/drawingml/2006/main" r:embed="R1c514f7e65b0428a">
+            <a:alphaModFix/>
+          </a:blip>
+          <a:srcRect xmlns:a="http://schemas.openxmlformats.org/drawingml/2006/main" l="0" t="0" r="0" b="98001"/>
+          <a:stretch xmlns:a="http://schemas.openxmlformats.org/drawingml/2006/main"/>
+        </p:blipFill>
+        <p:spPr>
+          <a:xfrm xmlns:a="http://schemas.openxmlformats.org/drawingml/2006/main">
+            <a:off x="0" y="5093562"/>
+            <a:ext cx="9144000" cy="54275"/>
+          </a:xfrm>
+          <a:prstGeom xmlns:a="http://schemas.openxmlformats.org/drawingml/2006/main" prst="rect">
+            <a:avLst/>
+          </a:prstGeom>
+          <a:ln xmlns:a="http://schemas.openxmlformats.org/drawingml/2006/main">
+            <a:noFill/>
+          </a:ln>
+        </p:spPr>
+      </p:pic>
+      <p:pic>
+        <p:nvPicPr>
+          <p:cNvPr id="171" name="Google Shape;157;p26"/>
+          <p:cNvPicPr>
+            <a:picLocks xmlns:a="http://schemas.openxmlformats.org/drawingml/2006/main" noChangeAspect="1"/>
+          </p:cNvPicPr>
+          <p:nvPr/>
+        </p:nvPicPr>
+        <p:blipFill>
+          <a:blip xmlns:r="http://schemas.openxmlformats.org/officeDocument/2006/relationships" xmlns:a="http://schemas.openxmlformats.org/drawingml/2006/main" r:embed="R59af9b14316846e5">
+            <a:alphaModFix/>
+          </a:blip>
+          <a:stretch xmlns:a="http://schemas.openxmlformats.org/drawingml/2006/main">
+            <a:fillRect l="0" t="0" r="0" b="0"/>
+          </a:stretch>
+        </p:blipFill>
+        <p:spPr>
+          <a:xfrm xmlns:a="http://schemas.openxmlformats.org/drawingml/2006/main">
+            <a:off x="0" y="1"/>
+            <a:ext cx="9144000" cy="507359"/>
+          </a:xfrm>
+          <a:prstGeom xmlns:a="http://schemas.openxmlformats.org/drawingml/2006/main" prst="rect">
+            <a:avLst/>
+          </a:prstGeom>
+          <a:ln xmlns:a="http://schemas.openxmlformats.org/drawingml/2006/main">
+            <a:noFill/>
+          </a:ln>
+        </p:spPr>
+      </p:pic>
+      <p:sp>
+        <p:nvSpPr>
+          <p:cNvPr id="158" name="Google Shape;158;p26">
+            <a:extLst xmlns:a="http://schemas.openxmlformats.org/drawingml/2006/main">
+              <a:ext uri="{FF2B5EF4-FFF2-40B4-BE49-F238E27FC236}">
+                <a16:creationId xmlns:a16="http://schemas.microsoft.com/office/drawing/2014/main" id="{ECD007CF-3E8F-4142-A76C-838A2CDF66E8}"/>
+              </a:ext>
+            </a:extLst>
+          </p:cNvPr>
+          <p:cNvSpPr>
+            <a:spLocks xmlns:a="http://schemas.openxmlformats.org/drawingml/2006/main" noGrp="1"/>
+          </p:cNvSpPr>
+          <p:nvPr/>
+        </p:nvSpPr>
+        <p:spPr>
+          <a:xfrm xmlns:a="http://schemas.openxmlformats.org/drawingml/2006/main">
+            <a:off x="-29250" y="5071875"/>
+            <a:ext cx="9173400" cy="97800"/>
+          </a:xfrm>
+          <a:prstGeom xmlns:a="http://schemas.openxmlformats.org/drawingml/2006/main" prst="rect">
+            <a:avLst/>
+          </a:prstGeom>
+          <a:solidFill xmlns:a="http://schemas.openxmlformats.org/drawingml/2006/main">
+            <a:schemeClr val="dk1"/>
+          </a:solidFill>
+          <a:ln xmlns:a="http://schemas.openxmlformats.org/drawingml/2006/main">
+            <a:noFill/>
+          </a:ln>
+        </p:spPr>
+        <p:txBody>
+          <a:bodyPr xmlns:a="http://schemas.openxmlformats.org/drawingml/2006/main" spcFirstLastPara="1" wrap="square" lIns="91425" tIns="91425" rIns="91425" bIns="91425" anchor="ctr">
+            <a:noAutofit/>
+          </a:bodyPr>
+          <a:lstStyle xmlns:a="http://schemas.openxmlformats.org/drawingml/2006/main"/>
+          <a:p xmlns:a="http://schemas.openxmlformats.org/drawingml/2006/main">
+            <a:pPr marL="0" lvl="0" indent="0" algn="ctr">
+              <a:spcBef>
+                <a:spcPts val="0"/>
+              </a:spcBef>
+              <a:spcAft>
+                <a:spcPts val="0"/>
+              </a:spcAft>
+              <a:buNone/>
+            </a:pPr>
+            <a:r>
+              <a:t/>
+            </a:r>
+            <a:endParaRPr/>
+          </a:p>
+        </p:txBody>
+      </p:sp>
+      <p:sp>
+        <p:nvSpPr>
+          <p:cNvPr id="159" name="Google Shape;159;p26">
+            <a:extLst xmlns:a="http://schemas.openxmlformats.org/drawingml/2006/main">
+              <a:ext uri="{FF2B5EF4-FFF2-40B4-BE49-F238E27FC236}">
+                <a16:creationId xmlns:a16="http://schemas.microsoft.com/office/drawing/2014/main" id="{B7EC4203-4132-4649-B597-6278E9291F25}"/>
+              </a:ext>
+            </a:extLst>
+          </p:cNvPr>
+          <p:cNvSpPr>
+            <a:spLocks xmlns:a="http://schemas.openxmlformats.org/drawingml/2006/main" noGrp="1"/>
+          </p:cNvSpPr>
+          <p:nvPr/>
+        </p:nvSpPr>
+        <p:spPr>
+          <a:xfrm xmlns:a="http://schemas.openxmlformats.org/drawingml/2006/main">
+            <a:off x="266700" y="676275"/>
+            <a:ext cx="8524875" cy="542925"/>
+          </a:xfrm>
+          <a:prstGeom xmlns:a="http://schemas.openxmlformats.org/drawingml/2006/main" prst="rect">
+            <a:avLst/>
+          </a:prstGeom>
+          <a:noFill xmlns:a="http://schemas.openxmlformats.org/drawingml/2006/main"/>
+          <a:ln xmlns:a="http://schemas.openxmlformats.org/drawingml/2006/main">
+            <a:noFill/>
+          </a:ln>
+        </p:spPr>
+        <p:txBody>
+          <a:bodyPr xmlns:a="http://schemas.openxmlformats.org/drawingml/2006/main" spcFirstLastPara="1" wrap="square" lIns="0" tIns="0" rIns="0" bIns="0" anchor="t">
+            <a:normAutofit fontScale="100000"/>
+          </a:bodyPr>
+          <a:lstStyle xmlns:a="http://schemas.openxmlformats.org/drawingml/2006/main"/>
+          <a:p xmlns:a="http://schemas.openxmlformats.org/drawingml/2006/main">
+            <a:pPr marL="0" lvl="0" indent="0" algn="l">
+              <a:spcBef>
+                <a:spcPts val="0"/>
+              </a:spcBef>
+              <a:spcAft>
+                <a:spcPts val="0"/>
+              </a:spcAft>
+              <a:buNone/>
+              <a:defRPr sz="1725">
+                <a:solidFill>
+                  <a:srgbClr val="161616"/>
+                </a:solidFill>
+                <a:latin typeface="Arial"/>
+                <a:ea typeface="Arial"/>
+                <a:cs typeface="Arial"/>
+              </a:defRPr>
+            </a:pPr>
+            <a:r>
+              <a:rPr sz="1725">
+                <a:solidFill>
+                  <a:srgbClr val="161616"/>
+                </a:solidFill>
+                <a:latin typeface="Arial"/>
+                <a:ea typeface="Arial"/>
+                <a:cs typeface="Arial"/>
+              </a:rPr>
+              <a:t>Product and submission links</a:t>
+            </a:r>
+            <a:endParaRPr sz="1600">
+              <a:latin typeface="Google Sans Flex Medium"/>
+              <a:ea typeface="Google Sans Flex Medium"/>
+              <a:cs typeface="Google Sans Flex Medium"/>
+            </a:endParaRPr>
+          </a:p>
+        </p:txBody>
+      </p:sp>
+      <p:sp>
+        <p:nvSpPr>
+          <p:cNvPr id="162" name="repo-label">
+            <a:extLst xmlns:a="http://schemas.openxmlformats.org/drawingml/2006/main">
+              <a:ext uri="{FF2B5EF4-FFF2-40B4-BE49-F238E27FC236}">
+                <a16:creationId xmlns:a16="http://schemas.microsoft.com/office/drawing/2014/main" id="{07B0969B-8CBE-47AB-9E2F-8817324A61E8}"/>
+              </a:ext>
+            </a:extLst>
+          </p:cNvPr>
+          <p:cNvSpPr>
+            <a:spLocks xmlns:a="http://schemas.openxmlformats.org/drawingml/2006/main" noGrp="1"/>
+          </p:cNvSpPr>
+          <p:nvPr/>
+        </p:nvSpPr>
+        <p:spPr>
+          <a:xfrm xmlns:a="http://schemas.openxmlformats.org/drawingml/2006/main">
+            <a:off x="523875" y="1514475"/>
+            <a:ext cx="8048625" cy="295275"/>
+          </a:xfrm>
+          <a:prstGeom xmlns:a="http://schemas.openxmlformats.org/drawingml/2006/main" prst="rect">
+            <a:avLst/>
+          </a:prstGeom>
+          <a:noFill xmlns:a="http://schemas.openxmlformats.org/drawingml/2006/main"/>
+          <a:ln xmlns:a="http://schemas.openxmlformats.org/drawingml/2006/main" w="0">
+            <a:noFill/>
+          </a:ln>
+        </p:spPr>
+        <p:txBody>
+          <a:bodyPr xmlns:a="http://schemas.openxmlformats.org/drawingml/2006/main" wrap="square" lIns="0" tIns="0" rIns="0" bIns="0" anchor="t">
+            <a:normAutofit fontScale="100000"/>
+          </a:bodyPr>
+          <a:lstStyle xmlns:a="http://schemas.openxmlformats.org/drawingml/2006/main"/>
+          <a:p xmlns:a="http://schemas.openxmlformats.org/drawingml/2006/main">
+            <a:pPr>
+              <a:defRPr sz="1725" b="1">
+                <a:solidFill>
+                  <a:srgbClr val="161616"/>
+                </a:solidFill>
+                <a:latin typeface="Arial"/>
+                <a:ea typeface="Arial"/>
+                <a:cs typeface="Arial"/>
+              </a:defRPr>
+            </a:pPr>
+            <a:r>
+              <a:rPr sz="1725" b="1">
+                <a:solidFill>
+                  <a:srgbClr val="161616"/>
+                </a:solidFill>
+                <a:latin typeface="Arial"/>
+                <a:ea typeface="Arial"/>
+                <a:cs typeface="Arial"/>
+              </a:rPr>
+              <a:t>Public GitHub repository</a:t>
+            </a:r>
+          </a:p>
+        </p:txBody>
+      </p:sp>
+      <p:sp>
+        <p:nvSpPr>
+          <p:cNvPr id="163" name="repo-url">
+            <a:extLst xmlns:a="http://schemas.openxmlformats.org/drawingml/2006/main">
+              <a:ext uri="{FF2B5EF4-FFF2-40B4-BE49-F238E27FC236}">
+                <a16:creationId xmlns:a16="http://schemas.microsoft.com/office/drawing/2014/main" id="{9BACA338-E826-42F3-81F9-8193D31AA9A6}"/>
+              </a:ext>
+            </a:extLst>
+          </p:cNvPr>
+          <p:cNvSpPr>
+            <a:spLocks xmlns:a="http://schemas.openxmlformats.org/drawingml/2006/main" noGrp="1"/>
+          </p:cNvSpPr>
+          <p:nvPr/>
+        </p:nvSpPr>
+        <p:spPr>
+          <a:xfrm xmlns:a="http://schemas.openxmlformats.org/drawingml/2006/main">
+            <a:off x="523875" y="1876425"/>
+            <a:ext cx="8048625" cy="352425"/>
+          </a:xfrm>
+          <a:prstGeom xmlns:a="http://schemas.openxmlformats.org/drawingml/2006/main" prst="rect">
+            <a:avLst/>
+          </a:prstGeom>
+          <a:noFill xmlns:a="http://schemas.openxmlformats.org/drawingml/2006/main"/>
+          <a:ln xmlns:a="http://schemas.openxmlformats.org/drawingml/2006/main" w="0">
+            <a:noFill/>
+          </a:ln>
+        </p:spPr>
+        <p:txBody>
+          <a:bodyPr xmlns:a="http://schemas.openxmlformats.org/drawingml/2006/main" wrap="square" lIns="0" tIns="0" rIns="0" bIns="0" anchor="t">
+            <a:normAutofit fontScale="100000"/>
+          </a:bodyPr>
+          <a:lstStyle xmlns:a="http://schemas.openxmlformats.org/drawingml/2006/main"/>
+          <a:p xmlns:a="http://schemas.openxmlformats.org/drawingml/2006/main">
+            <a:pPr>
+              <a:defRPr sz="1575" b="0">
+                <a:solidFill>
+                  <a:srgbClr val="1A73E8"/>
+                </a:solidFill>
+                <a:latin typeface="Arial"/>
+                <a:ea typeface="Arial"/>
+                <a:cs typeface="Arial"/>
+              </a:defRPr>
+            </a:pPr>
+            <a:r>
+              <a:rPr sz="1575" b="0">
+                <a:solidFill>
+                  <a:srgbClr val="1A73E8"/>
+                </a:solidFill>
+                <a:latin typeface="Arial"/>
+                <a:ea typeface="Arial"/>
+                <a:cs typeface="Arial"/>
+                <a:hlinkClick xmlns:r="http://schemas.openxmlformats.org/officeDocument/2006/relationships" r:id="Rccd8f4d8b22f4b14"/>
+              </a:rPr>
+              <a:t>https://github.com/kirav5/collab</a:t>
+            </a:r>
+          </a:p>
+        </p:txBody>
+      </p:sp>
+      <p:sp>
+        <p:nvSpPr>
+          <p:cNvPr id="164" name="links-rule1">
+            <a:extLst xmlns:a="http://schemas.openxmlformats.org/drawingml/2006/main">
+              <a:ext uri="{FF2B5EF4-FFF2-40B4-BE49-F238E27FC236}">
+                <a16:creationId xmlns:a16="http://schemas.microsoft.com/office/drawing/2014/main" id="{9BC3523C-1B78-4CB0-92C2-6F0474C2D6DE}"/>
+              </a:ext>
+            </a:extLst>
+          </p:cNvPr>
+          <p:cNvSpPr>
+            <a:spLocks xmlns:a="http://schemas.openxmlformats.org/drawingml/2006/main" noGrp="1"/>
+          </p:cNvSpPr>
+          <p:nvPr/>
+        </p:nvSpPr>
+        <p:spPr>
+          <a:xfrm xmlns:a="http://schemas.openxmlformats.org/drawingml/2006/main">
+            <a:off x="523875" y="2362200"/>
+            <a:ext cx="8048625" cy="19050"/>
+          </a:xfrm>
+          <a:prstGeom xmlns:a="http://schemas.openxmlformats.org/drawingml/2006/main" prst="rect">
+            <a:avLst/>
+          </a:prstGeom>
+          <a:solidFill xmlns:a="http://schemas.openxmlformats.org/drawingml/2006/main">
+            <a:srgbClr val="B9B9B9"/>
+          </a:solidFill>
+          <a:ln xmlns:a="http://schemas.openxmlformats.org/drawingml/2006/main" w="0">
+            <a:noFill/>
+          </a:ln>
+        </p:spPr>
+      </p:sp>
+      <p:sp>
+        <p:nvSpPr>
+          <p:cNvPr id="165" name="video-label">
+            <a:extLst xmlns:a="http://schemas.openxmlformats.org/drawingml/2006/main">
+              <a:ext uri="{FF2B5EF4-FFF2-40B4-BE49-F238E27FC236}">
+                <a16:creationId xmlns:a16="http://schemas.microsoft.com/office/drawing/2014/main" id="{F6737FAD-ACA3-4F39-BEBD-C480649B9547}"/>
+              </a:ext>
+            </a:extLst>
+          </p:cNvPr>
+          <p:cNvSpPr>
+            <a:spLocks xmlns:a="http://schemas.openxmlformats.org/drawingml/2006/main" noGrp="1"/>
+          </p:cNvSpPr>
+          <p:nvPr/>
+        </p:nvSpPr>
+        <p:spPr>
+          <a:xfrm xmlns:a="http://schemas.openxmlformats.org/drawingml/2006/main">
+            <a:off x="523875" y="2533650"/>
+            <a:ext cx="8048625" cy="295275"/>
+          </a:xfrm>
+          <a:prstGeom xmlns:a="http://schemas.openxmlformats.org/drawingml/2006/main" prst="rect">
+            <a:avLst/>
+          </a:prstGeom>
+          <a:noFill xmlns:a="http://schemas.openxmlformats.org/drawingml/2006/main"/>
+          <a:ln xmlns:a="http://schemas.openxmlformats.org/drawingml/2006/main" w="0">
+            <a:noFill/>
+          </a:ln>
+        </p:spPr>
+        <p:txBody>
+          <a:bodyPr xmlns:a="http://schemas.openxmlformats.org/drawingml/2006/main" wrap="square" lIns="0" tIns="0" rIns="0" bIns="0" anchor="t">
+            <a:normAutofit fontScale="100000"/>
+          </a:bodyPr>
+          <a:lstStyle xmlns:a="http://schemas.openxmlformats.org/drawingml/2006/main"/>
+          <a:p xmlns:a="http://schemas.openxmlformats.org/drawingml/2006/main">
+            <a:pPr>
+              <a:defRPr sz="1725" b="1">
+                <a:solidFill>
+                  <a:srgbClr val="161616"/>
+                </a:solidFill>
+                <a:latin typeface="Arial"/>
+                <a:ea typeface="Arial"/>
+                <a:cs typeface="Arial"/>
+              </a:defRPr>
+            </a:pPr>
+            <a:r>
+              <a:rPr sz="1725" b="1">
+                <a:solidFill>
+                  <a:srgbClr val="161616"/>
+                </a:solidFill>
+                <a:latin typeface="Arial"/>
+                <a:ea typeface="Arial"/>
+                <a:cs typeface="Arial"/>
+              </a:rPr>
+              <a:t>Demo video (3–4 minutes)</a:t>
+            </a:r>
+          </a:p>
+        </p:txBody>
+      </p:sp>
+      <p:sp>
+        <p:nvSpPr>
+          <p:cNvPr id="166" name="video-pending">
+            <a:extLst xmlns:a="http://schemas.openxmlformats.org/drawingml/2006/main">
+              <a:ext uri="{FF2B5EF4-FFF2-40B4-BE49-F238E27FC236}">
+                <a16:creationId xmlns:a16="http://schemas.microsoft.com/office/drawing/2014/main" id="{FA68B6DF-C36F-4D01-9C59-D269E3626D73}"/>
+              </a:ext>
+            </a:extLst>
+          </p:cNvPr>
+          <p:cNvSpPr>
+            <a:spLocks xmlns:a="http://schemas.openxmlformats.org/drawingml/2006/main" noGrp="1"/>
+          </p:cNvSpPr>
+          <p:nvPr/>
+        </p:nvSpPr>
+        <p:spPr>
+          <a:xfrm xmlns:a="http://schemas.openxmlformats.org/drawingml/2006/main">
+            <a:off x="523875" y="2895600"/>
+            <a:ext cx="8048625" cy="361950"/>
+          </a:xfrm>
+          <a:prstGeom xmlns:a="http://schemas.openxmlformats.org/drawingml/2006/main" prst="rect">
+            <a:avLst/>
+          </a:prstGeom>
+          <a:noFill xmlns:a="http://schemas.openxmlformats.org/drawingml/2006/main"/>
+          <a:ln xmlns:a="http://schemas.openxmlformats.org/drawingml/2006/main" w="0">
+            <a:noFill/>
+          </a:ln>
+        </p:spPr>
+        <p:txBody>
+          <a:bodyPr xmlns:a="http://schemas.openxmlformats.org/drawingml/2006/main" wrap="square" lIns="0" tIns="0" rIns="0" bIns="0" anchor="t">
+            <a:normAutofit fontScale="100000"/>
+          </a:bodyPr>
+          <a:lstStyle xmlns:a="http://schemas.openxmlformats.org/drawingml/2006/main"/>
+          <a:p xmlns:a="http://schemas.openxmlformats.org/drawingml/2006/main">
+            <a:pPr>
+              <a:defRPr sz="1500" b="0">
+                <a:solidFill>
+                  <a:srgbClr val="444444"/>
+                </a:solidFill>
+                <a:latin typeface="Arial"/>
+                <a:ea typeface="Arial"/>
+                <a:cs typeface="Arial"/>
+              </a:defRPr>
+            </a:pPr>
+            <a:r>
+              <a:rPr sz="1500" b="0">
+                <a:solidFill>
+                  <a:srgbClr val="444444"/>
+                </a:solidFill>
+                <a:latin typeface="Arial"/>
+                <a:ea typeface="Arial"/>
+                <a:cs typeface="Arial"/>
+              </a:rPr>
+              <a:t>Add link after recording. Required by the submission form.</a:t>
+            </a:r>
+          </a:p>
+        </p:txBody>
+      </p:sp>
+      <p:sp>
+        <p:nvSpPr>
+          <p:cNvPr id="167" name="links-rule2">
+            <a:extLst xmlns:a="http://schemas.openxmlformats.org/drawingml/2006/main">
+              <a:ext uri="{FF2B5EF4-FFF2-40B4-BE49-F238E27FC236}">
+                <a16:creationId xmlns:a16="http://schemas.microsoft.com/office/drawing/2014/main" id="{63F447C6-22CC-4C16-83A1-4DAA60398C74}"/>
+              </a:ext>
+            </a:extLst>
+          </p:cNvPr>
+          <p:cNvSpPr>
+            <a:spLocks xmlns:a="http://schemas.openxmlformats.org/drawingml/2006/main" noGrp="1"/>
+          </p:cNvSpPr>
+          <p:nvPr/>
+        </p:nvSpPr>
+        <p:spPr>
+          <a:xfrm xmlns:a="http://schemas.openxmlformats.org/drawingml/2006/main">
+            <a:off x="523875" y="3409950"/>
+            <a:ext cx="8048625" cy="19050"/>
+          </a:xfrm>
+          <a:prstGeom xmlns:a="http://schemas.openxmlformats.org/drawingml/2006/main" prst="rect">
+            <a:avLst/>
+          </a:prstGeom>
+          <a:solidFill xmlns:a="http://schemas.openxmlformats.org/drawingml/2006/main">
+            <a:srgbClr val="B9B9B9"/>
+          </a:solidFill>
+          <a:ln xmlns:a="http://schemas.openxmlformats.org/drawingml/2006/main" w="0">
+            <a:noFill/>
+          </a:ln>
+        </p:spPr>
+      </p:sp>
+      <p:sp>
+        <p:nvSpPr>
+          <p:cNvPr id="168" name="product-label">
+            <a:extLst xmlns:a="http://schemas.openxmlformats.org/drawingml/2006/main">
+              <a:ext uri="{FF2B5EF4-FFF2-40B4-BE49-F238E27FC236}">
+                <a16:creationId xmlns:a16="http://schemas.microsoft.com/office/drawing/2014/main" id="{C18A17F5-C313-4E1B-B7F2-2884EA000BD2}"/>
+              </a:ext>
+            </a:extLst>
+          </p:cNvPr>
+          <p:cNvSpPr>
+            <a:spLocks xmlns:a="http://schemas.openxmlformats.org/drawingml/2006/main" noGrp="1"/>
+          </p:cNvSpPr>
+          <p:nvPr/>
+        </p:nvSpPr>
+        <p:spPr>
+          <a:xfrm xmlns:a="http://schemas.openxmlformats.org/drawingml/2006/main">
+            <a:off x="523875" y="3581400"/>
+            <a:ext cx="8048625" cy="295275"/>
+          </a:xfrm>
+          <a:prstGeom xmlns:a="http://schemas.openxmlformats.org/drawingml/2006/main" prst="rect">
+            <a:avLst/>
+          </a:prstGeom>
+          <a:noFill xmlns:a="http://schemas.openxmlformats.org/drawingml/2006/main"/>
+          <a:ln xmlns:a="http://schemas.openxmlformats.org/drawingml/2006/main" w="0">
+            <a:noFill/>
+          </a:ln>
+        </p:spPr>
+        <p:txBody>
+          <a:bodyPr xmlns:a="http://schemas.openxmlformats.org/drawingml/2006/main" wrap="square" lIns="0" tIns="0" rIns="0" bIns="0" anchor="t">
+            <a:normAutofit fontScale="100000"/>
+          </a:bodyPr>
+          <a:lstStyle xmlns:a="http://schemas.openxmlformats.org/drawingml/2006/main"/>
+          <a:p xmlns:a="http://schemas.openxmlformats.org/drawingml/2006/main">
+            <a:pPr>
+              <a:defRPr sz="1725" b="1">
+                <a:solidFill>
+                  <a:srgbClr val="161616"/>
+                </a:solidFill>
+                <a:latin typeface="Arial"/>
+                <a:ea typeface="Arial"/>
+                <a:cs typeface="Arial"/>
+              </a:defRPr>
+            </a:pPr>
+            <a:r>
+              <a:rPr sz="1725" b="1">
+                <a:solidFill>
+                  <a:srgbClr val="161616"/>
+                </a:solidFill>
+                <a:latin typeface="Arial"/>
+                <a:ea typeface="Arial"/>
+                <a:cs typeface="Arial"/>
+              </a:rPr>
+              <a:t>Deployed prototype</a:t>
+            </a:r>
+          </a:p>
+        </p:txBody>
+      </p:sp>
+      <p:sp>
+        <p:nvSpPr>
+          <p:cNvPr id="169" name="product-url">
+            <a:extLst xmlns:a="http://schemas.openxmlformats.org/drawingml/2006/main">
+              <a:ext uri="{FF2B5EF4-FFF2-40B4-BE49-F238E27FC236}">
+                <a16:creationId xmlns:a16="http://schemas.microsoft.com/office/drawing/2014/main" id="{1ECB7502-5BF4-4B85-9822-F64DC2C4B322}"/>
+              </a:ext>
+            </a:extLst>
+          </p:cNvPr>
+          <p:cNvSpPr>
+            <a:spLocks xmlns:a="http://schemas.openxmlformats.org/drawingml/2006/main" noGrp="1"/>
+          </p:cNvSpPr>
+          <p:nvPr/>
+        </p:nvSpPr>
+        <p:spPr>
+          <a:xfrm xmlns:a="http://schemas.openxmlformats.org/drawingml/2006/main">
+            <a:off x="523875" y="3943350"/>
+            <a:ext cx="8048625" cy="352425"/>
+          </a:xfrm>
+          <a:prstGeom xmlns:a="http://schemas.openxmlformats.org/drawingml/2006/main" prst="rect">
+            <a:avLst/>
+          </a:prstGeom>
+          <a:noFill xmlns:a="http://schemas.openxmlformats.org/drawingml/2006/main"/>
+          <a:ln xmlns:a="http://schemas.openxmlformats.org/drawingml/2006/main" w="0">
+            <a:noFill/>
+          </a:ln>
+        </p:spPr>
+        <p:txBody>
+          <a:bodyPr xmlns:a="http://schemas.openxmlformats.org/drawingml/2006/main" wrap="square" lIns="0" tIns="0" rIns="0" bIns="0" anchor="t">
+            <a:normAutofit fontScale="100000"/>
+          </a:bodyPr>
+          <a:lstStyle xmlns:a="http://schemas.openxmlformats.org/drawingml/2006/main"/>
+          <a:p xmlns:a="http://schemas.openxmlformats.org/drawingml/2006/main">
+            <a:pPr>
+              <a:defRPr sz="1575" b="0">
+                <a:solidFill>
+                  <a:srgbClr val="1A73E8"/>
+                </a:solidFill>
+                <a:latin typeface="Arial"/>
+                <a:ea typeface="Arial"/>
+                <a:cs typeface="Arial"/>
+              </a:defRPr>
+            </a:pPr>
+            <a:r>
+              <a:rPr sz="1575" b="0">
+                <a:solidFill>
+                  <a:srgbClr val="1A73E8"/>
+                </a:solidFill>
+                <a:latin typeface="Arial"/>
+                <a:ea typeface="Arial"/>
+                <a:cs typeface="Arial"/>
+                <a:hlinkClick xmlns:r="http://schemas.openxmlformats.org/officeDocument/2006/relationships" r:id="R0756d7da1bb5467c"/>
+              </a:rPr>
+              <a:t>https://collab-55.web.app</a:t>
+            </a:r>
+          </a:p>
+        </p:txBody>
+      </p:sp>
+    </p:spTree>
+    <p:extLst>
+      <p:ext uri="{BB962C8B-B14F-4D97-AF65-F5344CB8AC3E}">
+        <p14:creationId xmlns:p14="http://schemas.microsoft.com/office/powerpoint/2010/main" val="734990444"/>
+      </p:ext>
+    </p:extLst>
+  </p:cSld>
+</p:sld>
+</file>
+
+<file path=ppt/slides/slide15.xml><?xml version="1.0" encoding="utf-8"?>
+<p:sld xmlns:p="http://schemas.openxmlformats.org/presentationml/2006/main">
+  <p:cSld>
+    <p:spTree>
+      <p:nvGrpSpPr>
+        <p:cNvPr id="1" name=""/>
+        <p:cNvGrpSpPr/>
+        <p:nvPr/>
+      </p:nvGrpSpPr>
+      <p:grpSpPr>
+        <a:xfrm xmlns:a="http://schemas.openxmlformats.org/drawingml/2006/main"/>
+      </p:grpSpPr>
+      <p:pic>
+        <p:nvPicPr>
           <p:cNvPr id="3" name="Google Shape;171;p28"/>
           <p:cNvPicPr>
             <a:picLocks xmlns:a="http://schemas.openxmlformats.org/drawingml/2006/main" noChangeAspect="1"/>
@@ -9733,1179 +10194,6 @@
       </p:ext>
     </p:extLst>
   </p:cSld>
-</p:sld>
-</file>
-
-<file path=ppt/slides/slide15.xml><?xml version="1.0" encoding="utf-8"?>
-<p:sld xmlns:a="http://schemas.openxmlformats.org/drawingml/2006/main" xmlns:p="http://schemas.openxmlformats.org/presentationml/2006/main" xmlns:r="http://schemas.openxmlformats.org/officeDocument/2006/relationships">
-  <p:cSld>
-    <p:spTree>
-      <p:nvGrpSpPr>
-        <p:cNvPr id="1" name=""/>
-        <p:cNvGrpSpPr/>
-        <p:nvPr/>
-      </p:nvGrpSpPr>
-      <p:grpSpPr/>
-      <p:pic>
-        <p:nvPicPr>
-          <p:cNvPr id="139" name="Google Shape;116;p21"/>
-          <p:cNvPicPr>
-            <a:picLocks noChangeAspect="1"/>
-          </p:cNvPicPr>
-          <p:nvPr/>
-        </p:nvPicPr>
-        <p:blipFill rotWithShape="1">
-          <a:blip r:embed="rId2">
-            <a:alphaModFix/>
-          </a:blip>
-          <a:srcRect l="0" t="0" r="0" b="98001"/>
-          <a:stretch/>
-        </p:blipFill>
-        <p:spPr>
-          <a:xfrm>
-            <a:off x="0" y="5093562"/>
-            <a:ext cx="9144000" cy="54275"/>
-          </a:xfrm>
-          <a:prstGeom prst="rect">
-            <a:avLst/>
-          </a:prstGeom>
-          <a:ln>
-            <a:noFill/>
-          </a:ln>
-        </p:spPr>
-      </p:pic>
-      <p:pic>
-        <p:nvPicPr>
-          <p:cNvPr id="140" name="Google Shape;117;p21"/>
-          <p:cNvPicPr>
-            <a:picLocks noChangeAspect="1"/>
-          </p:cNvPicPr>
-          <p:nvPr/>
-        </p:nvPicPr>
-        <p:blipFill>
-          <a:blip r:embed="rId3">
-            <a:alphaModFix/>
-          </a:blip>
-          <a:stretch>
-            <a:fillRect l="0" t="0" r="0" b="0"/>
-          </a:stretch>
-        </p:blipFill>
-        <p:spPr>
-          <a:xfrm>
-            <a:off x="0" y="1"/>
-            <a:ext cx="9144000" cy="507359"/>
-          </a:xfrm>
-          <a:prstGeom prst="rect">
-            <a:avLst/>
-          </a:prstGeom>
-          <a:ln>
-            <a:noFill/>
-          </a:ln>
-        </p:spPr>
-      </p:pic>
-      <p:sp>
-        <p:nvSpPr>
-          <p:cNvPr id="118" name="Google Shape;118;p21">
-            <a:extLst>
-              <a:ext uri="{FF2B5EF4-FFF2-40B4-BE49-F238E27FC236}">
-                <a16:creationId xmlns:a16="http://schemas.microsoft.com/office/drawing/2014/main" id="{90FAB6E9-1B1E-4AC3-8107-7514F14484D4}"/>
-              </a:ext>
-            </a:extLst>
-          </p:cNvPr>
-          <p:cNvSpPr>
-            <a:spLocks noGrp="1"/>
-          </p:cNvSpPr>
-          <p:nvPr/>
-        </p:nvSpPr>
-        <p:spPr>
-          <a:xfrm>
-            <a:off x="-29250" y="5071875"/>
-            <a:ext cx="9173400" cy="97800"/>
-          </a:xfrm>
-          <a:prstGeom prst="rect">
-            <a:avLst/>
-          </a:prstGeom>
-          <a:solidFill>
-            <a:schemeClr val="dk1"/>
-          </a:solidFill>
-          <a:ln>
-            <a:noFill/>
-          </a:ln>
-        </p:spPr>
-        <p:txBody>
-          <a:bodyPr spcFirstLastPara="1" wrap="square" lIns="91425" tIns="91425" rIns="91425" bIns="91425" anchor="ctr">
-            <a:noAutofit/>
-          </a:bodyPr>
-          <a:lstStyle/>
-          <a:p>
-            <a:pPr marL="0" lvl="0" indent="0" algn="ctr">
-              <a:spcBef>
-                <a:spcPts val="0"/>
-              </a:spcBef>
-              <a:spcAft>
-                <a:spcPts val="0"/>
-              </a:spcAft>
-              <a:buNone/>
-            </a:pPr>
-            <a:r>
-              <a:t/>
-            </a:r>
-            <a:endParaRPr/>
-          </a:p>
-        </p:txBody>
-      </p:sp>
-      <p:sp>
-        <p:nvSpPr>
-          <p:cNvPr id="119" name="Google Shape;119;p21">
-            <a:extLst>
-              <a:ext uri="{FF2B5EF4-FFF2-40B4-BE49-F238E27FC236}">
-                <a16:creationId xmlns:a16="http://schemas.microsoft.com/office/drawing/2014/main" id="{70EF1269-C4C4-4ABB-BEEE-D0867E087EA7}"/>
-              </a:ext>
-            </a:extLst>
-          </p:cNvPr>
-          <p:cNvSpPr>
-            <a:spLocks noGrp="1"/>
-          </p:cNvSpPr>
-          <p:nvPr/>
-        </p:nvSpPr>
-        <p:spPr>
-          <a:xfrm>
-            <a:off x="266700" y="676275"/>
-            <a:ext cx="8524875" cy="542925"/>
-          </a:xfrm>
-          <a:prstGeom prst="rect">
-            <a:avLst/>
-          </a:prstGeom>
-          <a:noFill/>
-          <a:ln>
-            <a:noFill/>
-          </a:ln>
-        </p:spPr>
-        <p:txBody>
-          <a:bodyPr spcFirstLastPara="1" wrap="square" lIns="0" tIns="0" rIns="0" bIns="0" anchor="t">
-            <a:normAutofit fontScale="100000"/>
-          </a:bodyPr>
-          <a:lstStyle/>
-          <a:p>
-            <a:pPr marL="0" lvl="0" indent="0" algn="l">
-              <a:spcBef>
-                <a:spcPts val="0"/>
-              </a:spcBef>
-              <a:spcAft>
-                <a:spcPts val="0"/>
-              </a:spcAft>
-              <a:buNone/>
-              <a:defRPr sz="1725">
-                <a:solidFill>
-                  <a:srgbClr val="161616"/>
-                </a:solidFill>
-                <a:latin typeface="Arial"/>
-                <a:ea typeface="Arial"/>
-                <a:cs typeface="Arial"/>
-              </a:defRPr>
-            </a:pPr>
-            <a:r>
-              <a:rPr sz="1725">
-                <a:solidFill>
-                  <a:srgbClr val="161616"/>
-                </a:solidFill>
-                <a:latin typeface="Arial"/>
-                <a:ea typeface="Arial"/>
-                <a:cs typeface="Arial"/>
-              </a:rPr>
-              <a:t>Trust built in: fraud prevention</a:t>
-            </a:r>
-            <a:endParaRPr sz="1600">
-              <a:latin typeface="Google Sans Flex Medium"/>
-              <a:ea typeface="Google Sans Flex Medium"/>
-              <a:cs typeface="Google Sans Flex Medium"/>
-            </a:endParaRPr>
-          </a:p>
-        </p:txBody>
-      </p:sp>
-      <p:sp>
-        <p:nvSpPr>
-          <p:cNvPr id="200" name="trust-label-0">
-            <a:extLst>
-              <a:ext uri="{FF2B5EF4-FFF2-40B4-BE49-F238E27FC236}">
-                <a16:creationId xmlns:a16="http://schemas.microsoft.com/office/drawing/2014/main" id="{FD321D03-A498-4D36-A747-32F9961F2285}"/>
-              </a:ext>
-            </a:extLst>
-          </p:cNvPr>
-          <p:cNvSpPr>
-            <a:spLocks noGrp="1"/>
-          </p:cNvSpPr>
-          <p:nvPr/>
-        </p:nvSpPr>
-        <p:spPr>
-          <a:xfrm>
-            <a:off x="523875" y="1400175"/>
-            <a:ext cx="2714625" cy="285750"/>
-          </a:xfrm>
-          <a:prstGeom prst="rect">
-            <a:avLst/>
-          </a:prstGeom>
-          <a:noFill/>
-          <a:ln w="0">
-            <a:noFill/>
-          </a:ln>
-        </p:spPr>
-        <p:txBody>
-          <a:bodyPr wrap="square" lIns="0" tIns="0" rIns="0" bIns="0" anchor="t">
-            <a:normAutofit fontScale="100000"/>
-          </a:bodyPr>
-          <a:lstStyle/>
-          <a:p>
-            <a:pPr>
-              <a:defRPr sz="1500" b="1">
-                <a:solidFill>
-                  <a:srgbClr val="161616"/>
-                </a:solidFill>
-                <a:latin typeface="Arial"/>
-                <a:ea typeface="Arial"/>
-                <a:cs typeface="Arial"/>
-              </a:defRPr>
-            </a:pPr>
-            <a:r>
-              <a:rPr sz="1500" b="1">
-                <a:solidFill>
-                  <a:srgbClr val="161616"/>
-                </a:solidFill>
-                <a:latin typeface="Arial"/>
-                <a:ea typeface="Arial"/>
-                <a:cs typeface="Arial"/>
-              </a:rPr>
-              <a:t>Pickup/booking pass</a:t>
-            </a:r>
-          </a:p>
-        </p:txBody>
-      </p:sp>
-      <p:sp>
-        <p:nvSpPr>
-          <p:cNvPr id="201" name="trust-desc-0">
-            <a:extLst>
-              <a:ext uri="{FF2B5EF4-FFF2-40B4-BE49-F238E27FC236}">
-                <a16:creationId xmlns:a16="http://schemas.microsoft.com/office/drawing/2014/main" id="{D75CB656-661E-4542-A438-C941DA210235}"/>
-              </a:ext>
-            </a:extLst>
-          </p:cNvPr>
-          <p:cNvSpPr>
-            <a:spLocks noGrp="1"/>
-          </p:cNvSpPr>
-          <p:nvPr/>
-        </p:nvSpPr>
-        <p:spPr>
-          <a:xfrm>
-            <a:off x="3324225" y="1400175"/>
-            <a:ext cx="5238750" cy="400050"/>
-          </a:xfrm>
-          <a:prstGeom prst="rect">
-            <a:avLst/>
-          </a:prstGeom>
-          <a:noFill/>
-          <a:ln w="0">
-            <a:noFill/>
-          </a:ln>
-        </p:spPr>
-        <p:txBody>
-          <a:bodyPr wrap="square" lIns="0" tIns="0" rIns="0" bIns="0" anchor="t">
-            <a:normAutofit fontScale="100000"/>
-          </a:bodyPr>
-          <a:lstStyle/>
-          <a:p>
-            <a:pPr>
-              <a:defRPr sz="1350" b="0">
-                <a:solidFill>
-                  <a:srgbClr val="444444"/>
-                </a:solidFill>
-                <a:latin typeface="Arial"/>
-                <a:ea typeface="Arial"/>
-                <a:cs typeface="Arial"/>
-              </a:defRPr>
-            </a:pPr>
-            <a:r>
-              <a:rPr sz="1350" b="0">
-                <a:solidFill>
-                  <a:srgbClr val="444444"/>
-                </a:solidFill>
-                <a:latin typeface="Arial"/>
-                <a:ea typeface="Arial"/>
-                <a:cs typeface="Arial"/>
-              </a:rPr>
-              <a:t>Second scan refused; the seller is matched by account</a:t>
-            </a:r>
-          </a:p>
-        </p:txBody>
-      </p:sp>
-      <p:sp>
-        <p:nvSpPr>
-          <p:cNvPr id="202" name="trust-rule-0">
-            <a:extLst>
-              <a:ext uri="{FF2B5EF4-FFF2-40B4-BE49-F238E27FC236}">
-                <a16:creationId xmlns:a16="http://schemas.microsoft.com/office/drawing/2014/main" id="{FC78AC28-F000-4B80-B03D-BB2D9F6AC8B7}"/>
-              </a:ext>
-            </a:extLst>
-          </p:cNvPr>
-          <p:cNvSpPr>
-            <a:spLocks noGrp="1"/>
-          </p:cNvSpPr>
-          <p:nvPr/>
-        </p:nvSpPr>
-        <p:spPr>
-          <a:xfrm>
-            <a:off x="523875" y="1819275"/>
-            <a:ext cx="8048625" cy="9525"/>
-          </a:xfrm>
-          <a:prstGeom prst="rect">
-            <a:avLst/>
-          </a:prstGeom>
-          <a:solidFill>
-            <a:srgbClr val="D8D8D8"/>
-          </a:solidFill>
-          <a:ln w="0">
-            <a:noFill/>
-          </a:ln>
-        </p:spPr>
-      </p:sp>
-      <p:sp>
-        <p:nvSpPr>
-          <p:cNvPr id="203" name="trust-label-1">
-            <a:extLst>
-              <a:ext uri="{FF2B5EF4-FFF2-40B4-BE49-F238E27FC236}">
-                <a16:creationId xmlns:a16="http://schemas.microsoft.com/office/drawing/2014/main" id="{306D714D-3713-4E36-99CE-710E4EA69727}"/>
-              </a:ext>
-            </a:extLst>
-          </p:cNvPr>
-          <p:cNvSpPr>
-            <a:spLocks noGrp="1"/>
-          </p:cNvSpPr>
-          <p:nvPr/>
-        </p:nvSpPr>
-        <p:spPr>
-          <a:xfrm>
-            <a:off x="523875" y="1876425"/>
-            <a:ext cx="2714625" cy="285750"/>
-          </a:xfrm>
-          <a:prstGeom prst="rect">
-            <a:avLst/>
-          </a:prstGeom>
-          <a:noFill/>
-          <a:ln w="0">
-            <a:noFill/>
-          </a:ln>
-        </p:spPr>
-        <p:txBody>
-          <a:bodyPr wrap="square" lIns="0" tIns="0" rIns="0" bIns="0" anchor="t">
-            <a:normAutofit fontScale="100000"/>
-          </a:bodyPr>
-          <a:lstStyle/>
-          <a:p>
-            <a:pPr>
-              <a:defRPr sz="1500" b="1">
-                <a:solidFill>
-                  <a:srgbClr val="161616"/>
-                </a:solidFill>
-                <a:latin typeface="Arial"/>
-                <a:ea typeface="Arial"/>
-                <a:cs typeface="Arial"/>
-              </a:defRPr>
-            </a:pPr>
-            <a:r>
-              <a:rPr sz="1500" b="1">
-                <a:solidFill>
-                  <a:srgbClr val="161616"/>
-                </a:solidFill>
-                <a:latin typeface="Arial"/>
-                <a:ea typeface="Arial"/>
-                <a:cs typeface="Arial"/>
-              </a:rPr>
-              <a:t>Signed receipts</a:t>
-            </a:r>
-          </a:p>
-        </p:txBody>
-      </p:sp>
-      <p:sp>
-        <p:nvSpPr>
-          <p:cNvPr id="204" name="trust-desc-1">
-            <a:extLst>
-              <a:ext uri="{FF2B5EF4-FFF2-40B4-BE49-F238E27FC236}">
-                <a16:creationId xmlns:a16="http://schemas.microsoft.com/office/drawing/2014/main" id="{E4B36518-440C-4DCC-B26D-4C2FF3468013}"/>
-              </a:ext>
-            </a:extLst>
-          </p:cNvPr>
-          <p:cNvSpPr>
-            <a:spLocks noGrp="1"/>
-          </p:cNvSpPr>
-          <p:nvPr/>
-        </p:nvSpPr>
-        <p:spPr>
-          <a:xfrm>
-            <a:off x="3324225" y="1876425"/>
-            <a:ext cx="5238750" cy="400050"/>
-          </a:xfrm>
-          <a:prstGeom prst="rect">
-            <a:avLst/>
-          </a:prstGeom>
-          <a:noFill/>
-          <a:ln w="0">
-            <a:noFill/>
-          </a:ln>
-        </p:spPr>
-        <p:txBody>
-          <a:bodyPr wrap="square" lIns="0" tIns="0" rIns="0" bIns="0" anchor="t">
-            <a:normAutofit fontScale="100000"/>
-          </a:bodyPr>
-          <a:lstStyle/>
-          <a:p>
-            <a:pPr>
-              <a:defRPr sz="1350" b="0">
-                <a:solidFill>
-                  <a:srgbClr val="444444"/>
-                </a:solidFill>
-                <a:latin typeface="Arial"/>
-                <a:ea typeface="Arial"/>
-                <a:cs typeface="Arial"/>
-              </a:defRPr>
-            </a:pPr>
-            <a:r>
-              <a:rPr sz="1350" b="0">
-                <a:solidFill>
-                  <a:srgbClr val="444444"/>
-                </a:solidFill>
-                <a:latin typeface="Arial"/>
-                <a:ea typeface="Arial"/>
-                <a:cs typeface="Arial"/>
-              </a:rPr>
-              <a:t>Ed25519-signed; any edit fails. Demo: “Try changing the price”</a:t>
-            </a:r>
-          </a:p>
-        </p:txBody>
-      </p:sp>
-      <p:sp>
-        <p:nvSpPr>
-          <p:cNvPr id="205" name="trust-rule-1">
-            <a:extLst>
-              <a:ext uri="{FF2B5EF4-FFF2-40B4-BE49-F238E27FC236}">
-                <a16:creationId xmlns:a16="http://schemas.microsoft.com/office/drawing/2014/main" id="{7FC6007B-C4A5-4369-972C-B6F2D8576849}"/>
-              </a:ext>
-            </a:extLst>
-          </p:cNvPr>
-          <p:cNvSpPr>
-            <a:spLocks noGrp="1"/>
-          </p:cNvSpPr>
-          <p:nvPr/>
-        </p:nvSpPr>
-        <p:spPr>
-          <a:xfrm>
-            <a:off x="523875" y="2295525"/>
-            <a:ext cx="8048625" cy="9525"/>
-          </a:xfrm>
-          <a:prstGeom prst="rect">
-            <a:avLst/>
-          </a:prstGeom>
-          <a:solidFill>
-            <a:srgbClr val="D8D8D8"/>
-          </a:solidFill>
-          <a:ln w="0">
-            <a:noFill/>
-          </a:ln>
-        </p:spPr>
-      </p:sp>
-      <p:sp>
-        <p:nvSpPr>
-          <p:cNvPr id="206" name="trust-label-2">
-            <a:extLst>
-              <a:ext uri="{FF2B5EF4-FFF2-40B4-BE49-F238E27FC236}">
-                <a16:creationId xmlns:a16="http://schemas.microsoft.com/office/drawing/2014/main" id="{1E2ADF80-DE49-4419-90BF-B51735CF84D9}"/>
-              </a:ext>
-            </a:extLst>
-          </p:cNvPr>
-          <p:cNvSpPr>
-            <a:spLocks noGrp="1"/>
-          </p:cNvSpPr>
-          <p:nvPr/>
-        </p:nvSpPr>
-        <p:spPr>
-          <a:xfrm>
-            <a:off x="523875" y="2352675"/>
-            <a:ext cx="2714625" cy="285750"/>
-          </a:xfrm>
-          <a:prstGeom prst="rect">
-            <a:avLst/>
-          </a:prstGeom>
-          <a:noFill/>
-          <a:ln w="0">
-            <a:noFill/>
-          </a:ln>
-        </p:spPr>
-        <p:txBody>
-          <a:bodyPr wrap="square" lIns="0" tIns="0" rIns="0" bIns="0" anchor="t">
-            <a:normAutofit fontScale="100000"/>
-          </a:bodyPr>
-          <a:lstStyle/>
-          <a:p>
-            <a:pPr>
-              <a:defRPr sz="1500" b="1">
-                <a:solidFill>
-                  <a:srgbClr val="161616"/>
-                </a:solidFill>
-                <a:latin typeface="Arial"/>
-                <a:ea typeface="Arial"/>
-                <a:cs typeface="Arial"/>
-              </a:defRPr>
-            </a:pPr>
-            <a:r>
-              <a:rPr sz="1500" b="1">
-                <a:solidFill>
-                  <a:srgbClr val="161616"/>
-                </a:solidFill>
-                <a:latin typeface="Arial"/>
-                <a:ea typeface="Arial"/>
-                <a:cs typeface="Arial"/>
-              </a:rPr>
-              <a:t>Model Armor</a:t>
-            </a:r>
-          </a:p>
-        </p:txBody>
-      </p:sp>
-      <p:sp>
-        <p:nvSpPr>
-          <p:cNvPr id="207" name="trust-desc-2">
-            <a:extLst>
-              <a:ext uri="{FF2B5EF4-FFF2-40B4-BE49-F238E27FC236}">
-                <a16:creationId xmlns:a16="http://schemas.microsoft.com/office/drawing/2014/main" id="{E8FA3B8F-4642-416B-A5C4-555C93DD5035}"/>
-              </a:ext>
-            </a:extLst>
-          </p:cNvPr>
-          <p:cNvSpPr>
-            <a:spLocks noGrp="1"/>
-          </p:cNvSpPr>
-          <p:nvPr/>
-        </p:nvSpPr>
-        <p:spPr>
-          <a:xfrm>
-            <a:off x="3324225" y="2352675"/>
-            <a:ext cx="5238750" cy="400050"/>
-          </a:xfrm>
-          <a:prstGeom prst="rect">
-            <a:avLst/>
-          </a:prstGeom>
-          <a:noFill/>
-          <a:ln w="0">
-            <a:noFill/>
-          </a:ln>
-        </p:spPr>
-        <p:txBody>
-          <a:bodyPr wrap="square" lIns="0" tIns="0" rIns="0" bIns="0" anchor="t">
-            <a:normAutofit fontScale="100000"/>
-          </a:bodyPr>
-          <a:lstStyle/>
-          <a:p>
-            <a:pPr>
-              <a:defRPr sz="1350" b="0">
-                <a:solidFill>
-                  <a:srgbClr val="444444"/>
-                </a:solidFill>
-                <a:latin typeface="Arial"/>
-                <a:ea typeface="Arial"/>
-                <a:cs typeface="Arial"/>
-              </a:defRPr>
-            </a:pPr>
-            <a:r>
-              <a:rPr sz="1350" b="0">
-                <a:solidFill>
-                  <a:srgbClr val="444444"/>
-                </a:solidFill>
-                <a:latin typeface="Arial"/>
-                <a:ea typeface="Arial"/>
-                <a:cs typeface="Arial"/>
-              </a:rPr>
-              <a:t>Screens every message from other agents for prompt injection</a:t>
-            </a:r>
-          </a:p>
-        </p:txBody>
-      </p:sp>
-      <p:sp>
-        <p:nvSpPr>
-          <p:cNvPr id="208" name="trust-rule-2">
-            <a:extLst>
-              <a:ext uri="{FF2B5EF4-FFF2-40B4-BE49-F238E27FC236}">
-                <a16:creationId xmlns:a16="http://schemas.microsoft.com/office/drawing/2014/main" id="{5C17DB77-BE48-49C7-9722-FAEA26B2820B}"/>
-              </a:ext>
-            </a:extLst>
-          </p:cNvPr>
-          <p:cNvSpPr>
-            <a:spLocks noGrp="1"/>
-          </p:cNvSpPr>
-          <p:nvPr/>
-        </p:nvSpPr>
-        <p:spPr>
-          <a:xfrm>
-            <a:off x="523875" y="2771775"/>
-            <a:ext cx="8048625" cy="9525"/>
-          </a:xfrm>
-          <a:prstGeom prst="rect">
-            <a:avLst/>
-          </a:prstGeom>
-          <a:solidFill>
-            <a:srgbClr val="D8D8D8"/>
-          </a:solidFill>
-          <a:ln w="0">
-            <a:noFill/>
-          </a:ln>
-        </p:spPr>
-      </p:sp>
-      <p:sp>
-        <p:nvSpPr>
-          <p:cNvPr id="209" name="trust-label-3">
-            <a:extLst>
-              <a:ext uri="{FF2B5EF4-FFF2-40B4-BE49-F238E27FC236}">
-                <a16:creationId xmlns:a16="http://schemas.microsoft.com/office/drawing/2014/main" id="{6606DE32-A264-4C34-9AA0-D2608F344A0F}"/>
-              </a:ext>
-            </a:extLst>
-          </p:cNvPr>
-          <p:cNvSpPr>
-            <a:spLocks noGrp="1"/>
-          </p:cNvSpPr>
-          <p:nvPr/>
-        </p:nvSpPr>
-        <p:spPr>
-          <a:xfrm>
-            <a:off x="523875" y="2828925"/>
-            <a:ext cx="2714625" cy="285750"/>
-          </a:xfrm>
-          <a:prstGeom prst="rect">
-            <a:avLst/>
-          </a:prstGeom>
-          <a:noFill/>
-          <a:ln w="0">
-            <a:noFill/>
-          </a:ln>
-        </p:spPr>
-        <p:txBody>
-          <a:bodyPr wrap="square" lIns="0" tIns="0" rIns="0" bIns="0" anchor="t">
-            <a:normAutofit fontScale="100000"/>
-          </a:bodyPr>
-          <a:lstStyle/>
-          <a:p>
-            <a:pPr>
-              <a:defRPr sz="1500" b="1">
-                <a:solidFill>
-                  <a:srgbClr val="161616"/>
-                </a:solidFill>
-                <a:latin typeface="Arial"/>
-                <a:ea typeface="Arial"/>
-                <a:cs typeface="Arial"/>
-              </a:defRPr>
-            </a:pPr>
-            <a:r>
-              <a:rPr sz="1500" b="1">
-                <a:solidFill>
-                  <a:srgbClr val="161616"/>
-                </a:solidFill>
-                <a:latin typeface="Arial"/>
-                <a:ea typeface="Arial"/>
-                <a:cs typeface="Arial"/>
-              </a:rPr>
-              <a:t>No overselling</a:t>
-            </a:r>
-          </a:p>
-        </p:txBody>
-      </p:sp>
-      <p:sp>
-        <p:nvSpPr>
-          <p:cNvPr id="210" name="trust-desc-3">
-            <a:extLst>
-              <a:ext uri="{FF2B5EF4-FFF2-40B4-BE49-F238E27FC236}">
-                <a16:creationId xmlns:a16="http://schemas.microsoft.com/office/drawing/2014/main" id="{37D2A817-21B7-4522-A73F-056BD95468FA}"/>
-              </a:ext>
-            </a:extLst>
-          </p:cNvPr>
-          <p:cNvSpPr>
-            <a:spLocks noGrp="1"/>
-          </p:cNvSpPr>
-          <p:nvPr/>
-        </p:nvSpPr>
-        <p:spPr>
-          <a:xfrm>
-            <a:off x="3324225" y="2828925"/>
-            <a:ext cx="5238750" cy="400050"/>
-          </a:xfrm>
-          <a:prstGeom prst="rect">
-            <a:avLst/>
-          </a:prstGeom>
-          <a:noFill/>
-          <a:ln w="0">
-            <a:noFill/>
-          </a:ln>
-        </p:spPr>
-        <p:txBody>
-          <a:bodyPr wrap="square" lIns="0" tIns="0" rIns="0" bIns="0" anchor="t">
-            <a:normAutofit fontScale="100000"/>
-          </a:bodyPr>
-          <a:lstStyle/>
-          <a:p>
-            <a:pPr>
-              <a:defRPr sz="1350" b="0">
-                <a:solidFill>
-                  <a:srgbClr val="444444"/>
-                </a:solidFill>
-                <a:latin typeface="Arial"/>
-                <a:ea typeface="Arial"/>
-                <a:cs typeface="Arial"/>
-              </a:defRPr>
-            </a:pPr>
-            <a:r>
-              <a:rPr sz="1350" b="0">
-                <a:solidFill>
-                  <a:srgbClr val="444444"/>
-                </a:solidFill>
-                <a:latin typeface="Arial"/>
-                <a:ea typeface="Arial"/>
-                <a:cs typeface="Arial"/>
-              </a:rPr>
-              <a:t>Per-buyer limits and atomic stock holds</a:t>
-            </a:r>
-          </a:p>
-        </p:txBody>
-      </p:sp>
-      <p:sp>
-        <p:nvSpPr>
-          <p:cNvPr id="211" name="trust-rule-3">
-            <a:extLst>
-              <a:ext uri="{FF2B5EF4-FFF2-40B4-BE49-F238E27FC236}">
-                <a16:creationId xmlns:a16="http://schemas.microsoft.com/office/drawing/2014/main" id="{6DA57FBA-32BC-4A96-93AE-1893C01314E8}"/>
-              </a:ext>
-            </a:extLst>
-          </p:cNvPr>
-          <p:cNvSpPr>
-            <a:spLocks noGrp="1"/>
-          </p:cNvSpPr>
-          <p:nvPr/>
-        </p:nvSpPr>
-        <p:spPr>
-          <a:xfrm>
-            <a:off x="523875" y="3248025"/>
-            <a:ext cx="8048625" cy="9525"/>
-          </a:xfrm>
-          <a:prstGeom prst="rect">
-            <a:avLst/>
-          </a:prstGeom>
-          <a:solidFill>
-            <a:srgbClr val="D8D8D8"/>
-          </a:solidFill>
-          <a:ln w="0">
-            <a:noFill/>
-          </a:ln>
-        </p:spPr>
-      </p:sp>
-      <p:sp>
-        <p:nvSpPr>
-          <p:cNvPr id="212" name="trust-label-4">
-            <a:extLst>
-              <a:ext uri="{FF2B5EF4-FFF2-40B4-BE49-F238E27FC236}">
-                <a16:creationId xmlns:a16="http://schemas.microsoft.com/office/drawing/2014/main" id="{4DA1622D-B8DF-40A3-B2A6-CAEC0CD79027}"/>
-              </a:ext>
-            </a:extLst>
-          </p:cNvPr>
-          <p:cNvSpPr>
-            <a:spLocks noGrp="1"/>
-          </p:cNvSpPr>
-          <p:nvPr/>
-        </p:nvSpPr>
-        <p:spPr>
-          <a:xfrm>
-            <a:off x="523875" y="3305175"/>
-            <a:ext cx="2714625" cy="285750"/>
-          </a:xfrm>
-          <a:prstGeom prst="rect">
-            <a:avLst/>
-          </a:prstGeom>
-          <a:noFill/>
-          <a:ln w="0">
-            <a:noFill/>
-          </a:ln>
-        </p:spPr>
-        <p:txBody>
-          <a:bodyPr wrap="square" lIns="0" tIns="0" rIns="0" bIns="0" anchor="t">
-            <a:normAutofit fontScale="100000"/>
-          </a:bodyPr>
-          <a:lstStyle/>
-          <a:p>
-            <a:pPr>
-              <a:defRPr sz="1500" b="1">
-                <a:solidFill>
-                  <a:srgbClr val="161616"/>
-                </a:solidFill>
-                <a:latin typeface="Arial"/>
-                <a:ea typeface="Arial"/>
-                <a:cs typeface="Arial"/>
-              </a:defRPr>
-            </a:pPr>
-            <a:r>
-              <a:rPr sz="1500" b="1">
-                <a:solidFill>
-                  <a:srgbClr val="161616"/>
-                </a:solidFill>
-                <a:latin typeface="Arial"/>
-                <a:ea typeface="Arial"/>
-                <a:cs typeface="Arial"/>
-              </a:rPr>
-              <a:t>Seller record</a:t>
-            </a:r>
-          </a:p>
-        </p:txBody>
-      </p:sp>
-      <p:sp>
-        <p:nvSpPr>
-          <p:cNvPr id="213" name="trust-desc-4">
-            <a:extLst>
-              <a:ext uri="{FF2B5EF4-FFF2-40B4-BE49-F238E27FC236}">
-                <a16:creationId xmlns:a16="http://schemas.microsoft.com/office/drawing/2014/main" id="{4FA94DED-7A0B-410F-8873-6BBCB4B6A911}"/>
-              </a:ext>
-            </a:extLst>
-          </p:cNvPr>
-          <p:cNvSpPr>
-            <a:spLocks noGrp="1"/>
-          </p:cNvSpPr>
-          <p:nvPr/>
-        </p:nvSpPr>
-        <p:spPr>
-          <a:xfrm>
-            <a:off x="3324225" y="3305175"/>
-            <a:ext cx="5238750" cy="400050"/>
-          </a:xfrm>
-          <a:prstGeom prst="rect">
-            <a:avLst/>
-          </a:prstGeom>
-          <a:noFill/>
-          <a:ln w="0">
-            <a:noFill/>
-          </a:ln>
-        </p:spPr>
-        <p:txBody>
-          <a:bodyPr wrap="square" lIns="0" tIns="0" rIns="0" bIns="0" anchor="t">
-            <a:normAutofit fontScale="100000"/>
-          </a:bodyPr>
-          <a:lstStyle/>
-          <a:p>
-            <a:pPr>
-              <a:defRPr sz="1350" b="0">
-                <a:solidFill>
-                  <a:srgbClr val="444444"/>
-                </a:solidFill>
-                <a:latin typeface="Arial"/>
-                <a:ea typeface="Arial"/>
-                <a:cs typeface="Arial"/>
-              </a:defRPr>
-            </a:pPr>
-            <a:r>
-              <a:rPr sz="1350" b="0">
-                <a:solidFill>
-                  <a:srgbClr val="444444"/>
-                </a:solidFill>
-                <a:latin typeface="Arial"/>
-                <a:ea typeface="Arial"/>
-                <a:cs typeface="Arial"/>
-              </a:rPr>
-              <a:t>Public record counts problems from signed receipts</a:t>
-            </a:r>
-          </a:p>
-        </p:txBody>
-      </p:sp>
-      <p:sp>
-        <p:nvSpPr>
-          <p:cNvPr id="214" name="trust-rule-4">
-            <a:extLst>
-              <a:ext uri="{FF2B5EF4-FFF2-40B4-BE49-F238E27FC236}">
-                <a16:creationId xmlns:a16="http://schemas.microsoft.com/office/drawing/2014/main" id="{BD9C8BD4-63D6-4B52-A903-DCCE1D91C5D8}"/>
-              </a:ext>
-            </a:extLst>
-          </p:cNvPr>
-          <p:cNvSpPr>
-            <a:spLocks noGrp="1"/>
-          </p:cNvSpPr>
-          <p:nvPr/>
-        </p:nvSpPr>
-        <p:spPr>
-          <a:xfrm>
-            <a:off x="523875" y="3724275"/>
-            <a:ext cx="8048625" cy="9525"/>
-          </a:xfrm>
-          <a:prstGeom prst="rect">
-            <a:avLst/>
-          </a:prstGeom>
-          <a:solidFill>
-            <a:srgbClr val="D8D8D8"/>
-          </a:solidFill>
-          <a:ln w="0">
-            <a:noFill/>
-          </a:ln>
-        </p:spPr>
-      </p:sp>
-      <p:sp>
-        <p:nvSpPr>
-          <p:cNvPr id="215" name="trust-label-5">
-            <a:extLst>
-              <a:ext uri="{FF2B5EF4-FFF2-40B4-BE49-F238E27FC236}">
-                <a16:creationId xmlns:a16="http://schemas.microsoft.com/office/drawing/2014/main" id="{7F7FC35F-157B-4123-B8F2-874FA6076F18}"/>
-              </a:ext>
-            </a:extLst>
-          </p:cNvPr>
-          <p:cNvSpPr>
-            <a:spLocks noGrp="1"/>
-          </p:cNvSpPr>
-          <p:nvPr/>
-        </p:nvSpPr>
-        <p:spPr>
-          <a:xfrm>
-            <a:off x="523875" y="3781425"/>
-            <a:ext cx="2714625" cy="285750"/>
-          </a:xfrm>
-          <a:prstGeom prst="rect">
-            <a:avLst/>
-          </a:prstGeom>
-          <a:noFill/>
-          <a:ln w="0">
-            <a:noFill/>
-          </a:ln>
-        </p:spPr>
-        <p:txBody>
-          <a:bodyPr wrap="square" lIns="0" tIns="0" rIns="0" bIns="0" anchor="t">
-            <a:normAutofit fontScale="100000"/>
-          </a:bodyPr>
-          <a:lstStyle/>
-          <a:p>
-            <a:pPr>
-              <a:defRPr sz="1500" b="1">
-                <a:solidFill>
-                  <a:srgbClr val="161616"/>
-                </a:solidFill>
-                <a:latin typeface="Arial"/>
-                <a:ea typeface="Arial"/>
-                <a:cs typeface="Arial"/>
-              </a:defRPr>
-            </a:pPr>
-            <a:r>
-              <a:rPr sz="1500" b="1">
-                <a:solidFill>
-                  <a:srgbClr val="161616"/>
-                </a:solidFill>
-                <a:latin typeface="Arial"/>
-                <a:ea typeface="Arial"/>
-                <a:cs typeface="Arial"/>
-              </a:rPr>
-              <a:t>App Check</a:t>
-            </a:r>
-          </a:p>
-        </p:txBody>
-      </p:sp>
-      <p:sp>
-        <p:nvSpPr>
-          <p:cNvPr id="216" name="trust-desc-5">
-            <a:extLst>
-              <a:ext uri="{FF2B5EF4-FFF2-40B4-BE49-F238E27FC236}">
-                <a16:creationId xmlns:a16="http://schemas.microsoft.com/office/drawing/2014/main" id="{2029E64E-53AE-495C-8A70-0255D58920E6}"/>
-              </a:ext>
-            </a:extLst>
-          </p:cNvPr>
-          <p:cNvSpPr>
-            <a:spLocks noGrp="1"/>
-          </p:cNvSpPr>
-          <p:nvPr/>
-        </p:nvSpPr>
-        <p:spPr>
-          <a:xfrm>
-            <a:off x="3324225" y="3781425"/>
-            <a:ext cx="5238750" cy="400050"/>
-          </a:xfrm>
-          <a:prstGeom prst="rect">
-            <a:avLst/>
-          </a:prstGeom>
-          <a:noFill/>
-          <a:ln w="0">
-            <a:noFill/>
-          </a:ln>
-        </p:spPr>
-        <p:txBody>
-          <a:bodyPr wrap="square" lIns="0" tIns="0" rIns="0" bIns="0" anchor="t">
-            <a:normAutofit fontScale="100000"/>
-          </a:bodyPr>
-          <a:lstStyle/>
-          <a:p>
-            <a:pPr>
-              <a:defRPr sz="1350" b="0">
-                <a:solidFill>
-                  <a:srgbClr val="444444"/>
-                </a:solidFill>
-                <a:latin typeface="Arial"/>
-                <a:ea typeface="Arial"/>
-                <a:cs typeface="Arial"/>
-              </a:defRPr>
-            </a:pPr>
-            <a:r>
-              <a:rPr sz="1350" b="0">
-                <a:solidFill>
-                  <a:srgbClr val="444444"/>
-                </a:solidFill>
-                <a:latin typeface="Arial"/>
-                <a:ea typeface="Arial"/>
-                <a:cs typeface="Arial"/>
-              </a:rPr>
-              <a:t>Checks every write; unverified browsers are rate-limited</a:t>
-            </a:r>
-          </a:p>
-        </p:txBody>
-      </p:sp>
-      <p:sp>
-        <p:nvSpPr>
-          <p:cNvPr id="217" name="trust-rule-5">
-            <a:extLst>
-              <a:ext uri="{FF2B5EF4-FFF2-40B4-BE49-F238E27FC236}">
-                <a16:creationId xmlns:a16="http://schemas.microsoft.com/office/drawing/2014/main" id="{6C65EBE2-8D16-4D24-BFD7-953FDFE208D6}"/>
-              </a:ext>
-            </a:extLst>
-          </p:cNvPr>
-          <p:cNvSpPr>
-            <a:spLocks noGrp="1"/>
-          </p:cNvSpPr>
-          <p:nvPr/>
-        </p:nvSpPr>
-        <p:spPr>
-          <a:xfrm>
-            <a:off x="523875" y="4200525"/>
-            <a:ext cx="8048625" cy="9525"/>
-          </a:xfrm>
-          <a:prstGeom prst="rect">
-            <a:avLst/>
-          </a:prstGeom>
-          <a:solidFill>
-            <a:srgbClr val="D8D8D8"/>
-          </a:solidFill>
-          <a:ln w="0">
-            <a:noFill/>
-          </a:ln>
-        </p:spPr>
-      </p:sp>
-      <p:sp>
-        <p:nvSpPr>
-          <p:cNvPr id="218" name="trust-label-6">
-            <a:extLst>
-              <a:ext uri="{FF2B5EF4-FFF2-40B4-BE49-F238E27FC236}">
-                <a16:creationId xmlns:a16="http://schemas.microsoft.com/office/drawing/2014/main" id="{ADEB4F0F-A210-41C3-8C88-79CE64E51AA9}"/>
-              </a:ext>
-            </a:extLst>
-          </p:cNvPr>
-          <p:cNvSpPr>
-            <a:spLocks noGrp="1"/>
-          </p:cNvSpPr>
-          <p:nvPr/>
-        </p:nvSpPr>
-        <p:spPr>
-          <a:xfrm>
-            <a:off x="523875" y="4257675"/>
-            <a:ext cx="2714625" cy="285750"/>
-          </a:xfrm>
-          <a:prstGeom prst="rect">
-            <a:avLst/>
-          </a:prstGeom>
-          <a:noFill/>
-          <a:ln w="0">
-            <a:noFill/>
-          </a:ln>
-        </p:spPr>
-        <p:txBody>
-          <a:bodyPr wrap="square" lIns="0" tIns="0" rIns="0" bIns="0" anchor="t">
-            <a:normAutofit fontScale="100000"/>
-          </a:bodyPr>
-          <a:lstStyle/>
-          <a:p>
-            <a:pPr>
-              <a:defRPr sz="1500" b="1">
-                <a:solidFill>
-                  <a:srgbClr val="161616"/>
-                </a:solidFill>
-                <a:latin typeface="Arial"/>
-                <a:ea typeface="Arial"/>
-                <a:cs typeface="Arial"/>
-              </a:defRPr>
-            </a:pPr>
-            <a:r>
-              <a:rPr sz="1500" b="1">
-                <a:solidFill>
-                  <a:srgbClr val="161616"/>
-                </a:solidFill>
-                <a:latin typeface="Arial"/>
-                <a:ea typeface="Arial"/>
-                <a:cs typeface="Arial"/>
-              </a:rPr>
-              <a:t>Demo payments</a:t>
-            </a:r>
-          </a:p>
-        </p:txBody>
-      </p:sp>
-      <p:sp>
-        <p:nvSpPr>
-          <p:cNvPr id="219" name="trust-desc-6">
-            <a:extLst>
-              <a:ext uri="{FF2B5EF4-FFF2-40B4-BE49-F238E27FC236}">
-                <a16:creationId xmlns:a16="http://schemas.microsoft.com/office/drawing/2014/main" id="{D15180C2-1A42-424E-96A1-79006A17B70A}"/>
-              </a:ext>
-            </a:extLst>
-          </p:cNvPr>
-          <p:cNvSpPr>
-            <a:spLocks noGrp="1"/>
-          </p:cNvSpPr>
-          <p:nvPr/>
-        </p:nvSpPr>
-        <p:spPr>
-          <a:xfrm>
-            <a:off x="3324225" y="4257675"/>
-            <a:ext cx="5238750" cy="400050"/>
-          </a:xfrm>
-          <a:prstGeom prst="rect">
-            <a:avLst/>
-          </a:prstGeom>
-          <a:noFill/>
-          <a:ln w="0">
-            <a:noFill/>
-          </a:ln>
-        </p:spPr>
-        <p:txBody>
-          <a:bodyPr wrap="square" lIns="0" tIns="0" rIns="0" bIns="0" anchor="t">
-            <a:normAutofit fontScale="100000"/>
-          </a:bodyPr>
-          <a:lstStyle/>
-          <a:p>
-            <a:pPr>
-              <a:defRPr sz="1350" b="0">
-                <a:solidFill>
-                  <a:srgbClr val="444444"/>
-                </a:solidFill>
-                <a:latin typeface="Arial"/>
-                <a:ea typeface="Arial"/>
-                <a:cs typeface="Arial"/>
-              </a:defRPr>
-            </a:pPr>
-            <a:r>
-              <a:rPr sz="1350" b="0">
-                <a:solidFill>
-                  <a:srgbClr val="444444"/>
-                </a:solidFill>
-                <a:latin typeface="Arial"/>
-                <a:ea typeface="Arial"/>
-                <a:cs typeface="Arial"/>
-              </a:rPr>
-              <a:t>Clearly tagged test mode; no real money moves</a:t>
-            </a:r>
-          </a:p>
-        </p:txBody>
-      </p:sp>
-    </p:spTree>
-  </p:cSld>
-  <p:clrMapOvr>
-    <a:masterClrMapping/>
-  </p:clrMapOvr>
 </p:sld>
 </file>
 
@@ -17563,7 +16851,7 @@
 </file>
 
 <file path=ppt/slides/slide9.xml><?xml version="1.0" encoding="utf-8"?>
-<p:sld xmlns:p="http://schemas.openxmlformats.org/presentationml/2006/main">
+<p:sld xmlns:a="http://schemas.openxmlformats.org/drawingml/2006/main" xmlns:p="http://schemas.openxmlformats.org/presentationml/2006/main" xmlns:r="http://schemas.openxmlformats.org/officeDocument/2006/relationships">
   <p:cSld>
     <p:spTree>
       <p:nvGrpSpPr>
@@ -17571,101 +16859,99 @@
         <p:cNvGrpSpPr/>
         <p:nvPr/>
       </p:nvGrpSpPr>
-      <p:grpSpPr>
-        <a:xfrm xmlns:a="http://schemas.openxmlformats.org/drawingml/2006/main"/>
-      </p:grpSpPr>
+      <p:grpSpPr/>
       <p:pic>
         <p:nvPicPr>
-          <p:cNvPr id="135" name="Google Shape;124;p22"/>
+          <p:cNvPr id="139" name="Google Shape;116;p21"/>
           <p:cNvPicPr>
-            <a:picLocks xmlns:a="http://schemas.openxmlformats.org/drawingml/2006/main" noChangeAspect="1"/>
+            <a:picLocks noChangeAspect="1"/>
           </p:cNvPicPr>
           <p:nvPr/>
         </p:nvPicPr>
         <p:blipFill rotWithShape="1">
-          <a:blip xmlns:r="http://schemas.openxmlformats.org/officeDocument/2006/relationships" xmlns:a="http://schemas.openxmlformats.org/drawingml/2006/main" r:embed="R3ca10b6ae21e4883">
+          <a:blip r:embed="rId2">
             <a:alphaModFix/>
           </a:blip>
-          <a:srcRect xmlns:a="http://schemas.openxmlformats.org/drawingml/2006/main" l="0" t="0" r="0" b="98001"/>
-          <a:stretch xmlns:a="http://schemas.openxmlformats.org/drawingml/2006/main"/>
+          <a:srcRect l="0" t="0" r="0" b="98001"/>
+          <a:stretch/>
         </p:blipFill>
         <p:spPr>
-          <a:xfrm xmlns:a="http://schemas.openxmlformats.org/drawingml/2006/main">
+          <a:xfrm>
             <a:off x="0" y="5093562"/>
             <a:ext cx="9144000" cy="54275"/>
           </a:xfrm>
-          <a:prstGeom xmlns:a="http://schemas.openxmlformats.org/drawingml/2006/main" prst="rect">
-            <a:avLst/>
-          </a:prstGeom>
-          <a:ln xmlns:a="http://schemas.openxmlformats.org/drawingml/2006/main">
+          <a:prstGeom prst="rect">
+            <a:avLst/>
+          </a:prstGeom>
+          <a:ln>
             <a:noFill/>
           </a:ln>
         </p:spPr>
       </p:pic>
       <p:pic>
         <p:nvPicPr>
-          <p:cNvPr id="136" name="Google Shape;125;p22"/>
+          <p:cNvPr id="140" name="Google Shape;117;p21"/>
           <p:cNvPicPr>
-            <a:picLocks xmlns:a="http://schemas.openxmlformats.org/drawingml/2006/main" noChangeAspect="1"/>
+            <a:picLocks noChangeAspect="1"/>
           </p:cNvPicPr>
           <p:nvPr/>
         </p:nvPicPr>
         <p:blipFill>
-          <a:blip xmlns:r="http://schemas.openxmlformats.org/officeDocument/2006/relationships" xmlns:a="http://schemas.openxmlformats.org/drawingml/2006/main" r:embed="R212c670779284802">
+          <a:blip r:embed="rId3">
             <a:alphaModFix/>
           </a:blip>
-          <a:stretch xmlns:a="http://schemas.openxmlformats.org/drawingml/2006/main">
+          <a:stretch>
             <a:fillRect l="0" t="0" r="0" b="0"/>
           </a:stretch>
         </p:blipFill>
         <p:spPr>
-          <a:xfrm xmlns:a="http://schemas.openxmlformats.org/drawingml/2006/main">
+          <a:xfrm>
             <a:off x="0" y="1"/>
             <a:ext cx="9144000" cy="507359"/>
           </a:xfrm>
-          <a:prstGeom xmlns:a="http://schemas.openxmlformats.org/drawingml/2006/main" prst="rect">
-            <a:avLst/>
-          </a:prstGeom>
-          <a:ln xmlns:a="http://schemas.openxmlformats.org/drawingml/2006/main">
+          <a:prstGeom prst="rect">
+            <a:avLst/>
+          </a:prstGeom>
+          <a:ln>
             <a:noFill/>
           </a:ln>
         </p:spPr>
       </p:pic>
       <p:sp>
         <p:nvSpPr>
-          <p:cNvPr id="126" name="Google Shape;126;p22">
-            <a:extLst xmlns:a="http://schemas.openxmlformats.org/drawingml/2006/main">
-              <a:ext uri="{FF2B5EF4-FFF2-40B4-BE49-F238E27FC236}">
-                <a16:creationId xmlns:a16="http://schemas.microsoft.com/office/drawing/2014/main" id="{4DD127D4-39C9-4B0B-835B-9667C17AD6BD}"/>
-              </a:ext>
-            </a:extLst>
-          </p:cNvPr>
-          <p:cNvSpPr>
-            <a:spLocks xmlns:a="http://schemas.openxmlformats.org/drawingml/2006/main" noGrp="1"/>
-          </p:cNvSpPr>
-          <p:nvPr/>
-        </p:nvSpPr>
-        <p:spPr>
-          <a:xfrm xmlns:a="http://schemas.openxmlformats.org/drawingml/2006/main">
+          <p:cNvPr id="118" name="Google Shape;118;p21">
+            <a:extLst>
+              <a:ext uri="{FF2B5EF4-FFF2-40B4-BE49-F238E27FC236}">
+                <a16:creationId xmlns:a16="http://schemas.microsoft.com/office/drawing/2014/main" id="{90FAB6E9-1B1E-4AC3-8107-7514F14484D4}"/>
+              </a:ext>
+            </a:extLst>
+          </p:cNvPr>
+          <p:cNvSpPr>
+            <a:spLocks noGrp="1"/>
+          </p:cNvSpPr>
+          <p:nvPr/>
+        </p:nvSpPr>
+        <p:spPr>
+          <a:xfrm>
             <a:off x="-29250" y="5071875"/>
             <a:ext cx="9173400" cy="97800"/>
           </a:xfrm>
-          <a:prstGeom xmlns:a="http://schemas.openxmlformats.org/drawingml/2006/main" prst="rect">
-            <a:avLst/>
-          </a:prstGeom>
-          <a:solidFill xmlns:a="http://schemas.openxmlformats.org/drawingml/2006/main">
+          <a:prstGeom prst="rect">
+            <a:avLst/>
+          </a:prstGeom>
+          <a:solidFill>
             <a:schemeClr val="dk1"/>
           </a:solidFill>
-          <a:ln xmlns:a="http://schemas.openxmlformats.org/drawingml/2006/main">
-            <a:noFill/>
-          </a:ln>
-        </p:spPr>
-        <p:txBody>
-          <a:bodyPr xmlns:a="http://schemas.openxmlformats.org/drawingml/2006/main" spcFirstLastPara="1" wrap="square" lIns="91425" tIns="91425" rIns="91425" bIns="91425" anchor="ctr">
+          <a:ln>
+            <a:noFill/>
+          </a:ln>
+        </p:spPr>
+        <p:txBody>
+          <a:bodyPr spcFirstLastPara="1" wrap="square" lIns="91425" tIns="91425" rIns="91425" bIns="91425" anchor="ctr">
             <a:noAutofit/>
           </a:bodyPr>
-          <a:lstStyle xmlns:a="http://schemas.openxmlformats.org/drawingml/2006/main"/>
-          <a:p xmlns:a="http://schemas.openxmlformats.org/drawingml/2006/main">
+          <a:lstStyle/>
+          <a:p>
             <a:pPr marL="0" lvl="0" indent="0" algn="ctr">
               <a:spcBef>
                 <a:spcPts val="0"/>
@@ -17684,37 +16970,37 @@
       </p:sp>
       <p:sp>
         <p:nvSpPr>
-          <p:cNvPr id="127" name="Google Shape;127;p22">
-            <a:extLst xmlns:a="http://schemas.openxmlformats.org/drawingml/2006/main">
-              <a:ext uri="{FF2B5EF4-FFF2-40B4-BE49-F238E27FC236}">
-                <a16:creationId xmlns:a16="http://schemas.microsoft.com/office/drawing/2014/main" id="{D6477BCC-1CF9-43DA-9A50-66B6AB8F6633}"/>
-              </a:ext>
-            </a:extLst>
-          </p:cNvPr>
-          <p:cNvSpPr>
-            <a:spLocks xmlns:a="http://schemas.openxmlformats.org/drawingml/2006/main" noGrp="1"/>
-          </p:cNvSpPr>
-          <p:nvPr/>
-        </p:nvSpPr>
-        <p:spPr>
-          <a:xfrm xmlns:a="http://schemas.openxmlformats.org/drawingml/2006/main">
+          <p:cNvPr id="119" name="Google Shape;119;p21">
+            <a:extLst>
+              <a:ext uri="{FF2B5EF4-FFF2-40B4-BE49-F238E27FC236}">
+                <a16:creationId xmlns:a16="http://schemas.microsoft.com/office/drawing/2014/main" id="{70EF1269-C4C4-4ABB-BEEE-D0867E087EA7}"/>
+              </a:ext>
+            </a:extLst>
+          </p:cNvPr>
+          <p:cNvSpPr>
+            <a:spLocks noGrp="1"/>
+          </p:cNvSpPr>
+          <p:nvPr/>
+        </p:nvSpPr>
+        <p:spPr>
+          <a:xfrm>
             <a:off x="266700" y="676275"/>
             <a:ext cx="8524875" cy="542925"/>
           </a:xfrm>
-          <a:prstGeom xmlns:a="http://schemas.openxmlformats.org/drawingml/2006/main" prst="rect">
-            <a:avLst/>
-          </a:prstGeom>
-          <a:noFill xmlns:a="http://schemas.openxmlformats.org/drawingml/2006/main"/>
-          <a:ln xmlns:a="http://schemas.openxmlformats.org/drawingml/2006/main">
-            <a:noFill/>
-          </a:ln>
-        </p:spPr>
-        <p:txBody>
-          <a:bodyPr xmlns:a="http://schemas.openxmlformats.org/drawingml/2006/main" spcFirstLastPara="1" wrap="square" lIns="0" tIns="0" rIns="0" bIns="0" anchor="t">
+          <a:prstGeom prst="rect">
+            <a:avLst/>
+          </a:prstGeom>
+          <a:noFill/>
+          <a:ln>
+            <a:noFill/>
+          </a:ln>
+        </p:spPr>
+        <p:txBody>
+          <a:bodyPr spcFirstLastPara="1" wrap="square" lIns="0" tIns="0" rIns="0" bIns="0" anchor="t">
             <a:normAutofit fontScale="100000"/>
           </a:bodyPr>
-          <a:lstStyle xmlns:a="http://schemas.openxmlformats.org/drawingml/2006/main"/>
-          <a:p xmlns:a="http://schemas.openxmlformats.org/drawingml/2006/main">
+          <a:lstStyle/>
+          <a:p>
             <a:pPr marL="0" lvl="0" indent="0" algn="l">
               <a:spcBef>
                 <a:spcPts val="0"/>
@@ -17741,7 +17027,7 @@
                 <a:ea typeface="Arial"/>
                 <a:cs typeface="Arial"/>
               </a:rPr>
-              <a:t>Prototype cost evidence</a:t>
+              <a:t>Trust built in: fraud prevention</a:t>
             </a:r>
             <a:endParaRPr sz="1600">
               <a:latin typeface="Google Sans Flex Medium"/>
@@ -17753,41 +17039,41 @@
       </p:sp>
       <p:sp>
         <p:nvSpPr>
-          <p:cNvPr id="130" name="cost-big">
-            <a:extLst xmlns:a="http://schemas.openxmlformats.org/drawingml/2006/main">
-              <a:ext uri="{FF2B5EF4-FFF2-40B4-BE49-F238E27FC236}">
-                <a16:creationId xmlns:a16="http://schemas.microsoft.com/office/drawing/2014/main" id="{A4448724-A993-44AB-BC5F-589E58BCAD30}"/>
-              </a:ext>
-            </a:extLst>
-          </p:cNvPr>
-          <p:cNvSpPr>
-            <a:spLocks xmlns:a="http://schemas.openxmlformats.org/drawingml/2006/main" noGrp="1"/>
-          </p:cNvSpPr>
-          <p:nvPr/>
-        </p:nvSpPr>
-        <p:spPr>
-          <a:xfrm xmlns:a="http://schemas.openxmlformats.org/drawingml/2006/main">
-            <a:off x="523875" y="1524000"/>
-            <a:ext cx="3619500" cy="781050"/>
-          </a:xfrm>
-          <a:prstGeom xmlns:a="http://schemas.openxmlformats.org/drawingml/2006/main" prst="rect">
-            <a:avLst/>
-          </a:prstGeom>
-          <a:noFill xmlns:a="http://schemas.openxmlformats.org/drawingml/2006/main"/>
-          <a:ln xmlns:a="http://schemas.openxmlformats.org/drawingml/2006/main" w="0">
-            <a:noFill/>
-          </a:ln>
-        </p:spPr>
-        <p:txBody>
-          <a:bodyPr xmlns:a="http://schemas.openxmlformats.org/drawingml/2006/main" wrap="square" lIns="0" tIns="0" rIns="0" bIns="0" anchor="t">
+          <p:cNvPr id="200" name="trust-label-0">
+            <a:extLst>
+              <a:ext uri="{FF2B5EF4-FFF2-40B4-BE49-F238E27FC236}">
+                <a16:creationId xmlns:a16="http://schemas.microsoft.com/office/drawing/2014/main" id="{FD321D03-A498-4D36-A747-32F9961F2285}"/>
+              </a:ext>
+            </a:extLst>
+          </p:cNvPr>
+          <p:cNvSpPr>
+            <a:spLocks noGrp="1"/>
+          </p:cNvSpPr>
+          <p:nvPr/>
+        </p:nvSpPr>
+        <p:spPr>
+          <a:xfrm>
+            <a:off x="523875" y="1400175"/>
+            <a:ext cx="2714625" cy="285750"/>
+          </a:xfrm>
+          <a:prstGeom prst="rect">
+            <a:avLst/>
+          </a:prstGeom>
+          <a:noFill/>
+          <a:ln w="0">
+            <a:noFill/>
+          </a:ln>
+        </p:spPr>
+        <p:txBody>
+          <a:bodyPr wrap="square" lIns="0" tIns="0" rIns="0" bIns="0" anchor="t">
             <a:normAutofit fontScale="100000"/>
           </a:bodyPr>
-          <a:lstStyle xmlns:a="http://schemas.openxmlformats.org/drawingml/2006/main"/>
-          <a:p xmlns:a="http://schemas.openxmlformats.org/drawingml/2006/main">
+          <a:lstStyle/>
+          <a:p>
             <a:pPr>
-              <a:defRPr sz="4350" b="1">
-                <a:solidFill>
-                  <a:srgbClr val="1A73E8"/>
+              <a:defRPr sz="1500" b="1">
+                <a:solidFill>
+                  <a:srgbClr val="161616"/>
                 </a:solidFill>
                 <a:latin typeface="Arial"/>
                 <a:ea typeface="Arial"/>
@@ -17795,56 +17081,56 @@
               </a:defRPr>
             </a:pPr>
             <a:r>
-              <a:rPr sz="4350" b="1">
-                <a:solidFill>
-                  <a:srgbClr val="1A73E8"/>
+              <a:rPr sz="1500" b="1">
+                <a:solidFill>
+                  <a:srgbClr val="161616"/>
                 </a:solidFill>
                 <a:latin typeface="Arial"/>
                 <a:ea typeface="Arial"/>
                 <a:cs typeface="Arial"/>
               </a:rPr>
-              <a:t>$1.10</a:t>
+              <a:t>Pickup/booking pass</a:t>
             </a:r>
           </a:p>
         </p:txBody>
       </p:sp>
       <p:sp>
         <p:nvSpPr>
-          <p:cNvPr id="131" name="cost-desc">
-            <a:extLst xmlns:a="http://schemas.openxmlformats.org/drawingml/2006/main">
-              <a:ext uri="{FF2B5EF4-FFF2-40B4-BE49-F238E27FC236}">
-                <a16:creationId xmlns:a16="http://schemas.microsoft.com/office/drawing/2014/main" id="{3A8C5B21-D39A-4D74-BA4C-8778449E8312}"/>
-              </a:ext>
-            </a:extLst>
-          </p:cNvPr>
-          <p:cNvSpPr>
-            <a:spLocks xmlns:a="http://schemas.openxmlformats.org/drawingml/2006/main" noGrp="1"/>
-          </p:cNvSpPr>
-          <p:nvPr/>
-        </p:nvSpPr>
-        <p:spPr>
-          <a:xfrm xmlns:a="http://schemas.openxmlformats.org/drawingml/2006/main">
-            <a:off x="523875" y="2333625"/>
-            <a:ext cx="5905500" cy="638175"/>
-          </a:xfrm>
-          <a:prstGeom xmlns:a="http://schemas.openxmlformats.org/drawingml/2006/main" prst="rect">
-            <a:avLst/>
-          </a:prstGeom>
-          <a:noFill xmlns:a="http://schemas.openxmlformats.org/drawingml/2006/main"/>
-          <a:ln xmlns:a="http://schemas.openxmlformats.org/drawingml/2006/main" w="0">
-            <a:noFill/>
-          </a:ln>
-        </p:spPr>
-        <p:txBody>
-          <a:bodyPr xmlns:a="http://schemas.openxmlformats.org/drawingml/2006/main" wrap="square" lIns="0" tIns="0" rIns="0" bIns="0" anchor="t">
+          <p:cNvPr id="201" name="trust-desc-0">
+            <a:extLst>
+              <a:ext uri="{FF2B5EF4-FFF2-40B4-BE49-F238E27FC236}">
+                <a16:creationId xmlns:a16="http://schemas.microsoft.com/office/drawing/2014/main" id="{D75CB656-661E-4542-A438-C941DA210235}"/>
+              </a:ext>
+            </a:extLst>
+          </p:cNvPr>
+          <p:cNvSpPr>
+            <a:spLocks noGrp="1"/>
+          </p:cNvSpPr>
+          <p:nvPr/>
+        </p:nvSpPr>
+        <p:spPr>
+          <a:xfrm>
+            <a:off x="3324225" y="1400175"/>
+            <a:ext cx="5238750" cy="400050"/>
+          </a:xfrm>
+          <a:prstGeom prst="rect">
+            <a:avLst/>
+          </a:prstGeom>
+          <a:noFill/>
+          <a:ln w="0">
+            <a:noFill/>
+          </a:ln>
+        </p:spPr>
+        <p:txBody>
+          <a:bodyPr wrap="square" lIns="0" tIns="0" rIns="0" bIns="0" anchor="t">
             <a:normAutofit fontScale="100000"/>
           </a:bodyPr>
-          <a:lstStyle xmlns:a="http://schemas.openxmlformats.org/drawingml/2006/main"/>
-          <a:p xmlns:a="http://schemas.openxmlformats.org/drawingml/2006/main">
+          <a:lstStyle/>
+          <a:p>
             <a:pPr>
-              <a:defRPr sz="1725" b="0">
-                <a:solidFill>
-                  <a:srgbClr val="161616"/>
+              <a:defRPr sz="1350" b="0">
+                <a:solidFill>
+                  <a:srgbClr val="444444"/>
                 </a:solidFill>
                 <a:latin typeface="Arial"/>
                 <a:ea typeface="Arial"/>
@@ -17852,84 +17138,84 @@
               </a:defRPr>
             </a:pPr>
             <a:r>
-              <a:rPr sz="1725" b="0">
-                <a:solidFill>
-                  <a:srgbClr val="161616"/>
+              <a:rPr sz="1350" b="0">
+                <a:solidFill>
+                  <a:srgbClr val="444444"/>
                 </a:solidFill>
                 <a:latin typeface="Arial"/>
                 <a:ea typeface="Arial"/>
                 <a:cs typeface="Arial"/>
               </a:rPr>
-              <a:t>Estimated Gemini token cost for the full local benchmark</a:t>
+              <a:t>Second scan refused; the seller is matched by account</a:t>
             </a:r>
           </a:p>
         </p:txBody>
       </p:sp>
       <p:sp>
         <p:nvSpPr>
-          <p:cNvPr id="132" name="cost-rule">
-            <a:extLst xmlns:a="http://schemas.openxmlformats.org/drawingml/2006/main">
-              <a:ext uri="{FF2B5EF4-FFF2-40B4-BE49-F238E27FC236}">
-                <a16:creationId xmlns:a16="http://schemas.microsoft.com/office/drawing/2014/main" id="{860F91EC-8300-43C6-AFDA-B11307D8BAA0}"/>
-              </a:ext>
-            </a:extLst>
-          </p:cNvPr>
-          <p:cNvSpPr>
-            <a:spLocks xmlns:a="http://schemas.openxmlformats.org/drawingml/2006/main" noGrp="1"/>
-          </p:cNvSpPr>
-          <p:nvPr/>
-        </p:nvSpPr>
-        <p:spPr>
-          <a:xfrm xmlns:a="http://schemas.openxmlformats.org/drawingml/2006/main">
-            <a:off x="523875" y="3181350"/>
-            <a:ext cx="8048625" cy="19050"/>
-          </a:xfrm>
-          <a:prstGeom xmlns:a="http://schemas.openxmlformats.org/drawingml/2006/main" prst="rect">
-            <a:avLst/>
-          </a:prstGeom>
-          <a:solidFill xmlns:a="http://schemas.openxmlformats.org/drawingml/2006/main">
-            <a:srgbClr val="B9B9B9"/>
+          <p:cNvPr id="202" name="trust-rule-0">
+            <a:extLst>
+              <a:ext uri="{FF2B5EF4-FFF2-40B4-BE49-F238E27FC236}">
+                <a16:creationId xmlns:a16="http://schemas.microsoft.com/office/drawing/2014/main" id="{FC78AC28-F000-4B80-B03D-BB2D9F6AC8B7}"/>
+              </a:ext>
+            </a:extLst>
+          </p:cNvPr>
+          <p:cNvSpPr>
+            <a:spLocks noGrp="1"/>
+          </p:cNvSpPr>
+          <p:nvPr/>
+        </p:nvSpPr>
+        <p:spPr>
+          <a:xfrm>
+            <a:off x="523875" y="1819275"/>
+            <a:ext cx="8048625" cy="9525"/>
+          </a:xfrm>
+          <a:prstGeom prst="rect">
+            <a:avLst/>
+          </a:prstGeom>
+          <a:solidFill>
+            <a:srgbClr val="D8D8D8"/>
           </a:solidFill>
-          <a:ln xmlns:a="http://schemas.openxmlformats.org/drawingml/2006/main" w="0">
-            <a:noFill/>
-          </a:ln>
-        </p:spPr>
-      </p:sp>
-      <p:sp>
-        <p:nvSpPr>
-          <p:cNvPr id="133" name="cost-calls">
-            <a:extLst xmlns:a="http://schemas.openxmlformats.org/drawingml/2006/main">
-              <a:ext uri="{FF2B5EF4-FFF2-40B4-BE49-F238E27FC236}">
-                <a16:creationId xmlns:a16="http://schemas.microsoft.com/office/drawing/2014/main" id="{622342BB-180E-4E3E-80D2-193ACD547C15}"/>
-              </a:ext>
-            </a:extLst>
-          </p:cNvPr>
-          <p:cNvSpPr>
-            <a:spLocks xmlns:a="http://schemas.openxmlformats.org/drawingml/2006/main" noGrp="1"/>
-          </p:cNvSpPr>
-          <p:nvPr/>
-        </p:nvSpPr>
-        <p:spPr>
-          <a:xfrm xmlns:a="http://schemas.openxmlformats.org/drawingml/2006/main">
-            <a:off x="523875" y="3343275"/>
-            <a:ext cx="7715250" cy="314325"/>
-          </a:xfrm>
-          <a:prstGeom xmlns:a="http://schemas.openxmlformats.org/drawingml/2006/main" prst="rect">
-            <a:avLst/>
-          </a:prstGeom>
-          <a:noFill xmlns:a="http://schemas.openxmlformats.org/drawingml/2006/main"/>
-          <a:ln xmlns:a="http://schemas.openxmlformats.org/drawingml/2006/main" w="0">
-            <a:noFill/>
-          </a:ln>
-        </p:spPr>
-        <p:txBody>
-          <a:bodyPr xmlns:a="http://schemas.openxmlformats.org/drawingml/2006/main" wrap="square" lIns="0" tIns="0" rIns="0" bIns="0" anchor="t">
+          <a:ln w="0">
+            <a:noFill/>
+          </a:ln>
+        </p:spPr>
+      </p:sp>
+      <p:sp>
+        <p:nvSpPr>
+          <p:cNvPr id="203" name="trust-label-1">
+            <a:extLst>
+              <a:ext uri="{FF2B5EF4-FFF2-40B4-BE49-F238E27FC236}">
+                <a16:creationId xmlns:a16="http://schemas.microsoft.com/office/drawing/2014/main" id="{306D714D-3713-4E36-99CE-710E4EA69727}"/>
+              </a:ext>
+            </a:extLst>
+          </p:cNvPr>
+          <p:cNvSpPr>
+            <a:spLocks noGrp="1"/>
+          </p:cNvSpPr>
+          <p:nvPr/>
+        </p:nvSpPr>
+        <p:spPr>
+          <a:xfrm>
+            <a:off x="523875" y="1876425"/>
+            <a:ext cx="2714625" cy="285750"/>
+          </a:xfrm>
+          <a:prstGeom prst="rect">
+            <a:avLst/>
+          </a:prstGeom>
+          <a:noFill/>
+          <a:ln w="0">
+            <a:noFill/>
+          </a:ln>
+        </p:spPr>
+        <p:txBody>
+          <a:bodyPr wrap="square" lIns="0" tIns="0" rIns="0" bIns="0" anchor="t">
             <a:normAutofit fontScale="100000"/>
           </a:bodyPr>
-          <a:lstStyle xmlns:a="http://schemas.openxmlformats.org/drawingml/2006/main"/>
-          <a:p xmlns:a="http://schemas.openxmlformats.org/drawingml/2006/main">
+          <a:lstStyle/>
+          <a:p>
             <a:pPr>
-              <a:defRPr sz="1725" b="1">
+              <a:defRPr sz="1500" b="1">
                 <a:solidFill>
                   <a:srgbClr val="161616"/>
                 </a:solidFill>
@@ -17939,7 +17225,7 @@
               </a:defRPr>
             </a:pPr>
             <a:r>
-              <a:rPr sz="1725" b="1">
+              <a:rPr sz="1500" b="1">
                 <a:solidFill>
                   <a:srgbClr val="161616"/>
                 </a:solidFill>
@@ -17947,44 +17233,44 @@
                 <a:ea typeface="Arial"/>
                 <a:cs typeface="Arial"/>
               </a:rPr>
-              <a:t>1,402 Gemini calls</a:t>
+              <a:t>Signed receipts</a:t>
             </a:r>
           </a:p>
         </p:txBody>
       </p:sp>
       <p:sp>
         <p:nvSpPr>
-          <p:cNvPr id="134" name="cost-caveat">
-            <a:extLst xmlns:a="http://schemas.openxmlformats.org/drawingml/2006/main">
-              <a:ext uri="{FF2B5EF4-FFF2-40B4-BE49-F238E27FC236}">
-                <a16:creationId xmlns:a16="http://schemas.microsoft.com/office/drawing/2014/main" id="{09BCE2C3-8237-4CD3-B2FB-3D6B51E118A7}"/>
-              </a:ext>
-            </a:extLst>
-          </p:cNvPr>
-          <p:cNvSpPr>
-            <a:spLocks xmlns:a="http://schemas.openxmlformats.org/drawingml/2006/main" noGrp="1"/>
-          </p:cNvSpPr>
-          <p:nvPr/>
-        </p:nvSpPr>
-        <p:spPr>
-          <a:xfrm xmlns:a="http://schemas.openxmlformats.org/drawingml/2006/main">
-            <a:off x="523875" y="3781425"/>
-            <a:ext cx="7905750" cy="847725"/>
-          </a:xfrm>
-          <a:prstGeom xmlns:a="http://schemas.openxmlformats.org/drawingml/2006/main" prst="rect">
-            <a:avLst/>
-          </a:prstGeom>
-          <a:noFill xmlns:a="http://schemas.openxmlformats.org/drawingml/2006/main"/>
-          <a:ln xmlns:a="http://schemas.openxmlformats.org/drawingml/2006/main" w="0">
-            <a:noFill/>
-          </a:ln>
-        </p:spPr>
-        <p:txBody>
-          <a:bodyPr xmlns:a="http://schemas.openxmlformats.org/drawingml/2006/main" wrap="square" lIns="0" tIns="0" rIns="0" bIns="0" anchor="t">
+          <p:cNvPr id="204" name="trust-desc-1">
+            <a:extLst>
+              <a:ext uri="{FF2B5EF4-FFF2-40B4-BE49-F238E27FC236}">
+                <a16:creationId xmlns:a16="http://schemas.microsoft.com/office/drawing/2014/main" id="{E4B36518-440C-4DCC-B26D-4C2FF3468013}"/>
+              </a:ext>
+            </a:extLst>
+          </p:cNvPr>
+          <p:cNvSpPr>
+            <a:spLocks noGrp="1"/>
+          </p:cNvSpPr>
+          <p:nvPr/>
+        </p:nvSpPr>
+        <p:spPr>
+          <a:xfrm>
+            <a:off x="3324225" y="1876425"/>
+            <a:ext cx="5238750" cy="400050"/>
+          </a:xfrm>
+          <a:prstGeom prst="rect">
+            <a:avLst/>
+          </a:prstGeom>
+          <a:noFill/>
+          <a:ln w="0">
+            <a:noFill/>
+          </a:ln>
+        </p:spPr>
+        <p:txBody>
+          <a:bodyPr wrap="square" lIns="0" tIns="0" rIns="0" bIns="0" anchor="t">
             <a:normAutofit fontScale="100000"/>
           </a:bodyPr>
-          <a:lstStyle xmlns:a="http://schemas.openxmlformats.org/drawingml/2006/main"/>
-          <a:p xmlns:a="http://schemas.openxmlformats.org/drawingml/2006/main">
+          <a:lstStyle/>
+          <a:p>
             <a:pPr>
               <a:defRPr sz="1350" b="0">
                 <a:solidFill>
@@ -18004,18 +17290,736 @@
                 <a:ea typeface="Arial"/>
                 <a:cs typeface="Arial"/>
               </a:rPr>
-              <a:t>This is a token estimate, not a cloud bill. Google Search grounding, Cloud Run, Firestore and networking are excluded. Production cost depends on usage.</a:t>
+              <a:t>Ed25519-signed; any edit fails. Demo: “Try changing the price”</a:t>
             </a:r>
           </a:p>
         </p:txBody>
       </p:sp>
+      <p:sp>
+        <p:nvSpPr>
+          <p:cNvPr id="205" name="trust-rule-1">
+            <a:extLst>
+              <a:ext uri="{FF2B5EF4-FFF2-40B4-BE49-F238E27FC236}">
+                <a16:creationId xmlns:a16="http://schemas.microsoft.com/office/drawing/2014/main" id="{7FC6007B-C4A5-4369-972C-B6F2D8576849}"/>
+              </a:ext>
+            </a:extLst>
+          </p:cNvPr>
+          <p:cNvSpPr>
+            <a:spLocks noGrp="1"/>
+          </p:cNvSpPr>
+          <p:nvPr/>
+        </p:nvSpPr>
+        <p:spPr>
+          <a:xfrm>
+            <a:off x="523875" y="2295525"/>
+            <a:ext cx="8048625" cy="9525"/>
+          </a:xfrm>
+          <a:prstGeom prst="rect">
+            <a:avLst/>
+          </a:prstGeom>
+          <a:solidFill>
+            <a:srgbClr val="D8D8D8"/>
+          </a:solidFill>
+          <a:ln w="0">
+            <a:noFill/>
+          </a:ln>
+        </p:spPr>
+      </p:sp>
+      <p:sp>
+        <p:nvSpPr>
+          <p:cNvPr id="206" name="trust-label-2">
+            <a:extLst>
+              <a:ext uri="{FF2B5EF4-FFF2-40B4-BE49-F238E27FC236}">
+                <a16:creationId xmlns:a16="http://schemas.microsoft.com/office/drawing/2014/main" id="{1E2ADF80-DE49-4419-90BF-B51735CF84D9}"/>
+              </a:ext>
+            </a:extLst>
+          </p:cNvPr>
+          <p:cNvSpPr>
+            <a:spLocks noGrp="1"/>
+          </p:cNvSpPr>
+          <p:nvPr/>
+        </p:nvSpPr>
+        <p:spPr>
+          <a:xfrm>
+            <a:off x="523875" y="2352675"/>
+            <a:ext cx="2714625" cy="285750"/>
+          </a:xfrm>
+          <a:prstGeom prst="rect">
+            <a:avLst/>
+          </a:prstGeom>
+          <a:noFill/>
+          <a:ln w="0">
+            <a:noFill/>
+          </a:ln>
+        </p:spPr>
+        <p:txBody>
+          <a:bodyPr wrap="square" lIns="0" tIns="0" rIns="0" bIns="0" anchor="t">
+            <a:normAutofit fontScale="100000"/>
+          </a:bodyPr>
+          <a:lstStyle/>
+          <a:p>
+            <a:pPr>
+              <a:defRPr sz="1500" b="1">
+                <a:solidFill>
+                  <a:srgbClr val="161616"/>
+                </a:solidFill>
+                <a:latin typeface="Arial"/>
+                <a:ea typeface="Arial"/>
+                <a:cs typeface="Arial"/>
+              </a:defRPr>
+            </a:pPr>
+            <a:r>
+              <a:rPr sz="1500" b="1">
+                <a:solidFill>
+                  <a:srgbClr val="161616"/>
+                </a:solidFill>
+                <a:latin typeface="Arial"/>
+                <a:ea typeface="Arial"/>
+                <a:cs typeface="Arial"/>
+              </a:rPr>
+              <a:t>Model Armor</a:t>
+            </a:r>
+          </a:p>
+        </p:txBody>
+      </p:sp>
+      <p:sp>
+        <p:nvSpPr>
+          <p:cNvPr id="207" name="trust-desc-2">
+            <a:extLst>
+              <a:ext uri="{FF2B5EF4-FFF2-40B4-BE49-F238E27FC236}">
+                <a16:creationId xmlns:a16="http://schemas.microsoft.com/office/drawing/2014/main" id="{E8FA3B8F-4642-416B-A5C4-555C93DD5035}"/>
+              </a:ext>
+            </a:extLst>
+          </p:cNvPr>
+          <p:cNvSpPr>
+            <a:spLocks noGrp="1"/>
+          </p:cNvSpPr>
+          <p:nvPr/>
+        </p:nvSpPr>
+        <p:spPr>
+          <a:xfrm>
+            <a:off x="3324225" y="2352675"/>
+            <a:ext cx="5238750" cy="400050"/>
+          </a:xfrm>
+          <a:prstGeom prst="rect">
+            <a:avLst/>
+          </a:prstGeom>
+          <a:noFill/>
+          <a:ln w="0">
+            <a:noFill/>
+          </a:ln>
+        </p:spPr>
+        <p:txBody>
+          <a:bodyPr wrap="square" lIns="0" tIns="0" rIns="0" bIns="0" anchor="t">
+            <a:normAutofit fontScale="100000"/>
+          </a:bodyPr>
+          <a:lstStyle/>
+          <a:p>
+            <a:pPr>
+              <a:defRPr sz="1350" b="0">
+                <a:solidFill>
+                  <a:srgbClr val="444444"/>
+                </a:solidFill>
+                <a:latin typeface="Arial"/>
+                <a:ea typeface="Arial"/>
+                <a:cs typeface="Arial"/>
+              </a:defRPr>
+            </a:pPr>
+            <a:r>
+              <a:rPr sz="1350" b="0">
+                <a:solidFill>
+                  <a:srgbClr val="444444"/>
+                </a:solidFill>
+                <a:latin typeface="Arial"/>
+                <a:ea typeface="Arial"/>
+                <a:cs typeface="Arial"/>
+              </a:rPr>
+              <a:t>Screens every message from other agents for prompt injection</a:t>
+            </a:r>
+          </a:p>
+        </p:txBody>
+      </p:sp>
+      <p:sp>
+        <p:nvSpPr>
+          <p:cNvPr id="208" name="trust-rule-2">
+            <a:extLst>
+              <a:ext uri="{FF2B5EF4-FFF2-40B4-BE49-F238E27FC236}">
+                <a16:creationId xmlns:a16="http://schemas.microsoft.com/office/drawing/2014/main" id="{5C17DB77-BE48-49C7-9722-FAEA26B2820B}"/>
+              </a:ext>
+            </a:extLst>
+          </p:cNvPr>
+          <p:cNvSpPr>
+            <a:spLocks noGrp="1"/>
+          </p:cNvSpPr>
+          <p:nvPr/>
+        </p:nvSpPr>
+        <p:spPr>
+          <a:xfrm>
+            <a:off x="523875" y="2771775"/>
+            <a:ext cx="8048625" cy="9525"/>
+          </a:xfrm>
+          <a:prstGeom prst="rect">
+            <a:avLst/>
+          </a:prstGeom>
+          <a:solidFill>
+            <a:srgbClr val="D8D8D8"/>
+          </a:solidFill>
+          <a:ln w="0">
+            <a:noFill/>
+          </a:ln>
+        </p:spPr>
+      </p:sp>
+      <p:sp>
+        <p:nvSpPr>
+          <p:cNvPr id="209" name="trust-label-3">
+            <a:extLst>
+              <a:ext uri="{FF2B5EF4-FFF2-40B4-BE49-F238E27FC236}">
+                <a16:creationId xmlns:a16="http://schemas.microsoft.com/office/drawing/2014/main" id="{6606DE32-A264-4C34-9AA0-D2608F344A0F}"/>
+              </a:ext>
+            </a:extLst>
+          </p:cNvPr>
+          <p:cNvSpPr>
+            <a:spLocks noGrp="1"/>
+          </p:cNvSpPr>
+          <p:nvPr/>
+        </p:nvSpPr>
+        <p:spPr>
+          <a:xfrm>
+            <a:off x="523875" y="2828925"/>
+            <a:ext cx="2714625" cy="285750"/>
+          </a:xfrm>
+          <a:prstGeom prst="rect">
+            <a:avLst/>
+          </a:prstGeom>
+          <a:noFill/>
+          <a:ln w="0">
+            <a:noFill/>
+          </a:ln>
+        </p:spPr>
+        <p:txBody>
+          <a:bodyPr wrap="square" lIns="0" tIns="0" rIns="0" bIns="0" anchor="t">
+            <a:normAutofit fontScale="100000"/>
+          </a:bodyPr>
+          <a:lstStyle/>
+          <a:p>
+            <a:pPr>
+              <a:defRPr sz="1500" b="1">
+                <a:solidFill>
+                  <a:srgbClr val="161616"/>
+                </a:solidFill>
+                <a:latin typeface="Arial"/>
+                <a:ea typeface="Arial"/>
+                <a:cs typeface="Arial"/>
+              </a:defRPr>
+            </a:pPr>
+            <a:r>
+              <a:rPr sz="1500" b="1">
+                <a:solidFill>
+                  <a:srgbClr val="161616"/>
+                </a:solidFill>
+                <a:latin typeface="Arial"/>
+                <a:ea typeface="Arial"/>
+                <a:cs typeface="Arial"/>
+              </a:rPr>
+              <a:t>No overselling</a:t>
+            </a:r>
+          </a:p>
+        </p:txBody>
+      </p:sp>
+      <p:sp>
+        <p:nvSpPr>
+          <p:cNvPr id="210" name="trust-desc-3">
+            <a:extLst>
+              <a:ext uri="{FF2B5EF4-FFF2-40B4-BE49-F238E27FC236}">
+                <a16:creationId xmlns:a16="http://schemas.microsoft.com/office/drawing/2014/main" id="{37D2A817-21B7-4522-A73F-056BD95468FA}"/>
+              </a:ext>
+            </a:extLst>
+          </p:cNvPr>
+          <p:cNvSpPr>
+            <a:spLocks noGrp="1"/>
+          </p:cNvSpPr>
+          <p:nvPr/>
+        </p:nvSpPr>
+        <p:spPr>
+          <a:xfrm>
+            <a:off x="3324225" y="2828925"/>
+            <a:ext cx="5238750" cy="400050"/>
+          </a:xfrm>
+          <a:prstGeom prst="rect">
+            <a:avLst/>
+          </a:prstGeom>
+          <a:noFill/>
+          <a:ln w="0">
+            <a:noFill/>
+          </a:ln>
+        </p:spPr>
+        <p:txBody>
+          <a:bodyPr wrap="square" lIns="0" tIns="0" rIns="0" bIns="0" anchor="t">
+            <a:normAutofit fontScale="100000"/>
+          </a:bodyPr>
+          <a:lstStyle/>
+          <a:p>
+            <a:pPr>
+              <a:defRPr sz="1350" b="0">
+                <a:solidFill>
+                  <a:srgbClr val="444444"/>
+                </a:solidFill>
+                <a:latin typeface="Arial"/>
+                <a:ea typeface="Arial"/>
+                <a:cs typeface="Arial"/>
+              </a:defRPr>
+            </a:pPr>
+            <a:r>
+              <a:rPr sz="1350" b="0">
+                <a:solidFill>
+                  <a:srgbClr val="444444"/>
+                </a:solidFill>
+                <a:latin typeface="Arial"/>
+                <a:ea typeface="Arial"/>
+                <a:cs typeface="Arial"/>
+              </a:rPr>
+              <a:t>Per-buyer limits and atomic stock holds</a:t>
+            </a:r>
+          </a:p>
+        </p:txBody>
+      </p:sp>
+      <p:sp>
+        <p:nvSpPr>
+          <p:cNvPr id="211" name="trust-rule-3">
+            <a:extLst>
+              <a:ext uri="{FF2B5EF4-FFF2-40B4-BE49-F238E27FC236}">
+                <a16:creationId xmlns:a16="http://schemas.microsoft.com/office/drawing/2014/main" id="{6DA57FBA-32BC-4A96-93AE-1893C01314E8}"/>
+              </a:ext>
+            </a:extLst>
+          </p:cNvPr>
+          <p:cNvSpPr>
+            <a:spLocks noGrp="1"/>
+          </p:cNvSpPr>
+          <p:nvPr/>
+        </p:nvSpPr>
+        <p:spPr>
+          <a:xfrm>
+            <a:off x="523875" y="3248025"/>
+            <a:ext cx="8048625" cy="9525"/>
+          </a:xfrm>
+          <a:prstGeom prst="rect">
+            <a:avLst/>
+          </a:prstGeom>
+          <a:solidFill>
+            <a:srgbClr val="D8D8D8"/>
+          </a:solidFill>
+          <a:ln w="0">
+            <a:noFill/>
+          </a:ln>
+        </p:spPr>
+      </p:sp>
+      <p:sp>
+        <p:nvSpPr>
+          <p:cNvPr id="212" name="trust-label-4">
+            <a:extLst>
+              <a:ext uri="{FF2B5EF4-FFF2-40B4-BE49-F238E27FC236}">
+                <a16:creationId xmlns:a16="http://schemas.microsoft.com/office/drawing/2014/main" id="{4DA1622D-B8DF-40A3-B2A6-CAEC0CD79027}"/>
+              </a:ext>
+            </a:extLst>
+          </p:cNvPr>
+          <p:cNvSpPr>
+            <a:spLocks noGrp="1"/>
+          </p:cNvSpPr>
+          <p:nvPr/>
+        </p:nvSpPr>
+        <p:spPr>
+          <a:xfrm>
+            <a:off x="523875" y="3305175"/>
+            <a:ext cx="2714625" cy="285750"/>
+          </a:xfrm>
+          <a:prstGeom prst="rect">
+            <a:avLst/>
+          </a:prstGeom>
+          <a:noFill/>
+          <a:ln w="0">
+            <a:noFill/>
+          </a:ln>
+        </p:spPr>
+        <p:txBody>
+          <a:bodyPr wrap="square" lIns="0" tIns="0" rIns="0" bIns="0" anchor="t">
+            <a:normAutofit fontScale="100000"/>
+          </a:bodyPr>
+          <a:lstStyle/>
+          <a:p>
+            <a:pPr>
+              <a:defRPr sz="1500" b="1">
+                <a:solidFill>
+                  <a:srgbClr val="161616"/>
+                </a:solidFill>
+                <a:latin typeface="Arial"/>
+                <a:ea typeface="Arial"/>
+                <a:cs typeface="Arial"/>
+              </a:defRPr>
+            </a:pPr>
+            <a:r>
+              <a:rPr sz="1500" b="1">
+                <a:solidFill>
+                  <a:srgbClr val="161616"/>
+                </a:solidFill>
+                <a:latin typeface="Arial"/>
+                <a:ea typeface="Arial"/>
+                <a:cs typeface="Arial"/>
+              </a:rPr>
+              <a:t>Seller record</a:t>
+            </a:r>
+          </a:p>
+        </p:txBody>
+      </p:sp>
+      <p:sp>
+        <p:nvSpPr>
+          <p:cNvPr id="213" name="trust-desc-4">
+            <a:extLst>
+              <a:ext uri="{FF2B5EF4-FFF2-40B4-BE49-F238E27FC236}">
+                <a16:creationId xmlns:a16="http://schemas.microsoft.com/office/drawing/2014/main" id="{4FA94DED-7A0B-410F-8873-6BBCB4B6A911}"/>
+              </a:ext>
+            </a:extLst>
+          </p:cNvPr>
+          <p:cNvSpPr>
+            <a:spLocks noGrp="1"/>
+          </p:cNvSpPr>
+          <p:nvPr/>
+        </p:nvSpPr>
+        <p:spPr>
+          <a:xfrm>
+            <a:off x="3324225" y="3305175"/>
+            <a:ext cx="5238750" cy="400050"/>
+          </a:xfrm>
+          <a:prstGeom prst="rect">
+            <a:avLst/>
+          </a:prstGeom>
+          <a:noFill/>
+          <a:ln w="0">
+            <a:noFill/>
+          </a:ln>
+        </p:spPr>
+        <p:txBody>
+          <a:bodyPr wrap="square" lIns="0" tIns="0" rIns="0" bIns="0" anchor="t">
+            <a:normAutofit fontScale="100000"/>
+          </a:bodyPr>
+          <a:lstStyle/>
+          <a:p>
+            <a:pPr>
+              <a:defRPr sz="1350" b="0">
+                <a:solidFill>
+                  <a:srgbClr val="444444"/>
+                </a:solidFill>
+                <a:latin typeface="Arial"/>
+                <a:ea typeface="Arial"/>
+                <a:cs typeface="Arial"/>
+              </a:defRPr>
+            </a:pPr>
+            <a:r>
+              <a:rPr sz="1350" b="0">
+                <a:solidFill>
+                  <a:srgbClr val="444444"/>
+                </a:solidFill>
+                <a:latin typeface="Arial"/>
+                <a:ea typeface="Arial"/>
+                <a:cs typeface="Arial"/>
+              </a:rPr>
+              <a:t>Public record counts problems from signed receipts</a:t>
+            </a:r>
+          </a:p>
+        </p:txBody>
+      </p:sp>
+      <p:sp>
+        <p:nvSpPr>
+          <p:cNvPr id="214" name="trust-rule-4">
+            <a:extLst>
+              <a:ext uri="{FF2B5EF4-FFF2-40B4-BE49-F238E27FC236}">
+                <a16:creationId xmlns:a16="http://schemas.microsoft.com/office/drawing/2014/main" id="{BD9C8BD4-63D6-4B52-A903-DCCE1D91C5D8}"/>
+              </a:ext>
+            </a:extLst>
+          </p:cNvPr>
+          <p:cNvSpPr>
+            <a:spLocks noGrp="1"/>
+          </p:cNvSpPr>
+          <p:nvPr/>
+        </p:nvSpPr>
+        <p:spPr>
+          <a:xfrm>
+            <a:off x="523875" y="3724275"/>
+            <a:ext cx="8048625" cy="9525"/>
+          </a:xfrm>
+          <a:prstGeom prst="rect">
+            <a:avLst/>
+          </a:prstGeom>
+          <a:solidFill>
+            <a:srgbClr val="D8D8D8"/>
+          </a:solidFill>
+          <a:ln w="0">
+            <a:noFill/>
+          </a:ln>
+        </p:spPr>
+      </p:sp>
+      <p:sp>
+        <p:nvSpPr>
+          <p:cNvPr id="215" name="trust-label-5">
+            <a:extLst>
+              <a:ext uri="{FF2B5EF4-FFF2-40B4-BE49-F238E27FC236}">
+                <a16:creationId xmlns:a16="http://schemas.microsoft.com/office/drawing/2014/main" id="{7F7FC35F-157B-4123-B8F2-874FA6076F18}"/>
+              </a:ext>
+            </a:extLst>
+          </p:cNvPr>
+          <p:cNvSpPr>
+            <a:spLocks noGrp="1"/>
+          </p:cNvSpPr>
+          <p:nvPr/>
+        </p:nvSpPr>
+        <p:spPr>
+          <a:xfrm>
+            <a:off x="523875" y="3781425"/>
+            <a:ext cx="2714625" cy="285750"/>
+          </a:xfrm>
+          <a:prstGeom prst="rect">
+            <a:avLst/>
+          </a:prstGeom>
+          <a:noFill/>
+          <a:ln w="0">
+            <a:noFill/>
+          </a:ln>
+        </p:spPr>
+        <p:txBody>
+          <a:bodyPr wrap="square" lIns="0" tIns="0" rIns="0" bIns="0" anchor="t">
+            <a:normAutofit fontScale="100000"/>
+          </a:bodyPr>
+          <a:lstStyle/>
+          <a:p>
+            <a:pPr>
+              <a:defRPr sz="1500" b="1">
+                <a:solidFill>
+                  <a:srgbClr val="161616"/>
+                </a:solidFill>
+                <a:latin typeface="Arial"/>
+                <a:ea typeface="Arial"/>
+                <a:cs typeface="Arial"/>
+              </a:defRPr>
+            </a:pPr>
+            <a:r>
+              <a:rPr sz="1500" b="1">
+                <a:solidFill>
+                  <a:srgbClr val="161616"/>
+                </a:solidFill>
+                <a:latin typeface="Arial"/>
+                <a:ea typeface="Arial"/>
+                <a:cs typeface="Arial"/>
+              </a:rPr>
+              <a:t>App Check</a:t>
+            </a:r>
+          </a:p>
+        </p:txBody>
+      </p:sp>
+      <p:sp>
+        <p:nvSpPr>
+          <p:cNvPr id="216" name="trust-desc-5">
+            <a:extLst>
+              <a:ext uri="{FF2B5EF4-FFF2-40B4-BE49-F238E27FC236}">
+                <a16:creationId xmlns:a16="http://schemas.microsoft.com/office/drawing/2014/main" id="{2029E64E-53AE-495C-8A70-0255D58920E6}"/>
+              </a:ext>
+            </a:extLst>
+          </p:cNvPr>
+          <p:cNvSpPr>
+            <a:spLocks noGrp="1"/>
+          </p:cNvSpPr>
+          <p:nvPr/>
+        </p:nvSpPr>
+        <p:spPr>
+          <a:xfrm>
+            <a:off x="3324225" y="3781425"/>
+            <a:ext cx="5238750" cy="400050"/>
+          </a:xfrm>
+          <a:prstGeom prst="rect">
+            <a:avLst/>
+          </a:prstGeom>
+          <a:noFill/>
+          <a:ln w="0">
+            <a:noFill/>
+          </a:ln>
+        </p:spPr>
+        <p:txBody>
+          <a:bodyPr wrap="square" lIns="0" tIns="0" rIns="0" bIns="0" anchor="t">
+            <a:normAutofit fontScale="100000"/>
+          </a:bodyPr>
+          <a:lstStyle/>
+          <a:p>
+            <a:pPr>
+              <a:defRPr sz="1350" b="0">
+                <a:solidFill>
+                  <a:srgbClr val="444444"/>
+                </a:solidFill>
+                <a:latin typeface="Arial"/>
+                <a:ea typeface="Arial"/>
+                <a:cs typeface="Arial"/>
+              </a:defRPr>
+            </a:pPr>
+            <a:r>
+              <a:rPr sz="1350" b="0">
+                <a:solidFill>
+                  <a:srgbClr val="444444"/>
+                </a:solidFill>
+                <a:latin typeface="Arial"/>
+                <a:ea typeface="Arial"/>
+                <a:cs typeface="Arial"/>
+              </a:rPr>
+              <a:t>Checks every write; unverified browsers are rate-limited</a:t>
+            </a:r>
+          </a:p>
+        </p:txBody>
+      </p:sp>
+      <p:sp>
+        <p:nvSpPr>
+          <p:cNvPr id="217" name="trust-rule-5">
+            <a:extLst>
+              <a:ext uri="{FF2B5EF4-FFF2-40B4-BE49-F238E27FC236}">
+                <a16:creationId xmlns:a16="http://schemas.microsoft.com/office/drawing/2014/main" id="{6C65EBE2-8D16-4D24-BFD7-953FDFE208D6}"/>
+              </a:ext>
+            </a:extLst>
+          </p:cNvPr>
+          <p:cNvSpPr>
+            <a:spLocks noGrp="1"/>
+          </p:cNvSpPr>
+          <p:nvPr/>
+        </p:nvSpPr>
+        <p:spPr>
+          <a:xfrm>
+            <a:off x="523875" y="4200525"/>
+            <a:ext cx="8048625" cy="9525"/>
+          </a:xfrm>
+          <a:prstGeom prst="rect">
+            <a:avLst/>
+          </a:prstGeom>
+          <a:solidFill>
+            <a:srgbClr val="D8D8D8"/>
+          </a:solidFill>
+          <a:ln w="0">
+            <a:noFill/>
+          </a:ln>
+        </p:spPr>
+      </p:sp>
+      <p:sp>
+        <p:nvSpPr>
+          <p:cNvPr id="218" name="trust-label-6">
+            <a:extLst>
+              <a:ext uri="{FF2B5EF4-FFF2-40B4-BE49-F238E27FC236}">
+                <a16:creationId xmlns:a16="http://schemas.microsoft.com/office/drawing/2014/main" id="{ADEB4F0F-A210-41C3-8C88-79CE64E51AA9}"/>
+              </a:ext>
+            </a:extLst>
+          </p:cNvPr>
+          <p:cNvSpPr>
+            <a:spLocks noGrp="1"/>
+          </p:cNvSpPr>
+          <p:nvPr/>
+        </p:nvSpPr>
+        <p:spPr>
+          <a:xfrm>
+            <a:off x="523875" y="4257675"/>
+            <a:ext cx="2714625" cy="285750"/>
+          </a:xfrm>
+          <a:prstGeom prst="rect">
+            <a:avLst/>
+          </a:prstGeom>
+          <a:noFill/>
+          <a:ln w="0">
+            <a:noFill/>
+          </a:ln>
+        </p:spPr>
+        <p:txBody>
+          <a:bodyPr wrap="square" lIns="0" tIns="0" rIns="0" bIns="0" anchor="t">
+            <a:normAutofit fontScale="100000"/>
+          </a:bodyPr>
+          <a:lstStyle/>
+          <a:p>
+            <a:pPr>
+              <a:defRPr sz="1500" b="1">
+                <a:solidFill>
+                  <a:srgbClr val="161616"/>
+                </a:solidFill>
+                <a:latin typeface="Arial"/>
+                <a:ea typeface="Arial"/>
+                <a:cs typeface="Arial"/>
+              </a:defRPr>
+            </a:pPr>
+            <a:r>
+              <a:rPr sz="1500" b="1">
+                <a:solidFill>
+                  <a:srgbClr val="161616"/>
+                </a:solidFill>
+                <a:latin typeface="Arial"/>
+                <a:ea typeface="Arial"/>
+                <a:cs typeface="Arial"/>
+              </a:rPr>
+              <a:t>Demo payments</a:t>
+            </a:r>
+          </a:p>
+        </p:txBody>
+      </p:sp>
+      <p:sp>
+        <p:nvSpPr>
+          <p:cNvPr id="219" name="trust-desc-6">
+            <a:extLst>
+              <a:ext uri="{FF2B5EF4-FFF2-40B4-BE49-F238E27FC236}">
+                <a16:creationId xmlns:a16="http://schemas.microsoft.com/office/drawing/2014/main" id="{D15180C2-1A42-424E-96A1-79006A17B70A}"/>
+              </a:ext>
+            </a:extLst>
+          </p:cNvPr>
+          <p:cNvSpPr>
+            <a:spLocks noGrp="1"/>
+          </p:cNvSpPr>
+          <p:nvPr/>
+        </p:nvSpPr>
+        <p:spPr>
+          <a:xfrm>
+            <a:off x="3324225" y="4257675"/>
+            <a:ext cx="5238750" cy="400050"/>
+          </a:xfrm>
+          <a:prstGeom prst="rect">
+            <a:avLst/>
+          </a:prstGeom>
+          <a:noFill/>
+          <a:ln w="0">
+            <a:noFill/>
+          </a:ln>
+        </p:spPr>
+        <p:txBody>
+          <a:bodyPr wrap="square" lIns="0" tIns="0" rIns="0" bIns="0" anchor="t">
+            <a:normAutofit fontScale="100000"/>
+          </a:bodyPr>
+          <a:lstStyle/>
+          <a:p>
+            <a:pPr>
+              <a:defRPr sz="1350" b="0">
+                <a:solidFill>
+                  <a:srgbClr val="444444"/>
+                </a:solidFill>
+                <a:latin typeface="Arial"/>
+                <a:ea typeface="Arial"/>
+                <a:cs typeface="Arial"/>
+              </a:defRPr>
+            </a:pPr>
+            <a:r>
+              <a:rPr sz="1350" b="0">
+                <a:solidFill>
+                  <a:srgbClr val="444444"/>
+                </a:solidFill>
+                <a:latin typeface="Arial"/>
+                <a:ea typeface="Arial"/>
+                <a:cs typeface="Arial"/>
+              </a:rPr>
+              <a:t>Clearly tagged test mode; no real money moves</a:t>
+            </a:r>
+          </a:p>
+        </p:txBody>
+      </p:sp>
     </p:spTree>
-    <p:extLst>
-      <p:ext uri="{BB962C8B-B14F-4D97-AF65-F5344CB8AC3E}">
-        <p14:creationId xmlns:p14="http://schemas.microsoft.com/office/powerpoint/2010/main" val="1223253623"/>
-      </p:ext>
-    </p:extLst>
   </p:cSld>
+  <p:clrMapOvr>
+    <a:masterClrMapping/>
+  </p:clrMapOvr>
 </p:sld>
 </file>
 
